--- a/densol_pitch.pptx
+++ b/densol_pitch.pptx
@@ -1391,7 +1391,7 @@
     <p:bg>
       <p:bgPr>
         <a:solidFill>
-          <a:srgbClr val="080C18"/>
+          <a:srgbClr val="090A0E"/>
         </a:solidFill>
       </p:bgPr>
     </p:bg>
@@ -1417,18 +1417,22 @@
         </p:nvSpPr>
         <p:spPr>
           <a:xfrm>
-            <a:off x="0" y="0"/>
-            <a:ext cx="164592" cy="5143500"/>
-          </a:xfrm>
-          <a:prstGeom prst="rect">
+            <a:off x="-1371600" y="-2286000"/>
+            <a:ext cx="11887200" cy="4572000"/>
+          </a:xfrm>
+          <a:prstGeom prst="ellipse">
             <a:avLst/>
           </a:prstGeom>
           <a:solidFill>
-            <a:srgbClr val="9945FF"/>
+            <a:srgbClr val="2CDD6D">
+              <a:alpha val="8000"/>
+            </a:srgbClr>
           </a:solidFill>
           <a:ln w="12700">
             <a:solidFill>
-              <a:srgbClr val="9945FF"/>
+              <a:srgbClr val="2CDD6D">
+                <a:alpha val="0"/>
+              </a:srgbClr>
             </a:solidFill>
             <a:prstDash val="solid"/>
           </a:ln>
@@ -1436,39 +1440,14 @@
       </p:sp>
       <p:sp>
         <p:nvSpPr>
-          <p:cNvPr id="3" name="Shape 1"/>
-          <p:cNvSpPr/>
-          <p:nvPr/>
-        </p:nvSpPr>
-        <p:spPr>
-          <a:xfrm>
-            <a:off x="164592" y="960120"/>
-            <a:ext cx="8979408" cy="36576"/>
-          </a:xfrm>
-          <a:prstGeom prst="rect">
-            <a:avLst/>
-          </a:prstGeom>
-          <a:solidFill>
-            <a:srgbClr val="14F195"/>
-          </a:solidFill>
-          <a:ln w="12700">
-            <a:solidFill>
-              <a:srgbClr val="14F195"/>
-            </a:solidFill>
-            <a:prstDash val="solid"/>
-          </a:ln>
-        </p:spPr>
-      </p:sp>
-      <p:sp>
-        <p:nvSpPr>
-          <p:cNvPr id="4" name="Text 2"/>
-          <p:cNvSpPr/>
-          <p:nvPr/>
-        </p:nvSpPr>
-        <p:spPr>
-          <a:xfrm>
-            <a:off x="411480" y="1143000"/>
-            <a:ext cx="8321040" cy="1463040"/>
+          <p:cNvPr id="3" name="Text 1"/>
+          <p:cNvSpPr/>
+          <p:nvPr/>
+        </p:nvSpPr>
+        <p:spPr>
+          <a:xfrm>
+            <a:off x="640080" y="1280160"/>
+            <a:ext cx="7863840" cy="1554480"/>
           </a:xfrm>
           <a:prstGeom prst="rect">
             <a:avLst/>
@@ -1484,9 +1463,9 @@
               <a:buNone/>
             </a:pPr>
             <a:r>
-              <a:rPr lang="en-US" sz="8000" b="1" dirty="0">
+              <a:rPr lang="en-US" sz="8400" b="1" dirty="0">
                 <a:solidFill>
-                  <a:srgbClr val="FFFFFF"/>
+                  <a:srgbClr val="F1F5F9"/>
                 </a:solidFill>
                 <a:latin typeface="Consolas" pitchFamily="34" charset="0"/>
                 <a:ea typeface="Consolas" pitchFamily="34" charset="-122"/>
@@ -1494,20 +1473,45 @@
               </a:rPr>
               <a:t>densol</a:t>
             </a:r>
-            <a:endParaRPr lang="en-US" sz="8000" dirty="0"/>
+            <a:endParaRPr lang="en-US" sz="8400" dirty="0"/>
           </a:p>
         </p:txBody>
       </p:sp>
       <p:sp>
         <p:nvSpPr>
+          <p:cNvPr id="4" name="Shape 2"/>
+          <p:cNvSpPr/>
+          <p:nvPr/>
+        </p:nvSpPr>
+        <p:spPr>
+          <a:xfrm>
+            <a:off x="640080" y="2926080"/>
+            <a:ext cx="2926080" cy="22860"/>
+          </a:xfrm>
+          <a:prstGeom prst="rect">
+            <a:avLst/>
+          </a:prstGeom>
+          <a:solidFill>
+            <a:srgbClr val="4ADE80"/>
+          </a:solidFill>
+          <a:ln w="12700">
+            <a:solidFill>
+              <a:srgbClr val="4ADE80"/>
+            </a:solidFill>
+            <a:prstDash val="solid"/>
+          </a:ln>
+        </p:spPr>
+      </p:sp>
+      <p:sp>
+        <p:nvSpPr>
           <p:cNvPr id="5" name="Text 3"/>
           <p:cNvSpPr/>
           <p:nvPr/>
         </p:nvSpPr>
         <p:spPr>
           <a:xfrm>
-            <a:off x="411480" y="2606040"/>
-            <a:ext cx="8321040" cy="594360"/>
+            <a:off x="640080" y="3063240"/>
+            <a:ext cx="7863840" cy="548640"/>
           </a:xfrm>
           <a:prstGeom prst="rect">
             <a:avLst/>
@@ -1523,17 +1527,17 @@
               <a:buNone/>
             </a:pPr>
             <a:r>
-              <a:rPr lang="en-US" sz="2600" dirty="0">
+              <a:rPr lang="en-US" sz="2000" dirty="0">
                 <a:solidFill>
-                  <a:srgbClr val="14F195"/>
+                  <a:srgbClr val="9CA3AF"/>
                 </a:solidFill>
                 <a:latin typeface="Calibri" pitchFamily="34" charset="0"/>
                 <a:ea typeface="Calibri" pitchFamily="34" charset="-122"/>
                 <a:cs typeface="Calibri" pitchFamily="34" charset="-120"/>
               </a:rPr>
-              <a:t>On-Chain Compression for Solana</a:t>
-            </a:r>
-            <a:endParaRPr lang="en-US" sz="2600" dirty="0"/>
+              <a:t>On-chain compression for Solana Anchor programs</a:t>
+            </a:r>
+            <a:endParaRPr lang="en-US" sz="2000" dirty="0"/>
           </a:p>
         </p:txBody>
       </p:sp>
@@ -1545,8 +1549,8 @@
         </p:nvSpPr>
         <p:spPr>
           <a:xfrm>
-            <a:off x="411480" y="3337560"/>
-            <a:ext cx="8321040" cy="502920"/>
+            <a:off x="640080" y="3749040"/>
+            <a:ext cx="7863840" cy="411480"/>
           </a:xfrm>
           <a:prstGeom prst="rect">
             <a:avLst/>
@@ -1562,55 +1566,30 @@
               <a:buNone/>
             </a:pPr>
             <a:r>
-              <a:rPr lang="en-US" sz="1800" i="1" dirty="0">
+              <a:rPr lang="en-US" sz="1300" dirty="0">
                 <a:solidFill>
-                  <a:srgbClr val="7B8CAA"/>
+                  <a:srgbClr val="4ADE80"/>
                 </a:solidFill>
-                <a:latin typeface="Calibri" pitchFamily="34" charset="0"/>
-                <a:ea typeface="Calibri" pitchFamily="34" charset="-122"/>
-                <a:cs typeface="Calibri" pitchFamily="34" charset="-120"/>
+                <a:latin typeface="Consolas" pitchFamily="34" charset="0"/>
+                <a:ea typeface="Consolas" pitchFamily="34" charset="-122"/>
+                <a:cs typeface="Consolas" pitchFamily="34" charset="-120"/>
               </a:rPr>
-              <a:t>Up to 54× compression.  Data stays on-chain.  Zero off-chain infrastructure.</a:t>
-            </a:r>
-            <a:endParaRPr lang="en-US" sz="1800" dirty="0"/>
+              <a:t>Up to 54× compression  ·  Data stays on-chain  ·  Zero off-chain infrastructure</a:t>
+            </a:r>
+            <a:endParaRPr lang="en-US" sz="1300" dirty="0"/>
           </a:p>
         </p:txBody>
       </p:sp>
       <p:sp>
         <p:nvSpPr>
-          <p:cNvPr id="7" name="Shape 5"/>
-          <p:cNvSpPr/>
-          <p:nvPr/>
-        </p:nvSpPr>
-        <p:spPr>
-          <a:xfrm>
-            <a:off x="0" y="4800600"/>
-            <a:ext cx="9144000" cy="342900"/>
-          </a:xfrm>
-          <a:prstGeom prst="rect">
-            <a:avLst/>
-          </a:prstGeom>
-          <a:solidFill>
-            <a:srgbClr val="9945FF"/>
-          </a:solidFill>
-          <a:ln w="12700">
-            <a:solidFill>
-              <a:srgbClr val="9945FF"/>
-            </a:solidFill>
-            <a:prstDash val="solid"/>
-          </a:ln>
-        </p:spPr>
-      </p:sp>
-      <p:sp>
-        <p:nvSpPr>
-          <p:cNvPr id="8" name="Text 6"/>
-          <p:cNvSpPr/>
-          <p:nvPr/>
-        </p:nvSpPr>
-        <p:spPr>
-          <a:xfrm>
-            <a:off x="0" y="4800600"/>
-            <a:ext cx="9144000" cy="342900"/>
+          <p:cNvPr id="7" name="Text 5"/>
+          <p:cNvSpPr/>
+          <p:nvPr/>
+        </p:nvSpPr>
+        <p:spPr>
+          <a:xfrm>
+            <a:off x="640080" y="4663440"/>
+            <a:ext cx="7863840" cy="320040"/>
           </a:xfrm>
           <a:prstGeom prst="rect">
             <a:avLst/>
@@ -1622,13 +1601,13 @@
           <a:bodyPr wrap="square" lIns="0" tIns="0" rIns="0" bIns="0" rtlCol="0" anchor="ctr"/>
           <a:lstStyle/>
           <a:p>
-            <a:pPr algn="ctr" indent="0" marL="0">
+            <a:pPr algn="l" indent="0" marL="0">
               <a:buNone/>
             </a:pPr>
             <a:r>
-              <a:rPr lang="en-US" sz="1300" dirty="0">
+              <a:rPr lang="en-US" sz="1200" dirty="0">
                 <a:solidFill>
-                  <a:srgbClr val="FFFFFF"/>
+                  <a:srgbClr val="4B5563"/>
                 </a:solidFill>
                 <a:latin typeface="Calibri" pitchFamily="34" charset="0"/>
                 <a:ea typeface="Calibri" pitchFamily="34" charset="-122"/>
@@ -1636,7 +1615,7 @@
               </a:rPr>
               <a:t>Blockchain Hack Warsaw  ·  March 22, 2026</a:t>
             </a:r>
-            <a:endParaRPr lang="en-US" sz="1300" dirty="0"/>
+            <a:endParaRPr lang="en-US" sz="1200" dirty="0"/>
           </a:p>
         </p:txBody>
       </p:sp>
@@ -1654,7 +1633,7 @@
     <p:bg>
       <p:bgPr>
         <a:solidFill>
-          <a:srgbClr val="080C18"/>
+          <a:srgbClr val="090A0E"/>
         </a:solidFill>
       </p:bgPr>
     </p:bg>
@@ -1674,39 +1653,14 @@
       </p:grpSpPr>
       <p:sp>
         <p:nvSpPr>
-          <p:cNvPr id="2" name="Shape 0"/>
-          <p:cNvSpPr/>
-          <p:nvPr/>
-        </p:nvSpPr>
-        <p:spPr>
-          <a:xfrm>
-            <a:off x="411480" y="292608"/>
-            <a:ext cx="1417320" cy="292608"/>
-          </a:xfrm>
-          <a:prstGeom prst="rect">
-            <a:avLst/>
-          </a:prstGeom>
-          <a:solidFill>
-            <a:srgbClr val="9945FF"/>
-          </a:solidFill>
-          <a:ln w="12700">
-            <a:solidFill>
-              <a:srgbClr val="9945FF"/>
-            </a:solidFill>
-            <a:prstDash val="solid"/>
-          </a:ln>
-        </p:spPr>
-      </p:sp>
-      <p:sp>
-        <p:nvSpPr>
-          <p:cNvPr id="3" name="Text 1"/>
-          <p:cNvSpPr/>
-          <p:nvPr/>
-        </p:nvSpPr>
-        <p:spPr>
-          <a:xfrm>
-            <a:off x="411480" y="292608"/>
-            <a:ext cx="1417320" cy="292608"/>
+          <p:cNvPr id="2" name="Text 0"/>
+          <p:cNvSpPr/>
+          <p:nvPr/>
+        </p:nvSpPr>
+        <p:spPr>
+          <a:xfrm>
+            <a:off x="548640" y="292608"/>
+            <a:ext cx="2286000" cy="274320"/>
           </a:xfrm>
           <a:prstGeom prst="rect">
             <a:avLst/>
@@ -1718,89 +1672,114 @@
           <a:bodyPr wrap="square" lIns="0" tIns="0" rIns="0" bIns="0" rtlCol="0" anchor="ctr"/>
           <a:lstStyle/>
           <a:p>
-            <a:pPr algn="ctr" indent="0" marL="0">
+            <a:pPr algn="l" indent="0" marL="0">
               <a:buNone/>
             </a:pPr>
             <a:r>
-              <a:rPr lang="en-US" sz="1100" b="1" spc="200" kern="0" dirty="0">
+              <a:rPr lang="en-US" sz="1000" b="1" spc="300" kern="0" dirty="0">
                 <a:solidFill>
-                  <a:srgbClr val="FFFFFF"/>
+                  <a:srgbClr val="4ADE80"/>
+                </a:solidFill>
+                <a:latin typeface="Consolas" pitchFamily="34" charset="0"/>
+                <a:ea typeface="Consolas" pitchFamily="34" charset="-122"/>
+                <a:cs typeface="Consolas" pitchFamily="34" charset="-120"/>
+              </a:rPr>
+              <a:t>// PROBLEM</a:t>
+            </a:r>
+            <a:endParaRPr lang="en-US" sz="1000" dirty="0"/>
+          </a:p>
+        </p:txBody>
+      </p:sp>
+      <p:sp>
+        <p:nvSpPr>
+          <p:cNvPr id="3" name="Text 1"/>
+          <p:cNvSpPr/>
+          <p:nvPr/>
+        </p:nvSpPr>
+        <p:spPr>
+          <a:xfrm>
+            <a:off x="548640" y="658368"/>
+            <a:ext cx="5120640" cy="1280160"/>
+          </a:xfrm>
+          <a:prstGeom prst="rect">
+            <a:avLst/>
+          </a:prstGeom>
+          <a:noFill/>
+          <a:ln/>
+        </p:spPr>
+        <p:txBody>
+          <a:bodyPr wrap="square" lIns="0" tIns="0" rIns="0" bIns="0" rtlCol="0" anchor="ctr"/>
+          <a:lstStyle/>
+          <a:p>
+            <a:pPr algn="l" indent="0" marL="0">
+              <a:buNone/>
+            </a:pPr>
+            <a:r>
+              <a:rPr lang="en-US" sz="3000" b="1" dirty="0">
+                <a:solidFill>
+                  <a:srgbClr val="F1F5F9"/>
                 </a:solidFill>
                 <a:latin typeface="Calibri" pitchFamily="34" charset="0"/>
                 <a:ea typeface="Calibri" pitchFamily="34" charset="-122"/>
                 <a:cs typeface="Calibri" pitchFamily="34" charset="-120"/>
               </a:rPr>
-              <a:t>PROBLEM</a:t>
-            </a:r>
-            <a:endParaRPr lang="en-US" sz="1100" dirty="0"/>
-          </a:p>
-        </p:txBody>
-      </p:sp>
-      <p:sp>
-        <p:nvSpPr>
-          <p:cNvPr id="4" name="Text 2"/>
-          <p:cNvSpPr/>
-          <p:nvPr/>
-        </p:nvSpPr>
-        <p:spPr>
-          <a:xfrm>
-            <a:off x="411480" y="713232"/>
-            <a:ext cx="5029200" cy="1188720"/>
-          </a:xfrm>
-          <a:prstGeom prst="rect">
-            <a:avLst/>
-          </a:prstGeom>
-          <a:noFill/>
-          <a:ln/>
-        </p:spPr>
-        <p:txBody>
-          <a:bodyPr wrap="square" lIns="0" tIns="0" rIns="0" bIns="0" rtlCol="0" anchor="ctr"/>
-          <a:lstStyle/>
+              <a:t>Solana rent is proportional</a:t>
+            </a:r>
+            <a:endParaRPr lang="en-US" sz="3000" dirty="0"/>
+          </a:p>
           <a:p>
             <a:pPr algn="l" indent="0" marL="0">
               <a:buNone/>
             </a:pPr>
             <a:r>
-              <a:rPr lang="en-US" sz="3200" b="1" dirty="0">
+              <a:rPr lang="en-US" sz="3000" b="1" dirty="0">
                 <a:solidFill>
-                  <a:srgbClr val="FFFFFF"/>
+                  <a:srgbClr val="F1F5F9"/>
                 </a:solidFill>
                 <a:latin typeface="Calibri" pitchFamily="34" charset="0"/>
                 <a:ea typeface="Calibri" pitchFamily="34" charset="-122"/>
                 <a:cs typeface="Calibri" pitchFamily="34" charset="-120"/>
               </a:rPr>
-              <a:t>Solana rent is</a:t>
-            </a:r>
-            <a:endParaRPr lang="en-US" sz="3200" dirty="0"/>
-          </a:p>
-          <a:p>
-            <a:pPr algn="l" indent="0" marL="0">
-              <a:buNone/>
-            </a:pPr>
-            <a:r>
-              <a:rPr lang="en-US" sz="3200" b="1" dirty="0">
-                <a:solidFill>
-                  <a:srgbClr val="FFFFFF"/>
-                </a:solidFill>
-                <a:latin typeface="Calibri" pitchFamily="34" charset="0"/>
-                <a:ea typeface="Calibri" pitchFamily="34" charset="-122"/>
-                <a:cs typeface="Calibri" pitchFamily="34" charset="-120"/>
-              </a:rPr>
-              <a:t>proportional to account size</a:t>
-            </a:r>
-            <a:endParaRPr lang="en-US" sz="3200" dirty="0"/>
+              <a:t>to account size</a:t>
+            </a:r>
+            <a:endParaRPr lang="en-US" sz="3000" dirty="0"/>
           </a:p>
         </p:txBody>
       </p:sp>
       <p:sp>
         <p:nvSpPr>
+          <p:cNvPr id="4" name="Shape 2"/>
+          <p:cNvSpPr/>
+          <p:nvPr/>
+        </p:nvSpPr>
+        <p:spPr>
+          <a:xfrm>
+            <a:off x="548640" y="2011680"/>
+            <a:ext cx="5120640" cy="22860"/>
+          </a:xfrm>
+          <a:prstGeom prst="rect">
+            <a:avLst/>
+          </a:prstGeom>
+          <a:solidFill>
+            <a:srgbClr val="4ADE80"/>
+          </a:solidFill>
+          <a:ln w="12700">
+            <a:solidFill>
+              <a:srgbClr val="4ADE80"/>
+            </a:solidFill>
+            <a:prstDash val="solid"/>
+          </a:ln>
+        </p:spPr>
+      </p:sp>
+      <p:sp>
+        <p:nvSpPr>
           <p:cNvPr id="5" name="Text 3"/>
           <p:cNvSpPr/>
           <p:nvPr/>
         </p:nvSpPr>
         <p:spPr>
           <a:xfrm>
-            <a:off x="411480" y="2011680"/>
+            <a:off x="548640" y="2148840"/>
             <a:ext cx="4937760" cy="2377440"/>
           </a:xfrm>
           <a:prstGeom prst="rect">
@@ -1821,9 +1800,9 @@
               <a:buChar char="•"/>
             </a:pPr>
             <a:r>
-              <a:rPr lang="en-US" sz="1700" dirty="0">
+              <a:rPr lang="en-US" sz="1600" dirty="0">
                 <a:solidFill>
-                  <a:srgbClr val="E2E8F0"/>
+                  <a:srgbClr val="9CA3AF"/>
                 </a:solidFill>
                 <a:latin typeface="Calibri" pitchFamily="34" charset="0"/>
                 <a:ea typeface="Calibri" pitchFamily="34" charset="-122"/>
@@ -1831,7 +1810,7 @@
               </a:rPr>
               <a:t>Every byte stored on-chain locks SOL as rent — forever</a:t>
             </a:r>
-            <a:endParaRPr lang="en-US" sz="1700" dirty="0"/>
+            <a:endParaRPr lang="en-US" sz="1600" dirty="0"/>
           </a:p>
           <a:p>
             <a:pPr algn="l" marL="342900" indent="-342900">
@@ -1842,9 +1821,9 @@
               <a:buChar char="•"/>
             </a:pPr>
             <a:r>
-              <a:rPr lang="en-US" sz="1700" dirty="0">
+              <a:rPr lang="en-US" sz="1600" dirty="0">
                 <a:solidFill>
-                  <a:srgbClr val="E2E8F0"/>
+                  <a:srgbClr val="9CA3AF"/>
                 </a:solidFill>
                 <a:latin typeface="Calibri" pitchFamily="34" charset="0"/>
                 <a:ea typeface="Calibri" pitchFamily="34" charset="-122"/>
@@ -1852,7 +1831,7 @@
               </a:rPr>
               <a:t>Data-heavy programs pay enormous, compounding costs</a:t>
             </a:r>
-            <a:endParaRPr lang="en-US" sz="1700" dirty="0"/>
+            <a:endParaRPr lang="en-US" sz="1600" dirty="0"/>
           </a:p>
           <a:p>
             <a:pPr algn="l" marL="342900" indent="-342900">
@@ -1863,17 +1842,17 @@
               <a:buChar char="•"/>
             </a:pPr>
             <a:r>
-              <a:rPr lang="en-US" sz="1700" dirty="0">
+              <a:rPr lang="en-US" sz="1600" dirty="0">
                 <a:solidFill>
-                  <a:srgbClr val="E2E8F0"/>
+                  <a:srgbClr val="9CA3AF"/>
                 </a:solidFill>
                 <a:latin typeface="Calibri" pitchFamily="34" charset="0"/>
                 <a:ea typeface="Calibri" pitchFamily="34" charset="-122"/>
                 <a:cs typeface="Calibri" pitchFamily="34" charset="-120"/>
               </a:rPr>
-              <a:t>OpenBook orderbook pre-allocates 90,952 bytes per side</a:t>
-            </a:r>
-            <a:endParaRPr lang="en-US" sz="1700" dirty="0"/>
+              <a:t>OpenBook pre-allocates 90,952 bytes per orderbook side</a:t>
+            </a:r>
+            <a:endParaRPr lang="en-US" sz="1600" dirty="0"/>
           </a:p>
           <a:p>
             <a:pPr algn="l" marL="342900" indent="-342900">
@@ -1884,9 +1863,9 @@
               <a:buChar char="•"/>
             </a:pPr>
             <a:r>
-              <a:rPr lang="en-US" sz="1700" dirty="0">
+              <a:rPr lang="en-US" sz="1600" dirty="0">
                 <a:solidFill>
-                  <a:srgbClr val="E2E8F0"/>
+                  <a:srgbClr val="9CA3AF"/>
                 </a:solidFill>
                 <a:latin typeface="Calibri" pitchFamily="34" charset="0"/>
                 <a:ea typeface="Calibri" pitchFamily="34" charset="-122"/>
@@ -1894,7 +1873,7 @@
               </a:rPr>
               <a:t>Most of that data is zeros — sparse critbit tree slots</a:t>
             </a:r>
-            <a:endParaRPr lang="en-US" sz="1700" dirty="0"/>
+            <a:endParaRPr lang="en-US" sz="1600" dirty="0"/>
           </a:p>
         </p:txBody>
       </p:sp>
@@ -1906,25 +1885,25 @@
         </p:nvSpPr>
         <p:spPr>
           <a:xfrm>
-            <a:off x="5760720" y="594360"/>
-            <a:ext cx="3063240" cy="3977640"/>
+            <a:off x="6400800" y="594360"/>
+            <a:ext cx="2423160" cy="3931920"/>
           </a:xfrm>
           <a:prstGeom prst="rect">
             <a:avLst/>
           </a:prstGeom>
           <a:solidFill>
-            <a:srgbClr val="141E35"/>
+            <a:srgbClr val="111520"/>
           </a:solidFill>
-          <a:ln w="25400">
+          <a:ln w="12700">
             <a:solidFill>
-              <a:srgbClr val="9945FF"/>
+              <a:srgbClr val="1A1F2E"/>
             </a:solidFill>
             <a:prstDash val="solid"/>
           </a:ln>
           <a:effectLst>
-            <a:outerShdw sx="100000" sy="100000" kx="0" ky="0" algn="bl" rotWithShape="0" blurRad="152400" dist="50800" dir="8100000">
+            <a:outerShdw sx="100000" sy="100000" kx="0" ky="0" algn="bl" rotWithShape="0" blurRad="254000" dist="76200" dir="8100000">
               <a:srgbClr val="000000">
-                <a:alpha val="35000"/>
+                <a:alpha val="50000"/>
               </a:srgbClr>
             </a:outerShdw>
           </a:effectLst>
@@ -1932,14 +1911,39 @@
       </p:sp>
       <p:sp>
         <p:nvSpPr>
-          <p:cNvPr id="7" name="Text 5"/>
-          <p:cNvSpPr/>
-          <p:nvPr/>
-        </p:nvSpPr>
-        <p:spPr>
-          <a:xfrm>
-            <a:off x="5760720" y="914400"/>
-            <a:ext cx="3063240" cy="1645920"/>
+          <p:cNvPr id="7" name="Shape 5"/>
+          <p:cNvSpPr/>
+          <p:nvPr/>
+        </p:nvSpPr>
+        <p:spPr>
+          <a:xfrm>
+            <a:off x="6400800" y="594360"/>
+            <a:ext cx="2423160" cy="36576"/>
+          </a:xfrm>
+          <a:prstGeom prst="rect">
+            <a:avLst/>
+          </a:prstGeom>
+          <a:solidFill>
+            <a:srgbClr val="4ADE80"/>
+          </a:solidFill>
+          <a:ln w="12700">
+            <a:solidFill>
+              <a:srgbClr val="4ADE80"/>
+            </a:solidFill>
+            <a:prstDash val="solid"/>
+          </a:ln>
+        </p:spPr>
+      </p:sp>
+      <p:sp>
+        <p:nvSpPr>
+          <p:cNvPr id="8" name="Text 6"/>
+          <p:cNvSpPr/>
+          <p:nvPr/>
+        </p:nvSpPr>
+        <p:spPr>
+          <a:xfrm>
+            <a:off x="6400800" y="914400"/>
+            <a:ext cx="2423160" cy="1463040"/>
           </a:xfrm>
           <a:prstGeom prst="rect">
             <a:avLst/>
@@ -1955,9 +1959,9 @@
               <a:buNone/>
             </a:pPr>
             <a:r>
-              <a:rPr lang="en-US" sz="7600" b="1" dirty="0">
+              <a:rPr lang="en-US" sz="7000" b="1" dirty="0">
                 <a:solidFill>
-                  <a:srgbClr val="9945FF"/>
+                  <a:srgbClr val="F1F5F9"/>
                 </a:solidFill>
                 <a:latin typeface="Consolas" pitchFamily="34" charset="0"/>
                 <a:ea typeface="Consolas" pitchFamily="34" charset="-122"/>
@@ -1965,20 +1969,20 @@
               </a:rPr>
               <a:t>0.63</a:t>
             </a:r>
-            <a:endParaRPr lang="en-US" sz="7600" dirty="0"/>
+            <a:endParaRPr lang="en-US" sz="7000" dirty="0"/>
           </a:p>
         </p:txBody>
       </p:sp>
       <p:sp>
         <p:nvSpPr>
-          <p:cNvPr id="8" name="Text 6"/>
-          <p:cNvSpPr/>
-          <p:nvPr/>
-        </p:nvSpPr>
-        <p:spPr>
-          <a:xfrm>
-            <a:off x="5760720" y="2423160"/>
-            <a:ext cx="3063240" cy="502920"/>
+          <p:cNvPr id="9" name="Text 7"/>
+          <p:cNvSpPr/>
+          <p:nvPr/>
+        </p:nvSpPr>
+        <p:spPr>
+          <a:xfrm>
+            <a:off x="6400800" y="2331720"/>
+            <a:ext cx="2423160" cy="457200"/>
           </a:xfrm>
           <a:prstGeom prst="rect">
             <a:avLst/>
@@ -1994,30 +1998,30 @@
               <a:buNone/>
             </a:pPr>
             <a:r>
-              <a:rPr lang="en-US" sz="2600" b="1" dirty="0">
+              <a:rPr lang="en-US" sz="2400" b="1" dirty="0">
                 <a:solidFill>
-                  <a:srgbClr val="14F195"/>
+                  <a:srgbClr val="4ADE80"/>
                 </a:solidFill>
-                <a:latin typeface="Calibri" pitchFamily="34" charset="0"/>
-                <a:ea typeface="Calibri" pitchFamily="34" charset="-122"/>
-                <a:cs typeface="Calibri" pitchFamily="34" charset="-120"/>
+                <a:latin typeface="Consolas" pitchFamily="34" charset="0"/>
+                <a:ea typeface="Consolas" pitchFamily="34" charset="-122"/>
+                <a:cs typeface="Consolas" pitchFamily="34" charset="-120"/>
               </a:rPr>
               <a:t>SOL</a:t>
             </a:r>
-            <a:endParaRPr lang="en-US" sz="2600" dirty="0"/>
+            <a:endParaRPr lang="en-US" sz="2400" dirty="0"/>
           </a:p>
         </p:txBody>
       </p:sp>
       <p:sp>
         <p:nvSpPr>
-          <p:cNvPr id="9" name="Text 7"/>
-          <p:cNvSpPr/>
-          <p:nvPr/>
-        </p:nvSpPr>
-        <p:spPr>
-          <a:xfrm>
-            <a:off x="5852160" y="2999232"/>
-            <a:ext cx="2880360" cy="685800"/>
+          <p:cNvPr id="10" name="Text 8"/>
+          <p:cNvSpPr/>
+          <p:nvPr/>
+        </p:nvSpPr>
+        <p:spPr>
+          <a:xfrm>
+            <a:off x="6492240" y="2880360"/>
+            <a:ext cx="2240280" cy="594360"/>
           </a:xfrm>
           <a:prstGeom prst="rect">
             <a:avLst/>
@@ -2033,9 +2037,9 @@
               <a:buNone/>
             </a:pPr>
             <a:r>
-              <a:rPr lang="en-US" sz="1400" dirty="0">
+              <a:rPr lang="en-US" sz="1300" dirty="0">
                 <a:solidFill>
-                  <a:srgbClr val="7B8CAA"/>
+                  <a:srgbClr val="9CA3AF"/>
                 </a:solidFill>
                 <a:latin typeface="Calibri" pitchFamily="34" charset="0"/>
                 <a:ea typeface="Calibri" pitchFamily="34" charset="-122"/>
@@ -2043,16 +2047,16 @@
               </a:rPr>
               <a:t>rent per OpenBook</a:t>
             </a:r>
-            <a:endParaRPr lang="en-US" sz="1400" dirty="0"/>
+            <a:endParaRPr lang="en-US" sz="1300" dirty="0"/>
           </a:p>
           <a:p>
             <a:pPr algn="ctr" indent="0" marL="0">
               <a:buNone/>
             </a:pPr>
             <a:r>
-              <a:rPr lang="en-US" sz="1400" dirty="0">
+              <a:rPr lang="en-US" sz="1300" dirty="0">
                 <a:solidFill>
-                  <a:srgbClr val="7B8CAA"/>
+                  <a:srgbClr val="9CA3AF"/>
                 </a:solidFill>
                 <a:latin typeface="Calibri" pitchFamily="34" charset="0"/>
                 <a:ea typeface="Calibri" pitchFamily="34" charset="-122"/>
@@ -2060,20 +2064,20 @@
               </a:rPr>
               <a:t>orderbook side</a:t>
             </a:r>
-            <a:endParaRPr lang="en-US" sz="1400" dirty="0"/>
+            <a:endParaRPr lang="en-US" sz="1300" dirty="0"/>
           </a:p>
         </p:txBody>
       </p:sp>
       <p:sp>
         <p:nvSpPr>
-          <p:cNvPr id="10" name="Text 8"/>
-          <p:cNvSpPr/>
-          <p:nvPr/>
-        </p:nvSpPr>
-        <p:spPr>
-          <a:xfrm>
-            <a:off x="5852160" y="3749040"/>
-            <a:ext cx="2880360" cy="548640"/>
+          <p:cNvPr id="11" name="Text 9"/>
+          <p:cNvSpPr/>
+          <p:nvPr/>
+        </p:nvSpPr>
+        <p:spPr>
+          <a:xfrm>
+            <a:off x="6492240" y="3566160"/>
+            <a:ext cx="2240280" cy="502920"/>
           </a:xfrm>
           <a:prstGeom prst="rect">
             <a:avLst/>
@@ -2089,79 +2093,54 @@
               <a:buNone/>
             </a:pPr>
             <a:r>
-              <a:rPr lang="en-US" sz="1300" i="1" dirty="0">
+              <a:rPr lang="en-US" sz="1100" i="1" dirty="0">
                 <a:solidFill>
-                  <a:srgbClr val="14F195"/>
+                  <a:srgbClr val="4ADE80"/>
+                </a:solidFill>
+                <a:latin typeface="Consolas" pitchFamily="34" charset="0"/>
+                <a:ea typeface="Consolas" pitchFamily="34" charset="-122"/>
+                <a:cs typeface="Consolas" pitchFamily="34" charset="-120"/>
+              </a:rPr>
+              <a:t>~54× compressible*</a:t>
+            </a:r>
+            <a:endParaRPr lang="en-US" sz="1100" dirty="0"/>
+          </a:p>
+        </p:txBody>
+      </p:sp>
+      <p:sp>
+        <p:nvSpPr>
+          <p:cNvPr id="12" name="Text 10"/>
+          <p:cNvSpPr/>
+          <p:nvPr/>
+        </p:nvSpPr>
+        <p:spPr>
+          <a:xfrm>
+            <a:off x="548640" y="4800600"/>
+            <a:ext cx="8321040" cy="274320"/>
+          </a:xfrm>
+          <a:prstGeom prst="rect">
+            <a:avLst/>
+          </a:prstGeom>
+          <a:noFill/>
+          <a:ln/>
+        </p:spPr>
+        <p:txBody>
+          <a:bodyPr wrap="square" lIns="0" tIns="0" rIns="0" bIns="0" rtlCol="0" anchor="ctr"/>
+          <a:lstStyle/>
+          <a:p>
+            <a:pPr algn="l" indent="0" marL="0">
+              <a:buNone/>
+            </a:pPr>
+            <a:r>
+              <a:rPr lang="en-US" sz="900" i="1" dirty="0">
+                <a:solidFill>
+                  <a:srgbClr val="4B5563"/>
                 </a:solidFill>
                 <a:latin typeface="Calibri" pitchFamily="34" charset="0"/>
                 <a:ea typeface="Calibri" pitchFamily="34" charset="-122"/>
                 <a:cs typeface="Calibri" pitchFamily="34" charset="-120"/>
               </a:rPr>
-              <a:t>~54× compressible*</a:t>
-            </a:r>
-            <a:endParaRPr lang="en-US" sz="1300" dirty="0"/>
-          </a:p>
-        </p:txBody>
-      </p:sp>
-      <p:sp>
-        <p:nvSpPr>
-          <p:cNvPr id="11" name="Shape 9"/>
-          <p:cNvSpPr/>
-          <p:nvPr/>
-        </p:nvSpPr>
-        <p:spPr>
-          <a:xfrm>
-            <a:off x="0" y="4892040"/>
-            <a:ext cx="9144000" cy="251460"/>
-          </a:xfrm>
-          <a:prstGeom prst="rect">
-            <a:avLst/>
-          </a:prstGeom>
-          <a:solidFill>
-            <a:srgbClr val="0F1627"/>
-          </a:solidFill>
-          <a:ln w="12700">
-            <a:solidFill>
-              <a:srgbClr val="0F1627"/>
-            </a:solidFill>
-            <a:prstDash val="solid"/>
-          </a:ln>
-        </p:spPr>
-      </p:sp>
-      <p:sp>
-        <p:nvSpPr>
-          <p:cNvPr id="12" name="Text 10"/>
-          <p:cNvSpPr/>
-          <p:nvPr/>
-        </p:nvSpPr>
-        <p:spPr>
-          <a:xfrm>
-            <a:off x="91440" y="4892040"/>
-            <a:ext cx="8961120" cy="251460"/>
-          </a:xfrm>
-          <a:prstGeom prst="rect">
-            <a:avLst/>
-          </a:prstGeom>
-          <a:noFill/>
-          <a:ln/>
-        </p:spPr>
-        <p:txBody>
-          <a:bodyPr wrap="square" lIns="0" tIns="0" rIns="0" bIns="0" rtlCol="0" anchor="ctr"/>
-          <a:lstStyle/>
-          <a:p>
-            <a:pPr algn="l" indent="0" marL="0">
-              <a:buNone/>
-            </a:pPr>
-            <a:r>
-              <a:rPr lang="en-US" sz="900" i="1" dirty="0">
-                <a:solidFill>
-                  <a:srgbClr val="7B8CAA"/>
-                </a:solidFill>
-                <a:latin typeface="Calibri" pitchFamily="34" charset="0"/>
-                <a:ea typeface="Calibri" pitchFamily="34" charset="-122"/>
-                <a:cs typeface="Calibri" pitchFamily="34" charset="-120"/>
-              </a:rPr>
-              <a:t>* Compression ratio measured on mainnet data. Direct integration requires protocol-level adoption (see slide 5).</a:t>
+              <a:t>* Measured on mainnet data. Direct integration requires protocol adoption — see results slide.</a:t>
             </a:r>
             <a:endParaRPr lang="en-US" sz="900" dirty="0"/>
           </a:p>
@@ -2181,7 +2160,7 @@
     <p:bg>
       <p:bgPr>
         <a:solidFill>
-          <a:srgbClr val="080C18"/>
+          <a:srgbClr val="090A0E"/>
         </a:solidFill>
       </p:bgPr>
     </p:bg>
@@ -2201,39 +2180,14 @@
       </p:grpSpPr>
       <p:sp>
         <p:nvSpPr>
-          <p:cNvPr id="2" name="Shape 0"/>
-          <p:cNvSpPr/>
-          <p:nvPr/>
-        </p:nvSpPr>
-        <p:spPr>
-          <a:xfrm>
-            <a:off x="411480" y="292608"/>
-            <a:ext cx="1188720" cy="292608"/>
-          </a:xfrm>
-          <a:prstGeom prst="rect">
-            <a:avLst/>
-          </a:prstGeom>
-          <a:solidFill>
-            <a:srgbClr val="14F195"/>
-          </a:solidFill>
-          <a:ln w="12700">
-            <a:solidFill>
-              <a:srgbClr val="14F195"/>
-            </a:solidFill>
-            <a:prstDash val="solid"/>
-          </a:ln>
-        </p:spPr>
-      </p:sp>
-      <p:sp>
-        <p:nvSpPr>
-          <p:cNvPr id="3" name="Text 1"/>
-          <p:cNvSpPr/>
-          <p:nvPr/>
-        </p:nvSpPr>
-        <p:spPr>
-          <a:xfrm>
-            <a:off x="411480" y="292608"/>
-            <a:ext cx="1188720" cy="292608"/>
+          <p:cNvPr id="2" name="Text 0"/>
+          <p:cNvSpPr/>
+          <p:nvPr/>
+        </p:nvSpPr>
+        <p:spPr>
+          <a:xfrm>
+            <a:off x="548640" y="292608"/>
+            <a:ext cx="2286000" cy="274320"/>
           </a:xfrm>
           <a:prstGeom prst="rect">
             <a:avLst/>
@@ -2245,34 +2199,34 @@
           <a:bodyPr wrap="square" lIns="0" tIns="0" rIns="0" bIns="0" rtlCol="0" anchor="ctr"/>
           <a:lstStyle/>
           <a:p>
-            <a:pPr algn="ctr" indent="0" marL="0">
+            <a:pPr algn="l" indent="0" marL="0">
               <a:buNone/>
             </a:pPr>
             <a:r>
-              <a:rPr lang="en-US" sz="1100" b="1" spc="200" kern="0" dirty="0">
+              <a:rPr lang="en-US" sz="1000" b="1" spc="300" kern="0" dirty="0">
                 <a:solidFill>
-                  <a:srgbClr val="1A2035"/>
+                  <a:srgbClr val="4ADE80"/>
                 </a:solidFill>
-                <a:latin typeface="Calibri" pitchFamily="34" charset="0"/>
-                <a:ea typeface="Calibri" pitchFamily="34" charset="-122"/>
-                <a:cs typeface="Calibri" pitchFamily="34" charset="-120"/>
+                <a:latin typeface="Consolas" pitchFamily="34" charset="0"/>
+                <a:ea typeface="Consolas" pitchFamily="34" charset="-122"/>
+                <a:cs typeface="Consolas" pitchFamily="34" charset="-120"/>
               </a:rPr>
-              <a:t>INSIGHT</a:t>
-            </a:r>
-            <a:endParaRPr lang="en-US" sz="1100" dirty="0"/>
+              <a:t>// INSIGHT</a:t>
+            </a:r>
+            <a:endParaRPr lang="en-US" sz="1000" dirty="0"/>
           </a:p>
         </p:txBody>
       </p:sp>
       <p:sp>
         <p:nvSpPr>
-          <p:cNvPr id="4" name="Text 2"/>
-          <p:cNvSpPr/>
-          <p:nvPr/>
-        </p:nvSpPr>
-        <p:spPr>
-          <a:xfrm>
-            <a:off x="411480" y="685800"/>
-            <a:ext cx="8321040" cy="1005840"/>
+          <p:cNvPr id="3" name="Text 1"/>
+          <p:cNvSpPr/>
+          <p:nvPr/>
+        </p:nvSpPr>
+        <p:spPr>
+          <a:xfrm>
+            <a:off x="548640" y="658368"/>
+            <a:ext cx="8046720" cy="1234440"/>
           </a:xfrm>
           <a:prstGeom prst="rect">
             <a:avLst/>
@@ -2288,9 +2242,9 @@
               <a:buNone/>
             </a:pPr>
             <a:r>
-              <a:rPr lang="en-US" sz="3200" b="1" dirty="0">
+              <a:rPr lang="en-US" sz="3000" b="1" dirty="0">
                 <a:solidFill>
-                  <a:srgbClr val="FFFFFF"/>
+                  <a:srgbClr val="F1F5F9"/>
                 </a:solidFill>
                 <a:latin typeface="Calibri" pitchFamily="34" charset="0"/>
                 <a:ea typeface="Calibri" pitchFamily="34" charset="-122"/>
@@ -2298,54 +2252,79 @@
               </a:rPr>
               <a:t>Data stays on-chain.</a:t>
             </a:r>
-            <a:endParaRPr lang="en-US" sz="3200" dirty="0"/>
+            <a:endParaRPr lang="en-US" sz="3000" dirty="0"/>
           </a:p>
           <a:p>
             <a:pPr algn="l" indent="0" marL="0">
               <a:buNone/>
             </a:pPr>
             <a:r>
-              <a:rPr lang="en-US" sz="3200" b="1" dirty="0">
+              <a:rPr lang="en-US" sz="3000" b="1" dirty="0">
                 <a:solidFill>
-                  <a:srgbClr val="FFFFFF"/>
+                  <a:srgbClr val="F1F5F9"/>
                 </a:solidFill>
                 <a:latin typeface="Calibri" pitchFamily="34" charset="0"/>
                 <a:ea typeface="Calibri" pitchFamily="34" charset="-122"/>
                 <a:cs typeface="Calibri" pitchFamily="34" charset="-120"/>
               </a:rPr>
-              <a:t>No infrastructure. No Merkle trees.</a:t>
-            </a:r>
-            <a:endParaRPr lang="en-US" sz="3200" dirty="0"/>
+              <a:t>No Merkle trees. No indexer.</a:t>
+            </a:r>
+            <a:endParaRPr lang="en-US" sz="3000" dirty="0"/>
           </a:p>
         </p:txBody>
       </p:sp>
       <p:sp>
         <p:nvSpPr>
-          <p:cNvPr id="5" name="Shape 3"/>
-          <p:cNvSpPr/>
-          <p:nvPr/>
-        </p:nvSpPr>
-        <p:spPr>
-          <a:xfrm>
-            <a:off x="411480" y="1874520"/>
-            <a:ext cx="3977640" cy="2834640"/>
+          <p:cNvPr id="4" name="Shape 2"/>
+          <p:cNvSpPr/>
+          <p:nvPr/>
+        </p:nvSpPr>
+        <p:spPr>
+          <a:xfrm>
+            <a:off x="548640" y="1920240"/>
+            <a:ext cx="8046720" cy="22860"/>
           </a:xfrm>
           <a:prstGeom prst="rect">
             <a:avLst/>
           </a:prstGeom>
           <a:solidFill>
-            <a:srgbClr val="0F1627"/>
+            <a:srgbClr val="4ADE80"/>
           </a:solidFill>
           <a:ln w="12700">
             <a:solidFill>
-              <a:srgbClr val="2A3555"/>
+              <a:srgbClr val="4ADE80"/>
+            </a:solidFill>
+            <a:prstDash val="solid"/>
+          </a:ln>
+        </p:spPr>
+      </p:sp>
+      <p:sp>
+        <p:nvSpPr>
+          <p:cNvPr id="5" name="Shape 3"/>
+          <p:cNvSpPr/>
+          <p:nvPr/>
+        </p:nvSpPr>
+        <p:spPr>
+          <a:xfrm>
+            <a:off x="548640" y="2057400"/>
+            <a:ext cx="3931920" cy="2743200"/>
+          </a:xfrm>
+          <a:prstGeom prst="rect">
+            <a:avLst/>
+          </a:prstGeom>
+          <a:solidFill>
+            <a:srgbClr val="0D1018"/>
+          </a:solidFill>
+          <a:ln w="12700">
+            <a:solidFill>
+              <a:srgbClr val="1A1F2E"/>
             </a:solidFill>
             <a:prstDash val="solid"/>
           </a:ln>
           <a:effectLst>
-            <a:outerShdw sx="100000" sy="100000" kx="0" ky="0" algn="bl" rotWithShape="0" blurRad="152400" dist="50800" dir="8100000">
+            <a:outerShdw sx="100000" sy="100000" kx="0" ky="0" algn="bl" rotWithShape="0" blurRad="254000" dist="76200" dir="8100000">
               <a:srgbClr val="000000">
-                <a:alpha val="35000"/>
+                <a:alpha val="50000"/>
               </a:srgbClr>
             </a:outerShdw>
           </a:effectLst>
@@ -2359,8 +2338,8 @@
         </p:nvSpPr>
         <p:spPr>
           <a:xfrm>
-            <a:off x="411480" y="1874520"/>
-            <a:ext cx="3977640" cy="457200"/>
+            <a:off x="731520" y="2176272"/>
+            <a:ext cx="3566160" cy="384048"/>
           </a:xfrm>
           <a:prstGeom prst="rect">
             <a:avLst/>
@@ -2372,19 +2351,19 @@
           <a:bodyPr wrap="square" lIns="0" tIns="0" rIns="0" bIns="0" rtlCol="0" anchor="ctr"/>
           <a:lstStyle/>
           <a:p>
-            <a:pPr algn="ctr" indent="0" marL="0">
+            <a:pPr algn="l" indent="0" marL="0">
               <a:buNone/>
             </a:pPr>
             <a:r>
-              <a:rPr lang="en-US" sz="1400" b="1" spc="100" kern="0" dirty="0">
+              <a:rPr lang="en-US" sz="1400" b="1" dirty="0">
                 <a:solidFill>
-                  <a:srgbClr val="7B8CAA"/>
+                  <a:srgbClr val="9CA3AF"/>
                 </a:solidFill>
-                <a:latin typeface="Calibri" pitchFamily="34" charset="0"/>
-                <a:ea typeface="Calibri" pitchFamily="34" charset="-122"/>
-                <a:cs typeface="Calibri" pitchFamily="34" charset="-120"/>
+                <a:latin typeface="Consolas" pitchFamily="34" charset="0"/>
+                <a:ea typeface="Consolas" pitchFamily="34" charset="-122"/>
+                <a:cs typeface="Consolas" pitchFamily="34" charset="-120"/>
               </a:rPr>
-              <a:t>ZK COMPRESSION</a:t>
+              <a:t>ZK Compression</a:t>
             </a:r>
             <a:endParaRPr lang="en-US" sz="1400" dirty="0"/>
           </a:p>
@@ -2398,8 +2377,8 @@
         </p:nvSpPr>
         <p:spPr>
           <a:xfrm>
-            <a:off x="594360" y="2423160"/>
-            <a:ext cx="3611880" cy="2103120"/>
+            <a:off x="731520" y="2651760"/>
+            <a:ext cx="3566160" cy="2011680"/>
           </a:xfrm>
           <a:prstGeom prst="rect">
             <a:avLst/>
@@ -2419,17 +2398,17 @@
               <a:buChar char="•"/>
             </a:pPr>
             <a:r>
-              <a:rPr lang="en-US" sz="1450" dirty="0">
+              <a:rPr lang="en-US" sz="1400" dirty="0">
                 <a:solidFill>
-                  <a:srgbClr val="7B8CAA"/>
+                  <a:srgbClr val="4B5563"/>
                 </a:solidFill>
                 <a:latin typeface="Calibri" pitchFamily="34" charset="0"/>
                 <a:ea typeface="Calibri" pitchFamily="34" charset="-122"/>
                 <a:cs typeface="Calibri" pitchFamily="34" charset="-120"/>
               </a:rPr>
-              <a:t>~292,000 CU per tx fixed overhead</a:t>
-            </a:r>
-            <a:endParaRPr lang="en-US" sz="1450" dirty="0"/>
+              <a:t>~292,000 CU per tx (fixed overhead)</a:t>
+            </a:r>
+            <a:endParaRPr lang="en-US" sz="1400" dirty="0"/>
           </a:p>
           <a:p>
             <a:pPr algn="l" marL="342900" indent="-342900">
@@ -2440,17 +2419,17 @@
               <a:buChar char="•"/>
             </a:pPr>
             <a:r>
-              <a:rPr lang="en-US" sz="1450" dirty="0">
+              <a:rPr lang="en-US" sz="1400" dirty="0">
                 <a:solidFill>
-                  <a:srgbClr val="7B8CAA"/>
+                  <a:srgbClr val="4B5563"/>
                 </a:solidFill>
                 <a:latin typeface="Calibri" pitchFamily="34" charset="0"/>
                 <a:ea typeface="Calibri" pitchFamily="34" charset="-122"/>
                 <a:cs typeface="Calibri" pitchFamily="34" charset="-120"/>
               </a:rPr>
-              <a:t>Data lives off-chain (ledger/indexer)</a:t>
-            </a:r>
-            <a:endParaRPr lang="en-US" sz="1450" dirty="0"/>
+              <a:t>Data lives off-chain in ledger/indexer</a:t>
+            </a:r>
+            <a:endParaRPr lang="en-US" sz="1400" dirty="0"/>
           </a:p>
           <a:p>
             <a:pPr algn="l" marL="342900" indent="-342900">
@@ -2461,9 +2440,9 @@
               <a:buChar char="•"/>
             </a:pPr>
             <a:r>
-              <a:rPr lang="en-US" sz="1450" dirty="0">
+              <a:rPr lang="en-US" sz="1400" dirty="0">
                 <a:solidFill>
-                  <a:srgbClr val="7B8CAA"/>
+                  <a:srgbClr val="4B5563"/>
                 </a:solidFill>
                 <a:latin typeface="Calibri" pitchFamily="34" charset="0"/>
                 <a:ea typeface="Calibri" pitchFamily="34" charset="-122"/>
@@ -2471,7 +2450,7 @@
               </a:rPr>
               <a:t>Requires Helius Photon indexer</a:t>
             </a:r>
-            <a:endParaRPr lang="en-US" sz="1450" dirty="0"/>
+            <a:endParaRPr lang="en-US" sz="1400" dirty="0"/>
           </a:p>
           <a:p>
             <a:pPr algn="l" marL="342900" indent="-342900">
@@ -2482,17 +2461,17 @@
               <a:buChar char="•"/>
             </a:pPr>
             <a:r>
-              <a:rPr lang="en-US" sz="1450" dirty="0">
+              <a:rPr lang="en-US" sz="1400" dirty="0">
                 <a:solidFill>
-                  <a:srgbClr val="7B8CAA"/>
+                  <a:srgbClr val="4B5563"/>
                 </a:solidFill>
                 <a:latin typeface="Calibri" pitchFamily="34" charset="0"/>
                 <a:ea typeface="Calibri" pitchFamily="34" charset="-122"/>
                 <a:cs typeface="Calibri" pitchFamily="34" charset="-120"/>
               </a:rPr>
-              <a:t>Great for NFTs / millions of tiny accounts</a:t>
-            </a:r>
-            <a:endParaRPr lang="en-US" sz="1450" dirty="0"/>
+              <a:t>Great for NFTs &amp; millions of tiny accounts</a:t>
+            </a:r>
+            <a:endParaRPr lang="en-US" sz="1400" dirty="0"/>
           </a:p>
         </p:txBody>
       </p:sp>
@@ -2504,25 +2483,25 @@
         </p:nvSpPr>
         <p:spPr>
           <a:xfrm>
-            <a:off x="4754880" y="1874520"/>
-            <a:ext cx="3977640" cy="2834640"/>
+            <a:off x="4663440" y="2057400"/>
+            <a:ext cx="3931920" cy="2743200"/>
           </a:xfrm>
           <a:prstGeom prst="rect">
             <a:avLst/>
           </a:prstGeom>
           <a:solidFill>
-            <a:srgbClr val="130D2A"/>
+            <a:srgbClr val="111520"/>
           </a:solidFill>
-          <a:ln w="25400">
+          <a:ln w="12700">
             <a:solidFill>
-              <a:srgbClr val="9945FF"/>
+              <a:srgbClr val="1A1F2E"/>
             </a:solidFill>
             <a:prstDash val="solid"/>
           </a:ln>
           <a:effectLst>
-            <a:outerShdw sx="100000" sy="100000" kx="0" ky="0" algn="bl" rotWithShape="0" blurRad="152400" dist="50800" dir="8100000">
+            <a:outerShdw sx="100000" sy="100000" kx="0" ky="0" algn="bl" rotWithShape="0" blurRad="254000" dist="76200" dir="8100000">
               <a:srgbClr val="000000">
-                <a:alpha val="35000"/>
+                <a:alpha val="50000"/>
               </a:srgbClr>
             </a:outerShdw>
           </a:effectLst>
@@ -2536,18 +2515,18 @@
         </p:nvSpPr>
         <p:spPr>
           <a:xfrm>
-            <a:off x="4754880" y="1874520"/>
-            <a:ext cx="3977640" cy="54864"/>
+            <a:off x="4663440" y="2057400"/>
+            <a:ext cx="3931920" cy="36576"/>
           </a:xfrm>
           <a:prstGeom prst="rect">
             <a:avLst/>
           </a:prstGeom>
           <a:solidFill>
-            <a:srgbClr val="9945FF"/>
+            <a:srgbClr val="4ADE80"/>
           </a:solidFill>
           <a:ln w="12700">
             <a:solidFill>
-              <a:srgbClr val="9945FF"/>
+              <a:srgbClr val="4ADE80"/>
             </a:solidFill>
             <a:prstDash val="solid"/>
           </a:ln>
@@ -2561,8 +2540,8 @@
         </p:nvSpPr>
         <p:spPr>
           <a:xfrm>
-            <a:off x="4754880" y="1929384"/>
-            <a:ext cx="3977640" cy="411480"/>
+            <a:off x="4846320" y="2176272"/>
+            <a:ext cx="3566160" cy="384048"/>
           </a:xfrm>
           <a:prstGeom prst="rect">
             <a:avLst/>
@@ -2574,13 +2553,13 @@
           <a:bodyPr wrap="square" lIns="0" tIns="0" rIns="0" bIns="0" rtlCol="0" anchor="ctr"/>
           <a:lstStyle/>
           <a:p>
-            <a:pPr algn="ctr" indent="0" marL="0">
+            <a:pPr algn="l" indent="0" marL="0">
               <a:buNone/>
             </a:pPr>
             <a:r>
-              <a:rPr lang="en-US" sz="1500" b="1" dirty="0">
+              <a:rPr lang="en-US" sz="1400" b="1" dirty="0">
                 <a:solidFill>
-                  <a:srgbClr val="9945FF"/>
+                  <a:srgbClr val="4ADE80"/>
                 </a:solidFill>
                 <a:latin typeface="Consolas" pitchFamily="34" charset="0"/>
                 <a:ea typeface="Consolas" pitchFamily="34" charset="-122"/>
@@ -2588,7 +2567,7 @@
               </a:rPr>
               <a:t>densol</a:t>
             </a:r>
-            <a:endParaRPr lang="en-US" sz="1500" dirty="0"/>
+            <a:endParaRPr lang="en-US" sz="1400" dirty="0"/>
           </a:p>
         </p:txBody>
       </p:sp>
@@ -2600,8 +2579,8 @@
         </p:nvSpPr>
         <p:spPr>
           <a:xfrm>
-            <a:off x="4937760" y="2423160"/>
-            <a:ext cx="3611880" cy="2103120"/>
+            <a:off x="4846320" y="2651760"/>
+            <a:ext cx="3566160" cy="2011680"/>
           </a:xfrm>
           <a:prstGeom prst="rect">
             <a:avLst/>
@@ -2621,9 +2600,9 @@
               <a:buChar char="•"/>
             </a:pPr>
             <a:r>
-              <a:rPr lang="en-US" sz="1450" dirty="0">
+              <a:rPr lang="en-US" sz="1400" dirty="0">
                 <a:solidFill>
-                  <a:srgbClr val="E2E8F0"/>
+                  <a:srgbClr val="F1F5F9"/>
                 </a:solidFill>
                 <a:latin typeface="Calibri" pitchFamily="34" charset="0"/>
                 <a:ea typeface="Calibri" pitchFamily="34" charset="-122"/>
@@ -2631,7 +2610,7 @@
               </a:rPr>
               <a:t>~10,000–15,000 CU per write</a:t>
             </a:r>
-            <a:endParaRPr lang="en-US" sz="1450" dirty="0"/>
+            <a:endParaRPr lang="en-US" sz="1400" dirty="0"/>
           </a:p>
           <a:p>
             <a:pPr algn="l" marL="342900" indent="-342900">
@@ -2642,9 +2621,9 @@
               <a:buChar char="•"/>
             </a:pPr>
             <a:r>
-              <a:rPr lang="en-US" sz="1450" dirty="0">
+              <a:rPr lang="en-US" sz="1400" dirty="0">
                 <a:solidFill>
-                  <a:srgbClr val="E2E8F0"/>
+                  <a:srgbClr val="F1F5F9"/>
                 </a:solidFill>
                 <a:latin typeface="Calibri" pitchFamily="34" charset="0"/>
                 <a:ea typeface="Calibri" pitchFamily="34" charset="-122"/>
@@ -2652,7 +2631,7 @@
               </a:rPr>
               <a:t>Data stays fully on-chain</a:t>
             </a:r>
-            <a:endParaRPr lang="en-US" sz="1450" dirty="0"/>
+            <a:endParaRPr lang="en-US" sz="1400" dirty="0"/>
           </a:p>
           <a:p>
             <a:pPr algn="l" marL="342900" indent="-342900">
@@ -2663,9 +2642,9 @@
               <a:buChar char="•"/>
             </a:pPr>
             <a:r>
-              <a:rPr lang="en-US" sz="1450" dirty="0">
+              <a:rPr lang="en-US" sz="1400" dirty="0">
                 <a:solidFill>
-                  <a:srgbClr val="E2E8F0"/>
+                  <a:srgbClr val="F1F5F9"/>
                 </a:solidFill>
                 <a:latin typeface="Calibri" pitchFamily="34" charset="0"/>
                 <a:ea typeface="Calibri" pitchFamily="34" charset="-122"/>
@@ -2673,7 +2652,7 @@
               </a:rPr>
               <a:t>Zero off-chain infrastructure</a:t>
             </a:r>
-            <a:endParaRPr lang="en-US" sz="1450" dirty="0"/>
+            <a:endParaRPr lang="en-US" sz="1400" dirty="0"/>
           </a:p>
           <a:p>
             <a:pPr algn="l" marL="342900" indent="-342900">
@@ -2684,9 +2663,9 @@
               <a:buChar char="•"/>
             </a:pPr>
             <a:r>
-              <a:rPr lang="en-US" sz="1450" dirty="0">
+              <a:rPr lang="en-US" sz="1400" dirty="0">
                 <a:solidFill>
-                  <a:srgbClr val="E2E8F0"/>
+                  <a:srgbClr val="F1F5F9"/>
                 </a:solidFill>
                 <a:latin typeface="Calibri" pitchFamily="34" charset="0"/>
                 <a:ea typeface="Calibri" pitchFamily="34" charset="-122"/>
@@ -2694,7 +2673,7 @@
               </a:rPr>
               <a:t>Drop-in for any Anchor/Borsh program</a:t>
             </a:r>
-            <a:endParaRPr lang="en-US" sz="1450" dirty="0"/>
+            <a:endParaRPr lang="en-US" sz="1400" dirty="0"/>
           </a:p>
         </p:txBody>
       </p:sp>
@@ -2712,7 +2691,7 @@
     <p:bg>
       <p:bgPr>
         <a:solidFill>
-          <a:srgbClr val="080C18"/>
+          <a:srgbClr val="090A0E"/>
         </a:solidFill>
       </p:bgPr>
     </p:bg>
@@ -2732,39 +2711,14 @@
       </p:grpSpPr>
       <p:sp>
         <p:nvSpPr>
-          <p:cNvPr id="2" name="Shape 0"/>
-          <p:cNvSpPr/>
-          <p:nvPr/>
-        </p:nvSpPr>
-        <p:spPr>
-          <a:xfrm>
-            <a:off x="411480" y="292608"/>
-            <a:ext cx="1463040" cy="292608"/>
-          </a:xfrm>
-          <a:prstGeom prst="rect">
-            <a:avLst/>
-          </a:prstGeom>
-          <a:solidFill>
-            <a:srgbClr val="14F195"/>
-          </a:solidFill>
-          <a:ln w="12700">
-            <a:solidFill>
-              <a:srgbClr val="14F195"/>
-            </a:solidFill>
-            <a:prstDash val="solid"/>
-          </a:ln>
-        </p:spPr>
-      </p:sp>
-      <p:sp>
-        <p:nvSpPr>
-          <p:cNvPr id="3" name="Text 1"/>
-          <p:cNvSpPr/>
-          <p:nvPr/>
-        </p:nvSpPr>
-        <p:spPr>
-          <a:xfrm>
-            <a:off x="411480" y="292608"/>
-            <a:ext cx="1463040" cy="292608"/>
+          <p:cNvPr id="2" name="Text 0"/>
+          <p:cNvSpPr/>
+          <p:nvPr/>
+        </p:nvSpPr>
+        <p:spPr>
+          <a:xfrm>
+            <a:off x="548640" y="292608"/>
+            <a:ext cx="2286000" cy="274320"/>
           </a:xfrm>
           <a:prstGeom prst="rect">
             <a:avLst/>
@@ -2776,34 +2730,130 @@
           <a:bodyPr wrap="square" lIns="0" tIns="0" rIns="0" bIns="0" rtlCol="0" anchor="ctr"/>
           <a:lstStyle/>
           <a:p>
-            <a:pPr algn="ctr" indent="0" marL="0">
+            <a:pPr algn="l" indent="0" marL="0">
               <a:buNone/>
             </a:pPr>
             <a:r>
-              <a:rPr lang="en-US" sz="1100" b="1" spc="200" kern="0" dirty="0">
+              <a:rPr lang="en-US" sz="1000" b="1" spc="300" kern="0" dirty="0">
                 <a:solidFill>
-                  <a:srgbClr val="1A2035"/>
+                  <a:srgbClr val="4ADE80"/>
+                </a:solidFill>
+                <a:latin typeface="Consolas" pitchFamily="34" charset="0"/>
+                <a:ea typeface="Consolas" pitchFamily="34" charset="-122"/>
+                <a:cs typeface="Consolas" pitchFamily="34" charset="-120"/>
+              </a:rPr>
+              <a:t>// SOLUTION</a:t>
+            </a:r>
+            <a:endParaRPr lang="en-US" sz="1000" dirty="0"/>
+          </a:p>
+        </p:txBody>
+      </p:sp>
+      <p:sp>
+        <p:nvSpPr>
+          <p:cNvPr id="3" name="Text 1"/>
+          <p:cNvSpPr/>
+          <p:nvPr/>
+        </p:nvSpPr>
+        <p:spPr>
+          <a:xfrm>
+            <a:off x="548640" y="658368"/>
+            <a:ext cx="8046720" cy="685800"/>
+          </a:xfrm>
+          <a:prstGeom prst="rect">
+            <a:avLst/>
+          </a:prstGeom>
+          <a:noFill/>
+          <a:ln/>
+        </p:spPr>
+        <p:txBody>
+          <a:bodyPr wrap="square" lIns="0" tIns="0" rIns="0" bIns="0" rtlCol="0" anchor="ctr"/>
+          <a:lstStyle/>
+          <a:p>
+            <a:pPr algn="l" indent="0" marL="0">
+              <a:buNone/>
+            </a:pPr>
+            <a:r>
+              <a:rPr lang="en-US" sz="3000" b="1" dirty="0">
+                <a:solidFill>
+                  <a:srgbClr val="F1F5F9"/>
                 </a:solidFill>
                 <a:latin typeface="Calibri" pitchFamily="34" charset="0"/>
                 <a:ea typeface="Calibri" pitchFamily="34" charset="-122"/>
                 <a:cs typeface="Calibri" pitchFamily="34" charset="-120"/>
               </a:rPr>
-              <a:t>SOLUTION</a:t>
-            </a:r>
-            <a:endParaRPr lang="en-US" sz="1100" dirty="0"/>
+              <a:t>LZ4 that fits the SBF VM</a:t>
+            </a:r>
+            <a:endParaRPr lang="en-US" sz="3000" dirty="0"/>
           </a:p>
         </p:txBody>
       </p:sp>
       <p:sp>
         <p:nvSpPr>
-          <p:cNvPr id="4" name="Text 2"/>
-          <p:cNvSpPr/>
-          <p:nvPr/>
-        </p:nvSpPr>
-        <p:spPr>
-          <a:xfrm>
-            <a:off x="411480" y="713232"/>
-            <a:ext cx="8321040" cy="685800"/>
+          <p:cNvPr id="4" name="Shape 2"/>
+          <p:cNvSpPr/>
+          <p:nvPr/>
+        </p:nvSpPr>
+        <p:spPr>
+          <a:xfrm>
+            <a:off x="548640" y="1389888"/>
+            <a:ext cx="8046720" cy="22860"/>
+          </a:xfrm>
+          <a:prstGeom prst="rect">
+            <a:avLst/>
+          </a:prstGeom>
+          <a:solidFill>
+            <a:srgbClr val="4ADE80"/>
+          </a:solidFill>
+          <a:ln w="12700">
+            <a:solidFill>
+              <a:srgbClr val="4ADE80"/>
+            </a:solidFill>
+            <a:prstDash val="solid"/>
+          </a:ln>
+        </p:spPr>
+      </p:sp>
+      <p:sp>
+        <p:nvSpPr>
+          <p:cNvPr id="5" name="Shape 3"/>
+          <p:cNvSpPr/>
+          <p:nvPr/>
+        </p:nvSpPr>
+        <p:spPr>
+          <a:xfrm>
+            <a:off x="548640" y="1572768"/>
+            <a:ext cx="4114800" cy="1417320"/>
+          </a:xfrm>
+          <a:prstGeom prst="rect">
+            <a:avLst/>
+          </a:prstGeom>
+          <a:solidFill>
+            <a:srgbClr val="0D1018"/>
+          </a:solidFill>
+          <a:ln w="12700">
+            <a:solidFill>
+              <a:srgbClr val="1A1F2E"/>
+            </a:solidFill>
+            <a:prstDash val="solid"/>
+          </a:ln>
+          <a:effectLst>
+            <a:outerShdw sx="100000" sy="100000" kx="0" ky="0" algn="bl" rotWithShape="0" blurRad="254000" dist="76200" dir="8100000">
+              <a:srgbClr val="000000">
+                <a:alpha val="50000"/>
+              </a:srgbClr>
+            </a:outerShdw>
+          </a:effectLst>
+        </p:spPr>
+      </p:sp>
+      <p:sp>
+        <p:nvSpPr>
+          <p:cNvPr id="6" name="Text 4"/>
+          <p:cNvSpPr/>
+          <p:nvPr/>
+        </p:nvSpPr>
+        <p:spPr>
+          <a:xfrm>
+            <a:off x="777240" y="1709928"/>
+            <a:ext cx="3749040" cy="384048"/>
           </a:xfrm>
           <a:prstGeom prst="rect">
             <a:avLst/>
@@ -2819,47 +2869,86 @@
               <a:buNone/>
             </a:pPr>
             <a:r>
-              <a:rPr lang="en-US" sz="3400" b="1" dirty="0">
+              <a:rPr lang="en-US" sz="1500" b="1" dirty="0">
                 <a:solidFill>
-                  <a:srgbClr val="FFFFFF"/>
+                  <a:srgbClr val="4ADE80"/>
+                </a:solidFill>
+                <a:latin typeface="Consolas" pitchFamily="34" charset="0"/>
+                <a:ea typeface="Consolas" pitchFamily="34" charset="-122"/>
+                <a:cs typeface="Consolas" pitchFamily="34" charset="-120"/>
+              </a:rPr>
+              <a:t>no_std Rust</a:t>
+            </a:r>
+            <a:endParaRPr lang="en-US" sz="1500" dirty="0"/>
+          </a:p>
+        </p:txBody>
+      </p:sp>
+      <p:sp>
+        <p:nvSpPr>
+          <p:cNvPr id="7" name="Text 5"/>
+          <p:cNvSpPr/>
+          <p:nvPr/>
+        </p:nvSpPr>
+        <p:spPr>
+          <a:xfrm>
+            <a:off x="777240" y="2121408"/>
+            <a:ext cx="3749040" cy="749808"/>
+          </a:xfrm>
+          <a:prstGeom prst="rect">
+            <a:avLst/>
+          </a:prstGeom>
+          <a:noFill/>
+          <a:ln/>
+        </p:spPr>
+        <p:txBody>
+          <a:bodyPr wrap="square" lIns="0" tIns="0" rIns="0" bIns="0" rtlCol="0" anchor="ctr"/>
+          <a:lstStyle/>
+          <a:p>
+            <a:pPr algn="l" indent="0" marL="0">
+              <a:buNone/>
+            </a:pPr>
+            <a:r>
+              <a:rPr lang="en-US" sz="1350" dirty="0">
+                <a:solidFill>
+                  <a:srgbClr val="9CA3AF"/>
                 </a:solidFill>
                 <a:latin typeface="Calibri" pitchFamily="34" charset="0"/>
                 <a:ea typeface="Calibri" pitchFamily="34" charset="-122"/>
                 <a:cs typeface="Calibri" pitchFamily="34" charset="-120"/>
               </a:rPr>
-              <a:t>densol — LZ4 that fits the SBF VM</a:t>
-            </a:r>
-            <a:endParaRPr lang="en-US" sz="3400" dirty="0"/>
+              <a:t>Zero libc dependencies — compiles for BPF with no patches</a:t>
+            </a:r>
+            <a:endParaRPr lang="en-US" sz="1350" dirty="0"/>
           </a:p>
         </p:txBody>
       </p:sp>
       <p:sp>
         <p:nvSpPr>
-          <p:cNvPr id="5" name="Shape 3"/>
-          <p:cNvSpPr/>
-          <p:nvPr/>
-        </p:nvSpPr>
-        <p:spPr>
-          <a:xfrm>
-            <a:off x="411480" y="1572768"/>
-            <a:ext cx="4206240" cy="1389888"/>
+          <p:cNvPr id="8" name="Shape 6"/>
+          <p:cNvSpPr/>
+          <p:nvPr/>
+        </p:nvSpPr>
+        <p:spPr>
+          <a:xfrm>
+            <a:off x="4892040" y="1572768"/>
+            <a:ext cx="4114800" cy="1417320"/>
           </a:xfrm>
           <a:prstGeom prst="rect">
             <a:avLst/>
           </a:prstGeom>
           <a:solidFill>
-            <a:srgbClr val="0F1627"/>
+            <a:srgbClr val="0D1018"/>
           </a:solidFill>
           <a:ln w="12700">
             <a:solidFill>
-              <a:srgbClr val="1E2D4F"/>
+              <a:srgbClr val="1A1F2E"/>
             </a:solidFill>
             <a:prstDash val="solid"/>
           </a:ln>
           <a:effectLst>
-            <a:outerShdw sx="100000" sy="100000" kx="0" ky="0" algn="bl" rotWithShape="0" blurRad="152400" dist="50800" dir="8100000">
+            <a:outerShdw sx="100000" sy="100000" kx="0" ky="0" algn="bl" rotWithShape="0" blurRad="254000" dist="76200" dir="8100000">
               <a:srgbClr val="000000">
-                <a:alpha val="35000"/>
+                <a:alpha val="50000"/>
               </a:srgbClr>
             </a:outerShdw>
           </a:effectLst>
@@ -2867,39 +2956,14 @@
       </p:sp>
       <p:sp>
         <p:nvSpPr>
-          <p:cNvPr id="6" name="Shape 4"/>
-          <p:cNvSpPr/>
-          <p:nvPr/>
-        </p:nvSpPr>
-        <p:spPr>
-          <a:xfrm>
-            <a:off x="411480" y="1572768"/>
-            <a:ext cx="64008" cy="1389888"/>
-          </a:xfrm>
-          <a:prstGeom prst="rect">
-            <a:avLst/>
-          </a:prstGeom>
-          <a:solidFill>
-            <a:srgbClr val="14F195"/>
-          </a:solidFill>
-          <a:ln w="12700">
-            <a:solidFill>
-              <a:srgbClr val="14F195"/>
-            </a:solidFill>
-            <a:prstDash val="solid"/>
-          </a:ln>
-        </p:spPr>
-      </p:sp>
-      <p:sp>
-        <p:nvSpPr>
-          <p:cNvPr id="7" name="Text 5"/>
-          <p:cNvSpPr/>
-          <p:nvPr/>
-        </p:nvSpPr>
-        <p:spPr>
-          <a:xfrm>
-            <a:off x="594360" y="1682496"/>
-            <a:ext cx="3931920" cy="384048"/>
+          <p:cNvPr id="9" name="Text 7"/>
+          <p:cNvSpPr/>
+          <p:nvPr/>
+        </p:nvSpPr>
+        <p:spPr>
+          <a:xfrm>
+            <a:off x="5120640" y="1709928"/>
+            <a:ext cx="3749040" cy="384048"/>
           </a:xfrm>
           <a:prstGeom prst="rect">
             <a:avLst/>
@@ -2915,30 +2979,30 @@
               <a:buNone/>
             </a:pPr>
             <a:r>
-              <a:rPr lang="en-US" sz="1600" b="1" dirty="0">
+              <a:rPr lang="en-US" sz="1500" b="1" dirty="0">
                 <a:solidFill>
-                  <a:srgbClr val="FFFFFF"/>
+                  <a:srgbClr val="4ADE80"/>
                 </a:solidFill>
                 <a:latin typeface="Consolas" pitchFamily="34" charset="0"/>
                 <a:ea typeface="Consolas" pitchFamily="34" charset="-122"/>
                 <a:cs typeface="Consolas" pitchFamily="34" charset="-120"/>
               </a:rPr>
-              <a:t>Pure no_std Rust</a:t>
-            </a:r>
-            <a:endParaRPr lang="en-US" sz="1600" dirty="0"/>
+              <a:t>16 KB stack table</a:t>
+            </a:r>
+            <a:endParaRPr lang="en-US" sz="1500" dirty="0"/>
           </a:p>
         </p:txBody>
       </p:sp>
       <p:sp>
         <p:nvSpPr>
-          <p:cNvPr id="8" name="Text 6"/>
-          <p:cNvSpPr/>
-          <p:nvPr/>
-        </p:nvSpPr>
-        <p:spPr>
-          <a:xfrm>
-            <a:off x="594360" y="2084832"/>
-            <a:ext cx="3931920" cy="749808"/>
+          <p:cNvPr id="10" name="Text 8"/>
+          <p:cNvSpPr/>
+          <p:nvPr/>
+        </p:nvSpPr>
+        <p:spPr>
+          <a:xfrm>
+            <a:off x="5120640" y="2121408"/>
+            <a:ext cx="3749040" cy="749808"/>
           </a:xfrm>
           <a:prstGeom prst="rect">
             <a:avLst/>
@@ -2956,13 +3020,13 @@
             <a:r>
               <a:rPr lang="en-US" sz="1350" dirty="0">
                 <a:solidFill>
-                  <a:srgbClr val="7B8CAA"/>
+                  <a:srgbClr val="9CA3AF"/>
                 </a:solidFill>
                 <a:latin typeface="Calibri" pitchFamily="34" charset="0"/>
                 <a:ea typeface="Calibri" pitchFamily="34" charset="-122"/>
                 <a:cs typeface="Calibri" pitchFamily="34" charset="-120"/>
               </a:rPr>
-              <a:t>Zero libc dependencies — compiles for SBF, no patches needed</a:t>
+              <a:t>Hash table lives on the stack; heap stays free for your data</a:t>
             </a:r>
             <a:endParaRPr lang="en-US" sz="1350" dirty="0"/>
           </a:p>
@@ -2970,31 +3034,31 @@
       </p:sp>
       <p:sp>
         <p:nvSpPr>
-          <p:cNvPr id="9" name="Shape 7"/>
-          <p:cNvSpPr/>
-          <p:nvPr/>
-        </p:nvSpPr>
-        <p:spPr>
-          <a:xfrm>
-            <a:off x="411480" y="3145536"/>
-            <a:ext cx="4206240" cy="1389888"/>
+          <p:cNvPr id="11" name="Shape 9"/>
+          <p:cNvSpPr/>
+          <p:nvPr/>
+        </p:nvSpPr>
+        <p:spPr>
+          <a:xfrm>
+            <a:off x="548640" y="3172968"/>
+            <a:ext cx="4114800" cy="1417320"/>
           </a:xfrm>
           <a:prstGeom prst="rect">
             <a:avLst/>
           </a:prstGeom>
           <a:solidFill>
-            <a:srgbClr val="0F1627"/>
+            <a:srgbClr val="0D1018"/>
           </a:solidFill>
           <a:ln w="12700">
             <a:solidFill>
-              <a:srgbClr val="1E2D4F"/>
+              <a:srgbClr val="1A1F2E"/>
             </a:solidFill>
             <a:prstDash val="solid"/>
           </a:ln>
           <a:effectLst>
-            <a:outerShdw sx="100000" sy="100000" kx="0" ky="0" algn="bl" rotWithShape="0" blurRad="152400" dist="50800" dir="8100000">
+            <a:outerShdw sx="100000" sy="100000" kx="0" ky="0" algn="bl" rotWithShape="0" blurRad="254000" dist="76200" dir="8100000">
               <a:srgbClr val="000000">
-                <a:alpha val="35000"/>
+                <a:alpha val="50000"/>
               </a:srgbClr>
             </a:outerShdw>
           </a:effectLst>
@@ -3002,39 +3066,14 @@
       </p:sp>
       <p:sp>
         <p:nvSpPr>
-          <p:cNvPr id="10" name="Shape 8"/>
-          <p:cNvSpPr/>
-          <p:nvPr/>
-        </p:nvSpPr>
-        <p:spPr>
-          <a:xfrm>
-            <a:off x="411480" y="3145536"/>
-            <a:ext cx="64008" cy="1389888"/>
-          </a:xfrm>
-          <a:prstGeom prst="rect">
-            <a:avLst/>
-          </a:prstGeom>
-          <a:solidFill>
-            <a:srgbClr val="14F195"/>
-          </a:solidFill>
-          <a:ln w="12700">
-            <a:solidFill>
-              <a:srgbClr val="14F195"/>
-            </a:solidFill>
-            <a:prstDash val="solid"/>
-          </a:ln>
-        </p:spPr>
-      </p:sp>
-      <p:sp>
-        <p:nvSpPr>
-          <p:cNvPr id="11" name="Text 9"/>
-          <p:cNvSpPr/>
-          <p:nvPr/>
-        </p:nvSpPr>
-        <p:spPr>
-          <a:xfrm>
-            <a:off x="594360" y="3255264"/>
-            <a:ext cx="3931920" cy="384048"/>
+          <p:cNvPr id="12" name="Text 10"/>
+          <p:cNvSpPr/>
+          <p:nvPr/>
+        </p:nvSpPr>
+        <p:spPr>
+          <a:xfrm>
+            <a:off x="777240" y="3310128"/>
+            <a:ext cx="3749040" cy="384048"/>
           </a:xfrm>
           <a:prstGeom prst="rect">
             <a:avLst/>
@@ -3050,144 +3089,9 @@
               <a:buNone/>
             </a:pPr>
             <a:r>
-              <a:rPr lang="en-US" sz="1600" b="1" dirty="0">
+              <a:rPr lang="en-US" sz="1500" b="1" dirty="0">
                 <a:solidFill>
-                  <a:srgbClr val="FFFFFF"/>
-                </a:solidFill>
-                <a:latin typeface="Consolas" pitchFamily="34" charset="0"/>
-                <a:ea typeface="Consolas" pitchFamily="34" charset="-122"/>
-                <a:cs typeface="Consolas" pitchFamily="34" charset="-120"/>
-              </a:rPr>
-              <a:t>16 KB stack hash table</a:t>
-            </a:r>
-            <a:endParaRPr lang="en-US" sz="1600" dirty="0"/>
-          </a:p>
-        </p:txBody>
-      </p:sp>
-      <p:sp>
-        <p:nvSpPr>
-          <p:cNvPr id="12" name="Text 10"/>
-          <p:cNvSpPr/>
-          <p:nvPr/>
-        </p:nvSpPr>
-        <p:spPr>
-          <a:xfrm>
-            <a:off x="594360" y="3657600"/>
-            <a:ext cx="3931920" cy="749808"/>
-          </a:xfrm>
-          <a:prstGeom prst="rect">
-            <a:avLst/>
-          </a:prstGeom>
-          <a:noFill/>
-          <a:ln/>
-        </p:spPr>
-        <p:txBody>
-          <a:bodyPr wrap="square" lIns="0" tIns="0" rIns="0" bIns="0" rtlCol="0" anchor="ctr"/>
-          <a:lstStyle/>
-          <a:p>
-            <a:pPr algn="l" indent="0" marL="0">
-              <a:buNone/>
-            </a:pPr>
-            <a:r>
-              <a:rPr lang="en-US" sz="1350" dirty="0">
-                <a:solidFill>
-                  <a:srgbClr val="7B8CAA"/>
-                </a:solidFill>
-                <a:latin typeface="Calibri" pitchFamily="34" charset="0"/>
-                <a:ea typeface="Calibri" pitchFamily="34" charset="-122"/>
-                <a:cs typeface="Calibri" pitchFamily="34" charset="-120"/>
-              </a:rPr>
-              <a:t>Heap stays free; peak usage ~2× input, not 100×</a:t>
-            </a:r>
-            <a:endParaRPr lang="en-US" sz="1350" dirty="0"/>
-          </a:p>
-        </p:txBody>
-      </p:sp>
-      <p:sp>
-        <p:nvSpPr>
-          <p:cNvPr id="13" name="Shape 11"/>
-          <p:cNvSpPr/>
-          <p:nvPr/>
-        </p:nvSpPr>
-        <p:spPr>
-          <a:xfrm>
-            <a:off x="4846320" y="1572768"/>
-            <a:ext cx="4206240" cy="1389888"/>
-          </a:xfrm>
-          <a:prstGeom prst="rect">
-            <a:avLst/>
-          </a:prstGeom>
-          <a:solidFill>
-            <a:srgbClr val="0F1627"/>
-          </a:solidFill>
-          <a:ln w="12700">
-            <a:solidFill>
-              <a:srgbClr val="1E2D4F"/>
-            </a:solidFill>
-            <a:prstDash val="solid"/>
-          </a:ln>
-          <a:effectLst>
-            <a:outerShdw sx="100000" sy="100000" kx="0" ky="0" algn="bl" rotWithShape="0" blurRad="152400" dist="50800" dir="8100000">
-              <a:srgbClr val="000000">
-                <a:alpha val="35000"/>
-              </a:srgbClr>
-            </a:outerShdw>
-          </a:effectLst>
-        </p:spPr>
-      </p:sp>
-      <p:sp>
-        <p:nvSpPr>
-          <p:cNvPr id="14" name="Shape 12"/>
-          <p:cNvSpPr/>
-          <p:nvPr/>
-        </p:nvSpPr>
-        <p:spPr>
-          <a:xfrm>
-            <a:off x="4846320" y="1572768"/>
-            <a:ext cx="64008" cy="1389888"/>
-          </a:xfrm>
-          <a:prstGeom prst="rect">
-            <a:avLst/>
-          </a:prstGeom>
-          <a:solidFill>
-            <a:srgbClr val="14F195"/>
-          </a:solidFill>
-          <a:ln w="12700">
-            <a:solidFill>
-              <a:srgbClr val="14F195"/>
-            </a:solidFill>
-            <a:prstDash val="solid"/>
-          </a:ln>
-        </p:spPr>
-      </p:sp>
-      <p:sp>
-        <p:nvSpPr>
-          <p:cNvPr id="15" name="Text 13"/>
-          <p:cNvSpPr/>
-          <p:nvPr/>
-        </p:nvSpPr>
-        <p:spPr>
-          <a:xfrm>
-            <a:off x="5029200" y="1682496"/>
-            <a:ext cx="3931920" cy="384048"/>
-          </a:xfrm>
-          <a:prstGeom prst="rect">
-            <a:avLst/>
-          </a:prstGeom>
-          <a:noFill/>
-          <a:ln/>
-        </p:spPr>
-        <p:txBody>
-          <a:bodyPr wrap="square" lIns="0" tIns="0" rIns="0" bIns="0" rtlCol="0" anchor="ctr"/>
-          <a:lstStyle/>
-          <a:p>
-            <a:pPr algn="l" indent="0" marL="0">
-              <a:buNone/>
-            </a:pPr>
-            <a:r>
-              <a:rPr lang="en-US" sz="1600" b="1" dirty="0">
-                <a:solidFill>
-                  <a:srgbClr val="FFFFFF"/>
+                  <a:srgbClr val="4ADE80"/>
                 </a:solidFill>
                 <a:latin typeface="Consolas" pitchFamily="34" charset="0"/>
                 <a:ea typeface="Consolas" pitchFamily="34" charset="-122"/>
@@ -3195,20 +3099,20 @@
               </a:rPr>
               <a:t>ChunkedLz4&lt;4096&gt;</a:t>
             </a:r>
-            <a:endParaRPr lang="en-US" sz="1600" dirty="0"/>
+            <a:endParaRPr lang="en-US" sz="1500" dirty="0"/>
           </a:p>
         </p:txBody>
       </p:sp>
       <p:sp>
         <p:nvSpPr>
-          <p:cNvPr id="16" name="Text 14"/>
-          <p:cNvSpPr/>
-          <p:nvPr/>
-        </p:nvSpPr>
-        <p:spPr>
-          <a:xfrm>
-            <a:off x="5029200" y="2084832"/>
-            <a:ext cx="3931920" cy="749808"/>
+          <p:cNvPr id="13" name="Text 11"/>
+          <p:cNvSpPr/>
+          <p:nvPr/>
+        </p:nvSpPr>
+        <p:spPr>
+          <a:xfrm>
+            <a:off x="777240" y="3721608"/>
+            <a:ext cx="3749040" cy="749808"/>
           </a:xfrm>
           <a:prstGeom prst="rect">
             <a:avLst/>
@@ -3226,13 +3130,13 @@
             <a:r>
               <a:rPr lang="en-US" sz="1350" dirty="0">
                 <a:solidFill>
-                  <a:srgbClr val="7B8CAA"/>
+                  <a:srgbClr val="9CA3AF"/>
                 </a:solidFill>
                 <a:latin typeface="Calibri" pitchFamily="34" charset="0"/>
                 <a:ea typeface="Calibri" pitchFamily="34" charset="-122"/>
                 <a:cs typeface="Calibri" pitchFamily="34" charset="-120"/>
               </a:rPr>
-              <a:t>4 KB chunks — decompress one at a time, no heap ceiling on account size</a:t>
+              <a:t>4 KB chunks — decompress one at a time, no heap ceiling</a:t>
             </a:r>
             <a:endParaRPr lang="en-US" sz="1350" dirty="0"/>
           </a:p>
@@ -3240,31 +3144,31 @@
       </p:sp>
       <p:sp>
         <p:nvSpPr>
-          <p:cNvPr id="17" name="Shape 15"/>
-          <p:cNvSpPr/>
-          <p:nvPr/>
-        </p:nvSpPr>
-        <p:spPr>
-          <a:xfrm>
-            <a:off x="4846320" y="3145536"/>
-            <a:ext cx="4206240" cy="1389888"/>
+          <p:cNvPr id="14" name="Shape 12"/>
+          <p:cNvSpPr/>
+          <p:nvPr/>
+        </p:nvSpPr>
+        <p:spPr>
+          <a:xfrm>
+            <a:off x="4892040" y="3172968"/>
+            <a:ext cx="4114800" cy="1417320"/>
           </a:xfrm>
           <a:prstGeom prst="rect">
             <a:avLst/>
           </a:prstGeom>
           <a:solidFill>
-            <a:srgbClr val="0F1627"/>
+            <a:srgbClr val="0D1018"/>
           </a:solidFill>
           <a:ln w="12700">
             <a:solidFill>
-              <a:srgbClr val="1E2D4F"/>
+              <a:srgbClr val="1A1F2E"/>
             </a:solidFill>
             <a:prstDash val="solid"/>
           </a:ln>
           <a:effectLst>
-            <a:outerShdw sx="100000" sy="100000" kx="0" ky="0" algn="bl" rotWithShape="0" blurRad="152400" dist="50800" dir="8100000">
+            <a:outerShdw sx="100000" sy="100000" kx="0" ky="0" algn="bl" rotWithShape="0" blurRad="254000" dist="76200" dir="8100000">
               <a:srgbClr val="000000">
-                <a:alpha val="35000"/>
+                <a:alpha val="50000"/>
               </a:srgbClr>
             </a:outerShdw>
           </a:effectLst>
@@ -3272,39 +3176,14 @@
       </p:sp>
       <p:sp>
         <p:nvSpPr>
-          <p:cNvPr id="18" name="Shape 16"/>
-          <p:cNvSpPr/>
-          <p:nvPr/>
-        </p:nvSpPr>
-        <p:spPr>
-          <a:xfrm>
-            <a:off x="4846320" y="3145536"/>
-            <a:ext cx="64008" cy="1389888"/>
-          </a:xfrm>
-          <a:prstGeom prst="rect">
-            <a:avLst/>
-          </a:prstGeom>
-          <a:solidFill>
-            <a:srgbClr val="14F195"/>
-          </a:solidFill>
-          <a:ln w="12700">
-            <a:solidFill>
-              <a:srgbClr val="14F195"/>
-            </a:solidFill>
-            <a:prstDash val="solid"/>
-          </a:ln>
-        </p:spPr>
-      </p:sp>
-      <p:sp>
-        <p:nvSpPr>
-          <p:cNvPr id="19" name="Text 17"/>
-          <p:cNvSpPr/>
-          <p:nvPr/>
-        </p:nvSpPr>
-        <p:spPr>
-          <a:xfrm>
-            <a:off x="5029200" y="3255264"/>
-            <a:ext cx="3931920" cy="384048"/>
+          <p:cNvPr id="15" name="Text 13"/>
+          <p:cNvSpPr/>
+          <p:nvPr/>
+        </p:nvSpPr>
+        <p:spPr>
+          <a:xfrm>
+            <a:off x="5120640" y="3310128"/>
+            <a:ext cx="3749040" cy="384048"/>
           </a:xfrm>
           <a:prstGeom prst="rect">
             <a:avLst/>
@@ -3320,30 +3199,30 @@
               <a:buNone/>
             </a:pPr>
             <a:r>
-              <a:rPr lang="en-US" sz="1600" b="1" dirty="0">
+              <a:rPr lang="en-US" sz="1500" b="1" dirty="0">
                 <a:solidFill>
-                  <a:srgbClr val="FFFFFF"/>
+                  <a:srgbClr val="4ADE80"/>
                 </a:solidFill>
                 <a:latin typeface="Consolas" pitchFamily="34" charset="0"/>
                 <a:ea typeface="Consolas" pitchFamily="34" charset="-122"/>
                 <a:cs typeface="Consolas" pitchFamily="34" charset="-120"/>
               </a:rPr>
-              <a:t>#[compress] attribute</a:t>
-            </a:r>
-            <a:endParaRPr lang="en-US" sz="1600" dirty="0"/>
+              <a:t>#[compress]</a:t>
+            </a:r>
+            <a:endParaRPr lang="en-US" sz="1500" dirty="0"/>
           </a:p>
         </p:txBody>
       </p:sp>
       <p:sp>
         <p:nvSpPr>
-          <p:cNvPr id="20" name="Text 18"/>
-          <p:cNvSpPr/>
-          <p:nvPr/>
-        </p:nvSpPr>
-        <p:spPr>
-          <a:xfrm>
-            <a:off x="5029200" y="3657600"/>
-            <a:ext cx="3931920" cy="749808"/>
+          <p:cNvPr id="16" name="Text 14"/>
+          <p:cNvSpPr/>
+          <p:nvPr/>
+        </p:nvSpPr>
+        <p:spPr>
+          <a:xfrm>
+            <a:off x="5120640" y="3721608"/>
+            <a:ext cx="3749040" cy="749808"/>
           </a:xfrm>
           <a:prstGeom prst="rect">
             <a:avLst/>
@@ -3361,13 +3240,13 @@
             <a:r>
               <a:rPr lang="en-US" sz="1350" dirty="0">
                 <a:solidFill>
-                  <a:srgbClr val="7B8CAA"/>
+                  <a:srgbClr val="9CA3AF"/>
                 </a:solidFill>
                 <a:latin typeface="Calibri" pitchFamily="34" charset="0"/>
                 <a:ea typeface="Calibri" pitchFamily="34" charset="-122"/>
                 <a:cs typeface="Calibri" pitchFamily="34" charset="-120"/>
               </a:rPr>
-              <a:t>One attribute on any Vec&lt;u8&gt; field in an Anchor/Borsh account</a:t>
+              <a:t>Single derive attribute on any Vec&lt;u8&gt; field in an Anchor account</a:t>
             </a:r>
             <a:endParaRPr lang="en-US" sz="1350" dirty="0"/>
           </a:p>
@@ -3375,14 +3254,14 @@
       </p:sp>
       <p:sp>
         <p:nvSpPr>
-          <p:cNvPr id="21" name="Text 19"/>
-          <p:cNvSpPr/>
-          <p:nvPr/>
-        </p:nvSpPr>
-        <p:spPr>
-          <a:xfrm>
-            <a:off x="411480" y="4736592"/>
-            <a:ext cx="8321040" cy="320040"/>
+          <p:cNvPr id="17" name="Text 15"/>
+          <p:cNvSpPr/>
+          <p:nvPr/>
+        </p:nvSpPr>
+        <p:spPr>
+          <a:xfrm>
+            <a:off x="548640" y="4754880"/>
+            <a:ext cx="8046720" cy="292608"/>
           </a:xfrm>
           <a:prstGeom prst="rect">
             <a:avLst/>
@@ -3398,17 +3277,17 @@
               <a:buNone/>
             </a:pPr>
             <a:r>
-              <a:rPr lang="en-US" sz="1300" i="1" dirty="0">
+              <a:rPr lang="en-US" sz="1100" dirty="0">
                 <a:solidFill>
-                  <a:srgbClr val="14F195"/>
+                  <a:srgbClr val="4B5563"/>
                 </a:solidFill>
-                <a:latin typeface="Calibri" pitchFamily="34" charset="0"/>
-                <a:ea typeface="Calibri" pitchFamily="34" charset="-122"/>
-                <a:cs typeface="Calibri" pitchFamily="34" charset="-120"/>
+                <a:latin typeface="Consolas" pitchFamily="34" charset="0"/>
+                <a:ea typeface="Consolas" pitchFamily="34" charset="-122"/>
+                <a:cs typeface="Consolas" pitchFamily="34" charset="-120"/>
               </a:rPr>
-              <a:t>Published on crates.io  ·  MIT licensed  ·  Open source</a:t>
-            </a:r>
-            <a:endParaRPr lang="en-US" sz="1300" dirty="0"/>
+              <a:t>crates.io/crates/densol  ·  MIT licensed  ·  Open source</a:t>
+            </a:r>
+            <a:endParaRPr lang="en-US" sz="1100" dirty="0"/>
           </a:p>
         </p:txBody>
       </p:sp>
@@ -3426,7 +3305,7 @@
     <p:bg>
       <p:bgPr>
         <a:solidFill>
-          <a:srgbClr val="080C18"/>
+          <a:srgbClr val="090A0E"/>
         </a:solidFill>
       </p:bgPr>
     </p:bg>
@@ -3446,39 +3325,14 @@
       </p:grpSpPr>
       <p:sp>
         <p:nvSpPr>
-          <p:cNvPr id="2" name="Shape 0"/>
-          <p:cNvSpPr/>
-          <p:nvPr/>
-        </p:nvSpPr>
-        <p:spPr>
-          <a:xfrm>
-            <a:off x="411480" y="256032"/>
-            <a:ext cx="1554480" cy="292608"/>
-          </a:xfrm>
-          <a:prstGeom prst="rect">
-            <a:avLst/>
-          </a:prstGeom>
-          <a:solidFill>
-            <a:srgbClr val="9945FF"/>
-          </a:solidFill>
-          <a:ln w="12700">
-            <a:solidFill>
-              <a:srgbClr val="9945FF"/>
-            </a:solidFill>
-            <a:prstDash val="solid"/>
-          </a:ln>
-        </p:spPr>
-      </p:sp>
-      <p:sp>
-        <p:nvSpPr>
-          <p:cNvPr id="3" name="Text 1"/>
-          <p:cNvSpPr/>
-          <p:nvPr/>
-        </p:nvSpPr>
-        <p:spPr>
-          <a:xfrm>
-            <a:off x="411480" y="256032"/>
-            <a:ext cx="1554480" cy="292608"/>
+          <p:cNvPr id="2" name="Text 0"/>
+          <p:cNvSpPr/>
+          <p:nvPr/>
+        </p:nvSpPr>
+        <p:spPr>
+          <a:xfrm>
+            <a:off x="548640" y="256032"/>
+            <a:ext cx="2286000" cy="274320"/>
           </a:xfrm>
           <a:prstGeom prst="rect">
             <a:avLst/>
@@ -3490,34 +3344,34 @@
           <a:bodyPr wrap="square" lIns="0" tIns="0" rIns="0" bIns="0" rtlCol="0" anchor="ctr"/>
           <a:lstStyle/>
           <a:p>
-            <a:pPr algn="ctr" indent="0" marL="0">
+            <a:pPr algn="l" indent="0" marL="0">
               <a:buNone/>
             </a:pPr>
             <a:r>
-              <a:rPr lang="en-US" sz="1100" b="1" spc="200" kern="0" dirty="0">
+              <a:rPr lang="en-US" sz="1000" b="1" spc="300" kern="0" dirty="0">
                 <a:solidFill>
-                  <a:srgbClr val="FFFFFF"/>
+                  <a:srgbClr val="4ADE80"/>
                 </a:solidFill>
-                <a:latin typeface="Calibri" pitchFamily="34" charset="0"/>
-                <a:ea typeface="Calibri" pitchFamily="34" charset="-122"/>
-                <a:cs typeface="Calibri" pitchFamily="34" charset="-120"/>
+                <a:latin typeface="Consolas" pitchFamily="34" charset="0"/>
+                <a:ea typeface="Consolas" pitchFamily="34" charset="-122"/>
+                <a:cs typeface="Consolas" pitchFamily="34" charset="-120"/>
               </a:rPr>
-              <a:t>RESULTS</a:t>
-            </a:r>
-            <a:endParaRPr lang="en-US" sz="1100" dirty="0"/>
+              <a:t>// RESULTS</a:t>
+            </a:r>
+            <a:endParaRPr lang="en-US" sz="1000" dirty="0"/>
           </a:p>
         </p:txBody>
       </p:sp>
       <p:sp>
         <p:nvSpPr>
-          <p:cNvPr id="4" name="Text 2"/>
-          <p:cNvSpPr/>
-          <p:nvPr/>
-        </p:nvSpPr>
-        <p:spPr>
-          <a:xfrm>
-            <a:off x="411480" y="640080"/>
-            <a:ext cx="6400800" cy="475488"/>
+          <p:cNvPr id="3" name="Text 1"/>
+          <p:cNvSpPr/>
+          <p:nvPr/>
+        </p:nvSpPr>
+        <p:spPr>
+          <a:xfrm>
+            <a:off x="548640" y="621792"/>
+            <a:ext cx="6400800" cy="502920"/>
           </a:xfrm>
           <a:prstGeom prst="rect">
             <a:avLst/>
@@ -3535,7 +3389,7 @@
             <a:r>
               <a:rPr lang="en-US" sz="2600" b="1" dirty="0">
                 <a:solidFill>
-                  <a:srgbClr val="FFFFFF"/>
+                  <a:srgbClr val="F1F5F9"/>
                 </a:solidFill>
                 <a:latin typeface="Calibri" pitchFamily="34" charset="0"/>
                 <a:ea typeface="Calibri" pitchFamily="34" charset="-122"/>
@@ -3549,31 +3403,31 @@
       </p:sp>
       <p:sp>
         <p:nvSpPr>
-          <p:cNvPr id="5" name="Shape 3"/>
-          <p:cNvSpPr/>
-          <p:nvPr/>
-        </p:nvSpPr>
-        <p:spPr>
-          <a:xfrm>
-            <a:off x="7223760" y="502920"/>
-            <a:ext cx="1600200" cy="1188720"/>
+          <p:cNvPr id="4" name="Shape 2"/>
+          <p:cNvSpPr/>
+          <p:nvPr/>
+        </p:nvSpPr>
+        <p:spPr>
+          <a:xfrm>
+            <a:off x="7315200" y="502920"/>
+            <a:ext cx="1508760" cy="1143000"/>
           </a:xfrm>
           <a:prstGeom prst="rect">
             <a:avLst/>
           </a:prstGeom>
           <a:solidFill>
-            <a:srgbClr val="130D2A"/>
+            <a:srgbClr val="111520"/>
           </a:solidFill>
-          <a:ln w="25400">
+          <a:ln w="12700">
             <a:solidFill>
-              <a:srgbClr val="9945FF"/>
+              <a:srgbClr val="1A1F2E"/>
             </a:solidFill>
             <a:prstDash val="solid"/>
           </a:ln>
           <a:effectLst>
-            <a:outerShdw sx="100000" sy="100000" kx="0" ky="0" algn="bl" rotWithShape="0" blurRad="152400" dist="50800" dir="8100000">
+            <a:outerShdw sx="100000" sy="100000" kx="0" ky="0" algn="bl" rotWithShape="0" blurRad="254000" dist="76200" dir="8100000">
               <a:srgbClr val="000000">
-                <a:alpha val="35000"/>
+                <a:alpha val="50000"/>
               </a:srgbClr>
             </a:outerShdw>
           </a:effectLst>
@@ -3581,14 +3435,39 @@
       </p:sp>
       <p:sp>
         <p:nvSpPr>
+          <p:cNvPr id="5" name="Shape 3"/>
+          <p:cNvSpPr/>
+          <p:nvPr/>
+        </p:nvSpPr>
+        <p:spPr>
+          <a:xfrm>
+            <a:off x="7315200" y="502920"/>
+            <a:ext cx="1508760" cy="32004"/>
+          </a:xfrm>
+          <a:prstGeom prst="rect">
+            <a:avLst/>
+          </a:prstGeom>
+          <a:solidFill>
+            <a:srgbClr val="4ADE80"/>
+          </a:solidFill>
+          <a:ln w="12700">
+            <a:solidFill>
+              <a:srgbClr val="4ADE80"/>
+            </a:solidFill>
+            <a:prstDash val="solid"/>
+          </a:ln>
+        </p:spPr>
+      </p:sp>
+      <p:sp>
+        <p:nvSpPr>
           <p:cNvPr id="6" name="Text 4"/>
           <p:cNvSpPr/>
           <p:nvPr/>
         </p:nvSpPr>
         <p:spPr>
           <a:xfrm>
-            <a:off x="7223760" y="566928"/>
-            <a:ext cx="1600200" cy="658368"/>
+            <a:off x="7315200" y="548640"/>
+            <a:ext cx="1508760" cy="658368"/>
           </a:xfrm>
           <a:prstGeom prst="rect">
             <a:avLst/>
@@ -3604,9 +3483,9 @@
               <a:buNone/>
             </a:pPr>
             <a:r>
-              <a:rPr lang="en-US" sz="4600" b="1" dirty="0">
+              <a:rPr lang="en-US" sz="4200" b="1" dirty="0">
                 <a:solidFill>
-                  <a:srgbClr val="14F195"/>
+                  <a:srgbClr val="4ADE80"/>
                 </a:solidFill>
                 <a:latin typeface="Consolas" pitchFamily="34" charset="0"/>
                 <a:ea typeface="Consolas" pitchFamily="34" charset="-122"/>
@@ -3614,7 +3493,7 @@
               </a:rPr>
               <a:t>53×</a:t>
             </a:r>
-            <a:endParaRPr lang="en-US" sz="4600" dirty="0"/>
+            <a:endParaRPr lang="en-US" sz="4200" dirty="0"/>
           </a:p>
         </p:txBody>
       </p:sp>
@@ -3626,8 +3505,8 @@
         </p:nvSpPr>
         <p:spPr>
           <a:xfrm>
-            <a:off x="7223760" y="1170432"/>
-            <a:ext cx="1600200" cy="347472"/>
+            <a:off x="7315200" y="1170432"/>
+            <a:ext cx="1508760" cy="320040"/>
           </a:xfrm>
           <a:prstGeom prst="rect">
             <a:avLst/>
@@ -3643,9 +3522,9 @@
               <a:buNone/>
             </a:pPr>
             <a:r>
-              <a:rPr lang="en-US" sz="1100" dirty="0">
+              <a:rPr lang="en-US" sz="1000" dirty="0">
                 <a:solidFill>
-                  <a:srgbClr val="7B8CAA"/>
+                  <a:srgbClr val="9CA3AF"/>
                 </a:solidFill>
                 <a:latin typeface="Calibri" pitchFamily="34" charset="0"/>
                 <a:ea typeface="Calibri" pitchFamily="34" charset="-122"/>
@@ -3653,9 +3532,34 @@
               </a:rPr>
               <a:t>OpenBook</a:t>
             </a:r>
-            <a:endParaRPr lang="en-US" sz="1100" dirty="0"/>
+            <a:endParaRPr lang="en-US" sz="1000" dirty="0"/>
           </a:p>
         </p:txBody>
+      </p:sp>
+      <p:sp>
+        <p:nvSpPr>
+          <p:cNvPr id="8" name="Shape 6"/>
+          <p:cNvSpPr/>
+          <p:nvPr/>
+        </p:nvSpPr>
+        <p:spPr>
+          <a:xfrm>
+            <a:off x="548640" y="1234440"/>
+            <a:ext cx="8046720" cy="22860"/>
+          </a:xfrm>
+          <a:prstGeom prst="rect">
+            <a:avLst/>
+          </a:prstGeom>
+          <a:solidFill>
+            <a:srgbClr val="4ADE80"/>
+          </a:solidFill>
+          <a:ln w="12700">
+            <a:solidFill>
+              <a:srgbClr val="4ADE80"/>
+            </a:solidFill>
+            <a:prstDash val="solid"/>
+          </a:ln>
+        </p:spPr>
       </p:sp>
       <p:graphicFrame>
         <p:nvGraphicFramePr>
@@ -3672,22 +3576,22 @@
           </p:nvPr>
         </p:nvGraphicFramePr>
         <p:xfrm>
-          <a:off x="411480" y="1207008"/>
-          <a:ext cx="8321040" cy="3154680"/>
+          <a:off x="548640" y="1353312"/>
+          <a:ext cx="8229600" cy="3090672"/>
         </p:xfrm>
         <a:graphic>
           <a:graphicData uri="http://schemas.openxmlformats.org/drawingml/2006/table">
             <a:tbl>
               <a:tblPr/>
               <a:tblGrid>
-                <a:gridCol w="1386840"/>
-                <a:gridCol w="1386840"/>
-                <a:gridCol w="1386840"/>
-                <a:gridCol w="1386840"/>
-                <a:gridCol w="1386840"/>
-                <a:gridCol w="1386840"/>
+                <a:gridCol w="1371600"/>
+                <a:gridCol w="1371600"/>
+                <a:gridCol w="1371600"/>
+                <a:gridCol w="1371600"/>
+                <a:gridCol w="1371600"/>
+                <a:gridCol w="1371600"/>
               </a:tblGrid>
-              <a:tr h="475488">
+              <a:tr h="457200">
                 <a:tc>
                   <a:txBody>
                     <a:bodyPr/>
@@ -3697,20 +3601,20 @@
                         <a:buNone/>
                       </a:pPr>
                       <a:r>
-                        <a:rPr lang="en-US" sz="1250" b="1" dirty="0">
+                        <a:rPr lang="en-US" sz="1150" b="1" dirty="0">
                           <a:solidFill>
-                            <a:srgbClr val="14F195"/>
+                            <a:srgbClr val="4ADE80"/>
                           </a:solidFill>
                         </a:rPr>
                         <a:t>Account</a:t>
                       </a:r>
-                      <a:endParaRPr lang="en-US" sz="1250" dirty="0"/>
+                      <a:endParaRPr lang="en-US" sz="1150" dirty="0"/>
                     </a:p>
                   </a:txBody>
                   <a:tcPr marL="91440" marR="91440" marT="45720" marB="45720">
                     <a:lnL w="6350" cap="flat" cmpd="sng" algn="ctr">
                       <a:solidFill>
-                        <a:srgbClr val="1E2D4F"/>
+                        <a:srgbClr val="1A1F2E"/>
                       </a:solidFill>
                       <a:prstDash val="solid"/>
                       <a:round/>
@@ -3719,7 +3623,7 @@
                     </a:lnL>
                     <a:lnR w="6350" cap="flat" cmpd="sng" algn="ctr">
                       <a:solidFill>
-                        <a:srgbClr val="1E2D4F"/>
+                        <a:srgbClr val="1A1F2E"/>
                       </a:solidFill>
                       <a:prstDash val="solid"/>
                       <a:round/>
@@ -3728,7 +3632,7 @@
                     </a:lnR>
                     <a:lnT w="6350" cap="flat" cmpd="sng" algn="ctr">
                       <a:solidFill>
-                        <a:srgbClr val="1E2D4F"/>
+                        <a:srgbClr val="1A1F2E"/>
                       </a:solidFill>
                       <a:prstDash val="solid"/>
                       <a:round/>
@@ -3737,7 +3641,7 @@
                     </a:lnT>
                     <a:lnB w="6350" cap="flat" cmpd="sng" algn="ctr">
                       <a:solidFill>
-                        <a:srgbClr val="1E2D4F"/>
+                        <a:srgbClr val="1A1F2E"/>
                       </a:solidFill>
                       <a:prstDash val="solid"/>
                       <a:round/>
@@ -3745,7 +3649,7 @@
                       <a:tailEnd type="none" w="med" len="med"/>
                     </a:lnB>
                     <a:solidFill>
-                      <a:srgbClr val="1C1040"/>
+                      <a:srgbClr val="111520"/>
                     </a:solidFill>
                   </a:tcPr>
                 </a:tc>
@@ -3758,20 +3662,20 @@
                         <a:buNone/>
                       </a:pPr>
                       <a:r>
-                        <a:rPr lang="en-US" sz="1250" b="1" dirty="0">
+                        <a:rPr lang="en-US" sz="1150" b="1" dirty="0">
                           <a:solidFill>
-                            <a:srgbClr val="14F195"/>
+                            <a:srgbClr val="4ADE80"/>
                           </a:solidFill>
                         </a:rPr>
                         <a:t>Raw</a:t>
                       </a:r>
-                      <a:endParaRPr lang="en-US" sz="1250" dirty="0"/>
+                      <a:endParaRPr lang="en-US" sz="1150" dirty="0"/>
                     </a:p>
                   </a:txBody>
                   <a:tcPr marL="91440" marR="91440" marT="45720" marB="45720">
                     <a:lnL w="6350" cap="flat" cmpd="sng" algn="ctr">
                       <a:solidFill>
-                        <a:srgbClr val="1E2D4F"/>
+                        <a:srgbClr val="1A1F2E"/>
                       </a:solidFill>
                       <a:prstDash val="solid"/>
                       <a:round/>
@@ -3780,7 +3684,7 @@
                     </a:lnL>
                     <a:lnR w="6350" cap="flat" cmpd="sng" algn="ctr">
                       <a:solidFill>
-                        <a:srgbClr val="1E2D4F"/>
+                        <a:srgbClr val="1A1F2E"/>
                       </a:solidFill>
                       <a:prstDash val="solid"/>
                       <a:round/>
@@ -3789,7 +3693,7 @@
                     </a:lnR>
                     <a:lnT w="6350" cap="flat" cmpd="sng" algn="ctr">
                       <a:solidFill>
-                        <a:srgbClr val="1E2D4F"/>
+                        <a:srgbClr val="1A1F2E"/>
                       </a:solidFill>
                       <a:prstDash val="solid"/>
                       <a:round/>
@@ -3798,7 +3702,7 @@
                     </a:lnT>
                     <a:lnB w="6350" cap="flat" cmpd="sng" algn="ctr">
                       <a:solidFill>
-                        <a:srgbClr val="1E2D4F"/>
+                        <a:srgbClr val="1A1F2E"/>
                       </a:solidFill>
                       <a:prstDash val="solid"/>
                       <a:round/>
@@ -3806,7 +3710,7 @@
                       <a:tailEnd type="none" w="med" len="med"/>
                     </a:lnB>
                     <a:solidFill>
-                      <a:srgbClr val="1C1040"/>
+                      <a:srgbClr val="111520"/>
                     </a:solidFill>
                   </a:tcPr>
                 </a:tc>
@@ -3819,20 +3723,20 @@
                         <a:buNone/>
                       </a:pPr>
                       <a:r>
-                        <a:rPr lang="en-US" sz="1250" b="1" dirty="0">
+                        <a:rPr lang="en-US" sz="1150" b="1" dirty="0">
                           <a:solidFill>
-                            <a:srgbClr val="14F195"/>
+                            <a:srgbClr val="4ADE80"/>
                           </a:solidFill>
                         </a:rPr>
                         <a:t>Compressed</a:t>
                       </a:r>
-                      <a:endParaRPr lang="en-US" sz="1250" dirty="0"/>
+                      <a:endParaRPr lang="en-US" sz="1150" dirty="0"/>
                     </a:p>
                   </a:txBody>
                   <a:tcPr marL="91440" marR="91440" marT="45720" marB="45720">
                     <a:lnL w="6350" cap="flat" cmpd="sng" algn="ctr">
                       <a:solidFill>
-                        <a:srgbClr val="1E2D4F"/>
+                        <a:srgbClr val="1A1F2E"/>
                       </a:solidFill>
                       <a:prstDash val="solid"/>
                       <a:round/>
@@ -3841,7 +3745,7 @@
                     </a:lnL>
                     <a:lnR w="6350" cap="flat" cmpd="sng" algn="ctr">
                       <a:solidFill>
-                        <a:srgbClr val="1E2D4F"/>
+                        <a:srgbClr val="1A1F2E"/>
                       </a:solidFill>
                       <a:prstDash val="solid"/>
                       <a:round/>
@@ -3850,7 +3754,7 @@
                     </a:lnR>
                     <a:lnT w="6350" cap="flat" cmpd="sng" algn="ctr">
                       <a:solidFill>
-                        <a:srgbClr val="1E2D4F"/>
+                        <a:srgbClr val="1A1F2E"/>
                       </a:solidFill>
                       <a:prstDash val="solid"/>
                       <a:round/>
@@ -3859,7 +3763,7 @@
                     </a:lnT>
                     <a:lnB w="6350" cap="flat" cmpd="sng" algn="ctr">
                       <a:solidFill>
-                        <a:srgbClr val="1E2D4F"/>
+                        <a:srgbClr val="1A1F2E"/>
                       </a:solidFill>
                       <a:prstDash val="solid"/>
                       <a:round/>
@@ -3867,7 +3771,7 @@
                       <a:tailEnd type="none" w="med" len="med"/>
                     </a:lnB>
                     <a:solidFill>
-                      <a:srgbClr val="1C1040"/>
+                      <a:srgbClr val="111520"/>
                     </a:solidFill>
                   </a:tcPr>
                 </a:tc>
@@ -3880,20 +3784,20 @@
                         <a:buNone/>
                       </a:pPr>
                       <a:r>
-                        <a:rPr lang="en-US" sz="1250" b="1" dirty="0">
+                        <a:rPr lang="en-US" sz="1150" b="1" dirty="0">
                           <a:solidFill>
-                            <a:srgbClr val="14F195"/>
+                            <a:srgbClr val="4ADE80"/>
                           </a:solidFill>
                         </a:rPr>
                         <a:t>Ratio</a:t>
                       </a:r>
-                      <a:endParaRPr lang="en-US" sz="1250" dirty="0"/>
+                      <a:endParaRPr lang="en-US" sz="1150" dirty="0"/>
                     </a:p>
                   </a:txBody>
                   <a:tcPr marL="91440" marR="91440" marT="45720" marB="45720">
                     <a:lnL w="6350" cap="flat" cmpd="sng" algn="ctr">
                       <a:solidFill>
-                        <a:srgbClr val="1E2D4F"/>
+                        <a:srgbClr val="1A1F2E"/>
                       </a:solidFill>
                       <a:prstDash val="solid"/>
                       <a:round/>
@@ -3902,7 +3806,7 @@
                     </a:lnL>
                     <a:lnR w="6350" cap="flat" cmpd="sng" algn="ctr">
                       <a:solidFill>
-                        <a:srgbClr val="1E2D4F"/>
+                        <a:srgbClr val="1A1F2E"/>
                       </a:solidFill>
                       <a:prstDash val="solid"/>
                       <a:round/>
@@ -3911,7 +3815,7 @@
                     </a:lnR>
                     <a:lnT w="6350" cap="flat" cmpd="sng" algn="ctr">
                       <a:solidFill>
-                        <a:srgbClr val="1E2D4F"/>
+                        <a:srgbClr val="1A1F2E"/>
                       </a:solidFill>
                       <a:prstDash val="solid"/>
                       <a:round/>
@@ -3920,7 +3824,7 @@
                     </a:lnT>
                     <a:lnB w="6350" cap="flat" cmpd="sng" algn="ctr">
                       <a:solidFill>
-                        <a:srgbClr val="1E2D4F"/>
+                        <a:srgbClr val="1A1F2E"/>
                       </a:solidFill>
                       <a:prstDash val="solid"/>
                       <a:round/>
@@ -3928,7 +3832,7 @@
                       <a:tailEnd type="none" w="med" len="med"/>
                     </a:lnB>
                     <a:solidFill>
-                      <a:srgbClr val="1C1040"/>
+                      <a:srgbClr val="111520"/>
                     </a:solidFill>
                   </a:tcPr>
                 </a:tc>
@@ -3941,20 +3845,20 @@
                         <a:buNone/>
                       </a:pPr>
                       <a:r>
-                        <a:rPr lang="en-US" sz="1250" b="1" dirty="0">
+                        <a:rPr lang="en-US" sz="1150" b="1" dirty="0">
                           <a:solidFill>
-                            <a:srgbClr val="14F195"/>
+                            <a:srgbClr val="4ADE80"/>
                           </a:solidFill>
                         </a:rPr>
                         <a:t>Rent Saved</a:t>
                       </a:r>
-                      <a:endParaRPr lang="en-US" sz="1250" dirty="0"/>
+                      <a:endParaRPr lang="en-US" sz="1150" dirty="0"/>
                     </a:p>
                   </a:txBody>
                   <a:tcPr marL="91440" marR="91440" marT="45720" marB="45720">
                     <a:lnL w="6350" cap="flat" cmpd="sng" algn="ctr">
                       <a:solidFill>
-                        <a:srgbClr val="1E2D4F"/>
+                        <a:srgbClr val="1A1F2E"/>
                       </a:solidFill>
                       <a:prstDash val="solid"/>
                       <a:round/>
@@ -3963,7 +3867,7 @@
                     </a:lnL>
                     <a:lnR w="6350" cap="flat" cmpd="sng" algn="ctr">
                       <a:solidFill>
-                        <a:srgbClr val="1E2D4F"/>
+                        <a:srgbClr val="1A1F2E"/>
                       </a:solidFill>
                       <a:prstDash val="solid"/>
                       <a:round/>
@@ -3972,7 +3876,7 @@
                     </a:lnR>
                     <a:lnT w="6350" cap="flat" cmpd="sng" algn="ctr">
                       <a:solidFill>
-                        <a:srgbClr val="1E2D4F"/>
+                        <a:srgbClr val="1A1F2E"/>
                       </a:solidFill>
                       <a:prstDash val="solid"/>
                       <a:round/>
@@ -3981,7 +3885,7 @@
                     </a:lnT>
                     <a:lnB w="6350" cap="flat" cmpd="sng" algn="ctr">
                       <a:solidFill>
-                        <a:srgbClr val="1E2D4F"/>
+                        <a:srgbClr val="1A1F2E"/>
                       </a:solidFill>
                       <a:prstDash val="solid"/>
                       <a:round/>
@@ -3989,7 +3893,7 @@
                       <a:tailEnd type="none" w="med" len="med"/>
                     </a:lnB>
                     <a:solidFill>
-                      <a:srgbClr val="1C1040"/>
+                      <a:srgbClr val="111520"/>
                     </a:solidFill>
                   </a:tcPr>
                 </a:tc>
@@ -4002,20 +3906,20 @@
                         <a:buNone/>
                       </a:pPr>
                       <a:r>
-                        <a:rPr lang="en-US" sz="1250" b="1" dirty="0">
+                        <a:rPr lang="en-US" sz="1150" b="1" dirty="0">
                           <a:solidFill>
-                            <a:srgbClr val="14F195"/>
+                            <a:srgbClr val="4ADE80"/>
                           </a:solidFill>
                         </a:rPr>
-                        <a:t>Integration</a:t>
+                        <a:t>Status</a:t>
                       </a:r>
-                      <a:endParaRPr lang="en-US" sz="1250" dirty="0"/>
+                      <a:endParaRPr lang="en-US" sz="1150" dirty="0"/>
                     </a:p>
                   </a:txBody>
                   <a:tcPr marL="91440" marR="91440" marT="45720" marB="45720">
                     <a:lnL w="6350" cap="flat" cmpd="sng" algn="ctr">
                       <a:solidFill>
-                        <a:srgbClr val="1E2D4F"/>
+                        <a:srgbClr val="1A1F2E"/>
                       </a:solidFill>
                       <a:prstDash val="solid"/>
                       <a:round/>
@@ -4024,7 +3928,7 @@
                     </a:lnL>
                     <a:lnR w="6350" cap="flat" cmpd="sng" algn="ctr">
                       <a:solidFill>
-                        <a:srgbClr val="1E2D4F"/>
+                        <a:srgbClr val="1A1F2E"/>
                       </a:solidFill>
                       <a:prstDash val="solid"/>
                       <a:round/>
@@ -4033,7 +3937,7 @@
                     </a:lnR>
                     <a:lnT w="6350" cap="flat" cmpd="sng" algn="ctr">
                       <a:solidFill>
-                        <a:srgbClr val="1E2D4F"/>
+                        <a:srgbClr val="1A1F2E"/>
                       </a:solidFill>
                       <a:prstDash val="solid"/>
                       <a:round/>
@@ -4042,7 +3946,7 @@
                     </a:lnT>
                     <a:lnB w="6350" cap="flat" cmpd="sng" algn="ctr">
                       <a:solidFill>
-                        <a:srgbClr val="1E2D4F"/>
+                        <a:srgbClr val="1A1F2E"/>
                       </a:solidFill>
                       <a:prstDash val="solid"/>
                       <a:round/>
@@ -4050,12 +3954,12 @@
                       <a:tailEnd type="none" w="med" len="med"/>
                     </a:lnB>
                     <a:solidFill>
-                      <a:srgbClr val="1C1040"/>
+                      <a:srgbClr val="111520"/>
                     </a:solidFill>
                   </a:tcPr>
                 </a:tc>
               </a:tr>
-              <a:tr h="475488">
+              <a:tr h="457200">
                 <a:tc>
                   <a:txBody>
                     <a:bodyPr/>
@@ -4065,20 +3969,20 @@
                         <a:buNone/>
                       </a:pPr>
                       <a:r>
-                        <a:rPr lang="en-US" sz="1200" dirty="0">
+                        <a:rPr lang="en-US" sz="1150" dirty="0">
                           <a:solidFill>
-                            <a:srgbClr val="7B8CAA"/>
+                            <a:srgbClr val="4B5563"/>
                           </a:solidFill>
                         </a:rPr>
                         <a:t>OpenBook Bids †</a:t>
                       </a:r>
-                      <a:endParaRPr lang="en-US" sz="1200" dirty="0"/>
+                      <a:endParaRPr lang="en-US" sz="1150" dirty="0"/>
                     </a:p>
                   </a:txBody>
                   <a:tcPr marL="91440" marR="91440" marT="45720" marB="45720">
                     <a:lnL w="6350" cap="flat" cmpd="sng" algn="ctr">
                       <a:solidFill>
-                        <a:srgbClr val="1E2D4F"/>
+                        <a:srgbClr val="1A1F2E"/>
                       </a:solidFill>
                       <a:prstDash val="solid"/>
                       <a:round/>
@@ -4087,7 +3991,7 @@
                     </a:lnL>
                     <a:lnR w="6350" cap="flat" cmpd="sng" algn="ctr">
                       <a:solidFill>
-                        <a:srgbClr val="1E2D4F"/>
+                        <a:srgbClr val="1A1F2E"/>
                       </a:solidFill>
                       <a:prstDash val="solid"/>
                       <a:round/>
@@ -4096,7 +4000,7 @@
                     </a:lnR>
                     <a:lnT w="6350" cap="flat" cmpd="sng" algn="ctr">
                       <a:solidFill>
-                        <a:srgbClr val="1E2D4F"/>
+                        <a:srgbClr val="1A1F2E"/>
                       </a:solidFill>
                       <a:prstDash val="solid"/>
                       <a:round/>
@@ -4105,7 +4009,7 @@
                     </a:lnT>
                     <a:lnB w="6350" cap="flat" cmpd="sng" algn="ctr">
                       <a:solidFill>
-                        <a:srgbClr val="1E2D4F"/>
+                        <a:srgbClr val="1A1F2E"/>
                       </a:solidFill>
                       <a:prstDash val="solid"/>
                       <a:round/>
@@ -4113,7 +4017,7 @@
                       <a:tailEnd type="none" w="med" len="med"/>
                     </a:lnB>
                     <a:solidFill>
-                      <a:srgbClr val="0F1627"/>
+                      <a:srgbClr val="0D1018"/>
                     </a:solidFill>
                   </a:tcPr>
                 </a:tc>
@@ -4126,20 +4030,20 @@
                         <a:buNone/>
                       </a:pPr>
                       <a:r>
-                        <a:rPr lang="en-US" sz="1200" dirty="0">
+                        <a:rPr lang="en-US" sz="1150" dirty="0">
                           <a:solidFill>
-                            <a:srgbClr val="7B8CAA"/>
+                            <a:srgbClr val="4B5563"/>
                           </a:solidFill>
                         </a:rPr>
                         <a:t>90,952 B</a:t>
                       </a:r>
-                      <a:endParaRPr lang="en-US" sz="1200" dirty="0"/>
+                      <a:endParaRPr lang="en-US" sz="1150" dirty="0"/>
                     </a:p>
                   </a:txBody>
                   <a:tcPr marL="91440" marR="91440" marT="45720" marB="45720">
                     <a:lnL w="6350" cap="flat" cmpd="sng" algn="ctr">
                       <a:solidFill>
-                        <a:srgbClr val="1E2D4F"/>
+                        <a:srgbClr val="1A1F2E"/>
                       </a:solidFill>
                       <a:prstDash val="solid"/>
                       <a:round/>
@@ -4148,7 +4052,7 @@
                     </a:lnL>
                     <a:lnR w="6350" cap="flat" cmpd="sng" algn="ctr">
                       <a:solidFill>
-                        <a:srgbClr val="1E2D4F"/>
+                        <a:srgbClr val="1A1F2E"/>
                       </a:solidFill>
                       <a:prstDash val="solid"/>
                       <a:round/>
@@ -4157,7 +4061,7 @@
                     </a:lnR>
                     <a:lnT w="6350" cap="flat" cmpd="sng" algn="ctr">
                       <a:solidFill>
-                        <a:srgbClr val="1E2D4F"/>
+                        <a:srgbClr val="1A1F2E"/>
                       </a:solidFill>
                       <a:prstDash val="solid"/>
                       <a:round/>
@@ -4166,7 +4070,7 @@
                     </a:lnT>
                     <a:lnB w="6350" cap="flat" cmpd="sng" algn="ctr">
                       <a:solidFill>
-                        <a:srgbClr val="1E2D4F"/>
+                        <a:srgbClr val="1A1F2E"/>
                       </a:solidFill>
                       <a:prstDash val="solid"/>
                       <a:round/>
@@ -4174,7 +4078,7 @@
                       <a:tailEnd type="none" w="med" len="med"/>
                     </a:lnB>
                     <a:solidFill>
-                      <a:srgbClr val="0F1627"/>
+                      <a:srgbClr val="0D1018"/>
                     </a:solidFill>
                   </a:tcPr>
                 </a:tc>
@@ -4187,20 +4091,20 @@
                         <a:buNone/>
                       </a:pPr>
                       <a:r>
-                        <a:rPr lang="en-US" sz="1200" dirty="0">
+                        <a:rPr lang="en-US" sz="1150" dirty="0">
                           <a:solidFill>
-                            <a:srgbClr val="14F195"/>
+                            <a:srgbClr val="9CA3AF"/>
                           </a:solidFill>
                         </a:rPr>
                         <a:t>1,693 B</a:t>
                       </a:r>
-                      <a:endParaRPr lang="en-US" sz="1200" dirty="0"/>
+                      <a:endParaRPr lang="en-US" sz="1150" dirty="0"/>
                     </a:p>
                   </a:txBody>
                   <a:tcPr marL="91440" marR="91440" marT="45720" marB="45720">
                     <a:lnL w="6350" cap="flat" cmpd="sng" algn="ctr">
                       <a:solidFill>
-                        <a:srgbClr val="1E2D4F"/>
+                        <a:srgbClr val="1A1F2E"/>
                       </a:solidFill>
                       <a:prstDash val="solid"/>
                       <a:round/>
@@ -4209,7 +4113,7 @@
                     </a:lnL>
                     <a:lnR w="6350" cap="flat" cmpd="sng" algn="ctr">
                       <a:solidFill>
-                        <a:srgbClr val="1E2D4F"/>
+                        <a:srgbClr val="1A1F2E"/>
                       </a:solidFill>
                       <a:prstDash val="solid"/>
                       <a:round/>
@@ -4218,7 +4122,7 @@
                     </a:lnR>
                     <a:lnT w="6350" cap="flat" cmpd="sng" algn="ctr">
                       <a:solidFill>
-                        <a:srgbClr val="1E2D4F"/>
+                        <a:srgbClr val="1A1F2E"/>
                       </a:solidFill>
                       <a:prstDash val="solid"/>
                       <a:round/>
@@ -4227,7 +4131,7 @@
                     </a:lnT>
                     <a:lnB w="6350" cap="flat" cmpd="sng" algn="ctr">
                       <a:solidFill>
-                        <a:srgbClr val="1E2D4F"/>
+                        <a:srgbClr val="1A1F2E"/>
                       </a:solidFill>
                       <a:prstDash val="solid"/>
                       <a:round/>
@@ -4235,68 +4139,7 @@
                       <a:tailEnd type="none" w="med" len="med"/>
                     </a:lnB>
                     <a:solidFill>
-                      <a:srgbClr val="0F1627"/>
-                    </a:solidFill>
-                  </a:tcPr>
-                </a:tc>
-                <a:tc>
-                  <a:txBody>
-                    <a:bodyPr/>
-                    <a:lstStyle/>
-                    <a:p>
-                      <a:pPr algn="ctr" indent="0" marL="0">
-                        <a:buNone/>
-                      </a:pPr>
-                      <a:r>
-                        <a:rPr lang="en-US" sz="1300" b="1" dirty="0">
-                          <a:solidFill>
-                            <a:srgbClr val="9945FF"/>
-                          </a:solidFill>
-                        </a:rPr>
-                        <a:t>53.72×</a:t>
-                      </a:r>
-                      <a:endParaRPr lang="en-US" sz="1300" dirty="0"/>
-                    </a:p>
-                  </a:txBody>
-                  <a:tcPr marL="91440" marR="91440" marT="45720" marB="45720">
-                    <a:lnL w="6350" cap="flat" cmpd="sng" algn="ctr">
-                      <a:solidFill>
-                        <a:srgbClr val="1E2D4F"/>
-                      </a:solidFill>
-                      <a:prstDash val="solid"/>
-                      <a:round/>
-                      <a:headEnd type="none" w="med" len="med"/>
-                      <a:tailEnd type="none" w="med" len="med"/>
-                    </a:lnL>
-                    <a:lnR w="6350" cap="flat" cmpd="sng" algn="ctr">
-                      <a:solidFill>
-                        <a:srgbClr val="1E2D4F"/>
-                      </a:solidFill>
-                      <a:prstDash val="solid"/>
-                      <a:round/>
-                      <a:headEnd type="none" w="med" len="med"/>
-                      <a:tailEnd type="none" w="med" len="med"/>
-                    </a:lnR>
-                    <a:lnT w="6350" cap="flat" cmpd="sng" algn="ctr">
-                      <a:solidFill>
-                        <a:srgbClr val="1E2D4F"/>
-                      </a:solidFill>
-                      <a:prstDash val="solid"/>
-                      <a:round/>
-                      <a:headEnd type="none" w="med" len="med"/>
-                      <a:tailEnd type="none" w="med" len="med"/>
-                    </a:lnT>
-                    <a:lnB w="6350" cap="flat" cmpd="sng" algn="ctr">
-                      <a:solidFill>
-                        <a:srgbClr val="1E2D4F"/>
-                      </a:solidFill>
-                      <a:prstDash val="solid"/>
-                      <a:round/>
-                      <a:headEnd type="none" w="med" len="med"/>
-                      <a:tailEnd type="none" w="med" len="med"/>
-                    </a:lnB>
-                    <a:solidFill>
-                      <a:srgbClr val="0F1627"/>
+                      <a:srgbClr val="0D1018"/>
                     </a:solidFill>
                   </a:tcPr>
                 </a:tc>
@@ -4311,10 +4154,10 @@
                       <a:r>
                         <a:rPr lang="en-US" sz="1200" b="1" dirty="0">
                           <a:solidFill>
-                            <a:srgbClr val="14F195"/>
+                            <a:srgbClr val="9CA3AF"/>
                           </a:solidFill>
                         </a:rPr>
-                        <a:t>~0.621 SOL</a:t>
+                        <a:t>53.72×</a:t>
                       </a:r>
                       <a:endParaRPr lang="en-US" sz="1200" dirty="0"/>
                     </a:p>
@@ -4322,7 +4165,7 @@
                   <a:tcPr marL="91440" marR="91440" marT="45720" marB="45720">
                     <a:lnL w="6350" cap="flat" cmpd="sng" algn="ctr">
                       <a:solidFill>
-                        <a:srgbClr val="1E2D4F"/>
+                        <a:srgbClr val="1A1F2E"/>
                       </a:solidFill>
                       <a:prstDash val="solid"/>
                       <a:round/>
@@ -4331,7 +4174,7 @@
                     </a:lnL>
                     <a:lnR w="6350" cap="flat" cmpd="sng" algn="ctr">
                       <a:solidFill>
-                        <a:srgbClr val="1E2D4F"/>
+                        <a:srgbClr val="1A1F2E"/>
                       </a:solidFill>
                       <a:prstDash val="solid"/>
                       <a:round/>
@@ -4340,7 +4183,7 @@
                     </a:lnR>
                     <a:lnT w="6350" cap="flat" cmpd="sng" algn="ctr">
                       <a:solidFill>
-                        <a:srgbClr val="1E2D4F"/>
+                        <a:srgbClr val="1A1F2E"/>
                       </a:solidFill>
                       <a:prstDash val="solid"/>
                       <a:round/>
@@ -4349,7 +4192,7 @@
                     </a:lnT>
                     <a:lnB w="6350" cap="flat" cmpd="sng" algn="ctr">
                       <a:solidFill>
-                        <a:srgbClr val="1E2D4F"/>
+                        <a:srgbClr val="1A1F2E"/>
                       </a:solidFill>
                       <a:prstDash val="solid"/>
                       <a:round/>
@@ -4357,7 +4200,7 @@
                       <a:tailEnd type="none" w="med" len="med"/>
                     </a:lnB>
                     <a:solidFill>
-                      <a:srgbClr val="0F1627"/>
+                      <a:srgbClr val="0D1018"/>
                     </a:solidFill>
                   </a:tcPr>
                 </a:tc>
@@ -4370,20 +4213,20 @@
                         <a:buNone/>
                       </a:pPr>
                       <a:r>
-                        <a:rPr lang="en-US" sz="1100" i="1" dirty="0">
+                        <a:rPr lang="en-US" sz="1150" dirty="0">
                           <a:solidFill>
-                            <a:srgbClr val="7B8CAA"/>
+                            <a:srgbClr val="9CA3AF"/>
                           </a:solidFill>
                         </a:rPr>
-                        <a:t>future</a:t>
+                        <a:t>~0.621 SOL</a:t>
                       </a:r>
-                      <a:endParaRPr lang="en-US" sz="1100" dirty="0"/>
+                      <a:endParaRPr lang="en-US" sz="1150" dirty="0"/>
                     </a:p>
                   </a:txBody>
                   <a:tcPr marL="91440" marR="91440" marT="45720" marB="45720">
                     <a:lnL w="6350" cap="flat" cmpd="sng" algn="ctr">
                       <a:solidFill>
-                        <a:srgbClr val="1E2D4F"/>
+                        <a:srgbClr val="1A1F2E"/>
                       </a:solidFill>
                       <a:prstDash val="solid"/>
                       <a:round/>
@@ -4392,7 +4235,7 @@
                     </a:lnL>
                     <a:lnR w="6350" cap="flat" cmpd="sng" algn="ctr">
                       <a:solidFill>
-                        <a:srgbClr val="1E2D4F"/>
+                        <a:srgbClr val="1A1F2E"/>
                       </a:solidFill>
                       <a:prstDash val="solid"/>
                       <a:round/>
@@ -4401,7 +4244,7 @@
                     </a:lnR>
                     <a:lnT w="6350" cap="flat" cmpd="sng" algn="ctr">
                       <a:solidFill>
-                        <a:srgbClr val="1E2D4F"/>
+                        <a:srgbClr val="1A1F2E"/>
                       </a:solidFill>
                       <a:prstDash val="solid"/>
                       <a:round/>
@@ -4410,7 +4253,7 @@
                     </a:lnT>
                     <a:lnB w="6350" cap="flat" cmpd="sng" algn="ctr">
                       <a:solidFill>
-                        <a:srgbClr val="1E2D4F"/>
+                        <a:srgbClr val="1A1F2E"/>
                       </a:solidFill>
                       <a:prstDash val="solid"/>
                       <a:round/>
@@ -4418,70 +4261,7 @@
                       <a:tailEnd type="none" w="med" len="med"/>
                     </a:lnB>
                     <a:solidFill>
-                      <a:srgbClr val="0F1627"/>
-                    </a:solidFill>
-                  </a:tcPr>
-                </a:tc>
-              </a:tr>
-              <a:tr h="475488">
-                <a:tc>
-                  <a:txBody>
-                    <a:bodyPr/>
-                    <a:lstStyle/>
-                    <a:p>
-                      <a:pPr indent="0" marL="0">
-                        <a:buNone/>
-                      </a:pPr>
-                      <a:r>
-                        <a:rPr lang="en-US" sz="1200" dirty="0">
-                          <a:solidFill>
-                            <a:srgbClr val="7B8CAA"/>
-                          </a:solidFill>
-                        </a:rPr>
-                        <a:t>OpenBook Asks †</a:t>
-                      </a:r>
-                      <a:endParaRPr lang="en-US" sz="1200" dirty="0"/>
-                    </a:p>
-                  </a:txBody>
-                  <a:tcPr marL="91440" marR="91440" marT="45720" marB="45720">
-                    <a:lnL w="6350" cap="flat" cmpd="sng" algn="ctr">
-                      <a:solidFill>
-                        <a:srgbClr val="1E2D4F"/>
-                      </a:solidFill>
-                      <a:prstDash val="solid"/>
-                      <a:round/>
-                      <a:headEnd type="none" w="med" len="med"/>
-                      <a:tailEnd type="none" w="med" len="med"/>
-                    </a:lnL>
-                    <a:lnR w="6350" cap="flat" cmpd="sng" algn="ctr">
-                      <a:solidFill>
-                        <a:srgbClr val="1E2D4F"/>
-                      </a:solidFill>
-                      <a:prstDash val="solid"/>
-                      <a:round/>
-                      <a:headEnd type="none" w="med" len="med"/>
-                      <a:tailEnd type="none" w="med" len="med"/>
-                    </a:lnR>
-                    <a:lnT w="6350" cap="flat" cmpd="sng" algn="ctr">
-                      <a:solidFill>
-                        <a:srgbClr val="1E2D4F"/>
-                      </a:solidFill>
-                      <a:prstDash val="solid"/>
-                      <a:round/>
-                      <a:headEnd type="none" w="med" len="med"/>
-                      <a:tailEnd type="none" w="med" len="med"/>
-                    </a:lnT>
-                    <a:lnB w="6350" cap="flat" cmpd="sng" algn="ctr">
-                      <a:solidFill>
-                        <a:srgbClr val="1E2D4F"/>
-                      </a:solidFill>
-                      <a:prstDash val="solid"/>
-                      <a:round/>
-                      <a:headEnd type="none" w="med" len="med"/>
-                      <a:tailEnd type="none" w="med" len="med"/>
-                    </a:lnB>
-                    <a:solidFill>
-                      <a:srgbClr val="0C1122"/>
+                      <a:srgbClr val="0D1018"/>
                     </a:solidFill>
                   </a:tcPr>
                 </a:tc>
@@ -4494,20 +4274,20 @@
                         <a:buNone/>
                       </a:pPr>
                       <a:r>
-                        <a:rPr lang="en-US" sz="1200" dirty="0">
+                        <a:rPr lang="en-US" sz="1050" i="1" dirty="0">
                           <a:solidFill>
-                            <a:srgbClr val="7B8CAA"/>
+                            <a:srgbClr val="4B5563"/>
                           </a:solidFill>
                         </a:rPr>
-                        <a:t>90,952 B</a:t>
+                        <a:t>future</a:t>
                       </a:r>
-                      <a:endParaRPr lang="en-US" sz="1200" dirty="0"/>
+                      <a:endParaRPr lang="en-US" sz="1050" dirty="0"/>
                     </a:p>
                   </a:txBody>
                   <a:tcPr marL="91440" marR="91440" marT="45720" marB="45720">
                     <a:lnL w="6350" cap="flat" cmpd="sng" algn="ctr">
                       <a:solidFill>
-                        <a:srgbClr val="1E2D4F"/>
+                        <a:srgbClr val="1A1F2E"/>
                       </a:solidFill>
                       <a:prstDash val="solid"/>
                       <a:round/>
@@ -4516,7 +4296,7 @@
                     </a:lnL>
                     <a:lnR w="6350" cap="flat" cmpd="sng" algn="ctr">
                       <a:solidFill>
-                        <a:srgbClr val="1E2D4F"/>
+                        <a:srgbClr val="1A1F2E"/>
                       </a:solidFill>
                       <a:prstDash val="solid"/>
                       <a:round/>
@@ -4525,7 +4305,7 @@
                     </a:lnR>
                     <a:lnT w="6350" cap="flat" cmpd="sng" algn="ctr">
                       <a:solidFill>
-                        <a:srgbClr val="1E2D4F"/>
+                        <a:srgbClr val="1A1F2E"/>
                       </a:solidFill>
                       <a:prstDash val="solid"/>
                       <a:round/>
@@ -4534,7 +4314,7 @@
                     </a:lnT>
                     <a:lnB w="6350" cap="flat" cmpd="sng" algn="ctr">
                       <a:solidFill>
-                        <a:srgbClr val="1E2D4F"/>
+                        <a:srgbClr val="1A1F2E"/>
                       </a:solidFill>
                       <a:prstDash val="solid"/>
                       <a:round/>
@@ -4542,7 +4322,70 @@
                       <a:tailEnd type="none" w="med" len="med"/>
                     </a:lnB>
                     <a:solidFill>
-                      <a:srgbClr val="0C1122"/>
+                      <a:srgbClr val="0D1018"/>
+                    </a:solidFill>
+                  </a:tcPr>
+                </a:tc>
+              </a:tr>
+              <a:tr h="457200">
+                <a:tc>
+                  <a:txBody>
+                    <a:bodyPr/>
+                    <a:lstStyle/>
+                    <a:p>
+                      <a:pPr indent="0" marL="0">
+                        <a:buNone/>
+                      </a:pPr>
+                      <a:r>
+                        <a:rPr lang="en-US" sz="1150" dirty="0">
+                          <a:solidFill>
+                            <a:srgbClr val="4B5563"/>
+                          </a:solidFill>
+                        </a:rPr>
+                        <a:t>OpenBook Asks †</a:t>
+                      </a:r>
+                      <a:endParaRPr lang="en-US" sz="1150" dirty="0"/>
+                    </a:p>
+                  </a:txBody>
+                  <a:tcPr marL="91440" marR="91440" marT="45720" marB="45720">
+                    <a:lnL w="6350" cap="flat" cmpd="sng" algn="ctr">
+                      <a:solidFill>
+                        <a:srgbClr val="1A1F2E"/>
+                      </a:solidFill>
+                      <a:prstDash val="solid"/>
+                      <a:round/>
+                      <a:headEnd type="none" w="med" len="med"/>
+                      <a:tailEnd type="none" w="med" len="med"/>
+                    </a:lnL>
+                    <a:lnR w="6350" cap="flat" cmpd="sng" algn="ctr">
+                      <a:solidFill>
+                        <a:srgbClr val="1A1F2E"/>
+                      </a:solidFill>
+                      <a:prstDash val="solid"/>
+                      <a:round/>
+                      <a:headEnd type="none" w="med" len="med"/>
+                      <a:tailEnd type="none" w="med" len="med"/>
+                    </a:lnR>
+                    <a:lnT w="6350" cap="flat" cmpd="sng" algn="ctr">
+                      <a:solidFill>
+                        <a:srgbClr val="1A1F2E"/>
+                      </a:solidFill>
+                      <a:prstDash val="solid"/>
+                      <a:round/>
+                      <a:headEnd type="none" w="med" len="med"/>
+                      <a:tailEnd type="none" w="med" len="med"/>
+                    </a:lnT>
+                    <a:lnB w="6350" cap="flat" cmpd="sng" algn="ctr">
+                      <a:solidFill>
+                        <a:srgbClr val="1A1F2E"/>
+                      </a:solidFill>
+                      <a:prstDash val="solid"/>
+                      <a:round/>
+                      <a:headEnd type="none" w="med" len="med"/>
+                      <a:tailEnd type="none" w="med" len="med"/>
+                    </a:lnB>
+                    <a:solidFill>
+                      <a:srgbClr val="0A0D15"/>
                     </a:solidFill>
                   </a:tcPr>
                 </a:tc>
@@ -4555,20 +4398,20 @@
                         <a:buNone/>
                       </a:pPr>
                       <a:r>
-                        <a:rPr lang="en-US" sz="1200" dirty="0">
+                        <a:rPr lang="en-US" sz="1150" dirty="0">
                           <a:solidFill>
-                            <a:srgbClr val="14F195"/>
+                            <a:srgbClr val="4B5563"/>
                           </a:solidFill>
                         </a:rPr>
-                        <a:t>1,672 B</a:t>
+                        <a:t>90,952 B</a:t>
                       </a:r>
-                      <a:endParaRPr lang="en-US" sz="1200" dirty="0"/>
+                      <a:endParaRPr lang="en-US" sz="1150" dirty="0"/>
                     </a:p>
                   </a:txBody>
                   <a:tcPr marL="91440" marR="91440" marT="45720" marB="45720">
                     <a:lnL w="6350" cap="flat" cmpd="sng" algn="ctr">
                       <a:solidFill>
-                        <a:srgbClr val="1E2D4F"/>
+                        <a:srgbClr val="1A1F2E"/>
                       </a:solidFill>
                       <a:prstDash val="solid"/>
                       <a:round/>
@@ -4577,7 +4420,7 @@
                     </a:lnL>
                     <a:lnR w="6350" cap="flat" cmpd="sng" algn="ctr">
                       <a:solidFill>
-                        <a:srgbClr val="1E2D4F"/>
+                        <a:srgbClr val="1A1F2E"/>
                       </a:solidFill>
                       <a:prstDash val="solid"/>
                       <a:round/>
@@ -4586,7 +4429,7 @@
                     </a:lnR>
                     <a:lnT w="6350" cap="flat" cmpd="sng" algn="ctr">
                       <a:solidFill>
-                        <a:srgbClr val="1E2D4F"/>
+                        <a:srgbClr val="1A1F2E"/>
                       </a:solidFill>
                       <a:prstDash val="solid"/>
                       <a:round/>
@@ -4595,7 +4438,7 @@
                     </a:lnT>
                     <a:lnB w="6350" cap="flat" cmpd="sng" algn="ctr">
                       <a:solidFill>
-                        <a:srgbClr val="1E2D4F"/>
+                        <a:srgbClr val="1A1F2E"/>
                       </a:solidFill>
                       <a:prstDash val="solid"/>
                       <a:round/>
@@ -4603,7 +4446,7 @@
                       <a:tailEnd type="none" w="med" len="med"/>
                     </a:lnB>
                     <a:solidFill>
-                      <a:srgbClr val="0C1122"/>
+                      <a:srgbClr val="0A0D15"/>
                     </a:solidFill>
                   </a:tcPr>
                 </a:tc>
@@ -4616,20 +4459,20 @@
                         <a:buNone/>
                       </a:pPr>
                       <a:r>
-                        <a:rPr lang="en-US" sz="1300" b="1" dirty="0">
+                        <a:rPr lang="en-US" sz="1150" dirty="0">
                           <a:solidFill>
-                            <a:srgbClr val="9945FF"/>
+                            <a:srgbClr val="9CA3AF"/>
                           </a:solidFill>
                         </a:rPr>
-                        <a:t>54.40×</a:t>
+                        <a:t>1,672 B</a:t>
                       </a:r>
-                      <a:endParaRPr lang="en-US" sz="1300" dirty="0"/>
+                      <a:endParaRPr lang="en-US" sz="1150" dirty="0"/>
                     </a:p>
                   </a:txBody>
                   <a:tcPr marL="91440" marR="91440" marT="45720" marB="45720">
                     <a:lnL w="6350" cap="flat" cmpd="sng" algn="ctr">
                       <a:solidFill>
-                        <a:srgbClr val="1E2D4F"/>
+                        <a:srgbClr val="1A1F2E"/>
                       </a:solidFill>
                       <a:prstDash val="solid"/>
                       <a:round/>
@@ -4638,7 +4481,7 @@
                     </a:lnL>
                     <a:lnR w="6350" cap="flat" cmpd="sng" algn="ctr">
                       <a:solidFill>
-                        <a:srgbClr val="1E2D4F"/>
+                        <a:srgbClr val="1A1F2E"/>
                       </a:solidFill>
                       <a:prstDash val="solid"/>
                       <a:round/>
@@ -4647,7 +4490,7 @@
                     </a:lnR>
                     <a:lnT w="6350" cap="flat" cmpd="sng" algn="ctr">
                       <a:solidFill>
-                        <a:srgbClr val="1E2D4F"/>
+                        <a:srgbClr val="1A1F2E"/>
                       </a:solidFill>
                       <a:prstDash val="solid"/>
                       <a:round/>
@@ -4656,7 +4499,7 @@
                     </a:lnT>
                     <a:lnB w="6350" cap="flat" cmpd="sng" algn="ctr">
                       <a:solidFill>
-                        <a:srgbClr val="1E2D4F"/>
+                        <a:srgbClr val="1A1F2E"/>
                       </a:solidFill>
                       <a:prstDash val="solid"/>
                       <a:round/>
@@ -4664,7 +4507,7 @@
                       <a:tailEnd type="none" w="med" len="med"/>
                     </a:lnB>
                     <a:solidFill>
-                      <a:srgbClr val="0C1122"/>
+                      <a:srgbClr val="0A0D15"/>
                     </a:solidFill>
                   </a:tcPr>
                 </a:tc>
@@ -4679,10 +4522,10 @@
                       <a:r>
                         <a:rPr lang="en-US" sz="1200" b="1" dirty="0">
                           <a:solidFill>
-                            <a:srgbClr val="14F195"/>
+                            <a:srgbClr val="9CA3AF"/>
                           </a:solidFill>
                         </a:rPr>
-                        <a:t>~0.621 SOL</a:t>
+                        <a:t>54.40×</a:t>
                       </a:r>
                       <a:endParaRPr lang="en-US" sz="1200" dirty="0"/>
                     </a:p>
@@ -4690,7 +4533,7 @@
                   <a:tcPr marL="91440" marR="91440" marT="45720" marB="45720">
                     <a:lnL w="6350" cap="flat" cmpd="sng" algn="ctr">
                       <a:solidFill>
-                        <a:srgbClr val="1E2D4F"/>
+                        <a:srgbClr val="1A1F2E"/>
                       </a:solidFill>
                       <a:prstDash val="solid"/>
                       <a:round/>
@@ -4699,7 +4542,7 @@
                     </a:lnL>
                     <a:lnR w="6350" cap="flat" cmpd="sng" algn="ctr">
                       <a:solidFill>
-                        <a:srgbClr val="1E2D4F"/>
+                        <a:srgbClr val="1A1F2E"/>
                       </a:solidFill>
                       <a:prstDash val="solid"/>
                       <a:round/>
@@ -4708,7 +4551,7 @@
                     </a:lnR>
                     <a:lnT w="6350" cap="flat" cmpd="sng" algn="ctr">
                       <a:solidFill>
-                        <a:srgbClr val="1E2D4F"/>
+                        <a:srgbClr val="1A1F2E"/>
                       </a:solidFill>
                       <a:prstDash val="solid"/>
                       <a:round/>
@@ -4717,7 +4560,7 @@
                     </a:lnT>
                     <a:lnB w="6350" cap="flat" cmpd="sng" algn="ctr">
                       <a:solidFill>
-                        <a:srgbClr val="1E2D4F"/>
+                        <a:srgbClr val="1A1F2E"/>
                       </a:solidFill>
                       <a:prstDash val="solid"/>
                       <a:round/>
@@ -4725,7 +4568,7 @@
                       <a:tailEnd type="none" w="med" len="med"/>
                     </a:lnB>
                     <a:solidFill>
-                      <a:srgbClr val="0C1122"/>
+                      <a:srgbClr val="0A0D15"/>
                     </a:solidFill>
                   </a:tcPr>
                 </a:tc>
@@ -4738,20 +4581,20 @@
                         <a:buNone/>
                       </a:pPr>
                       <a:r>
-                        <a:rPr lang="en-US" sz="1100" i="1" dirty="0">
+                        <a:rPr lang="en-US" sz="1150" dirty="0">
                           <a:solidFill>
-                            <a:srgbClr val="7B8CAA"/>
+                            <a:srgbClr val="9CA3AF"/>
                           </a:solidFill>
                         </a:rPr>
-                        <a:t>future</a:t>
+                        <a:t>~0.621 SOL</a:t>
                       </a:r>
-                      <a:endParaRPr lang="en-US" sz="1100" dirty="0"/>
+                      <a:endParaRPr lang="en-US" sz="1150" dirty="0"/>
                     </a:p>
                   </a:txBody>
                   <a:tcPr marL="91440" marR="91440" marT="45720" marB="45720">
                     <a:lnL w="6350" cap="flat" cmpd="sng" algn="ctr">
                       <a:solidFill>
-                        <a:srgbClr val="1E2D4F"/>
+                        <a:srgbClr val="1A1F2E"/>
                       </a:solidFill>
                       <a:prstDash val="solid"/>
                       <a:round/>
@@ -4760,7 +4603,7 @@
                     </a:lnL>
                     <a:lnR w="6350" cap="flat" cmpd="sng" algn="ctr">
                       <a:solidFill>
-                        <a:srgbClr val="1E2D4F"/>
+                        <a:srgbClr val="1A1F2E"/>
                       </a:solidFill>
                       <a:prstDash val="solid"/>
                       <a:round/>
@@ -4769,7 +4612,7 @@
                     </a:lnR>
                     <a:lnT w="6350" cap="flat" cmpd="sng" algn="ctr">
                       <a:solidFill>
-                        <a:srgbClr val="1E2D4F"/>
+                        <a:srgbClr val="1A1F2E"/>
                       </a:solidFill>
                       <a:prstDash val="solid"/>
                       <a:round/>
@@ -4778,7 +4621,7 @@
                     </a:lnT>
                     <a:lnB w="6350" cap="flat" cmpd="sng" algn="ctr">
                       <a:solidFill>
-                        <a:srgbClr val="1E2D4F"/>
+                        <a:srgbClr val="1A1F2E"/>
                       </a:solidFill>
                       <a:prstDash val="solid"/>
                       <a:round/>
@@ -4786,70 +4629,7 @@
                       <a:tailEnd type="none" w="med" len="med"/>
                     </a:lnB>
                     <a:solidFill>
-                      <a:srgbClr val="0C1122"/>
-                    </a:solidFill>
-                  </a:tcPr>
-                </a:tc>
-              </a:tr>
-              <a:tr h="475488">
-                <a:tc>
-                  <a:txBody>
-                    <a:bodyPr/>
-                    <a:lstStyle/>
-                    <a:p>
-                      <a:pPr indent="0" marL="0">
-                        <a:buNone/>
-                      </a:pPr>
-                      <a:r>
-                        <a:rPr lang="en-US" sz="1200" dirty="0">
-                          <a:solidFill>
-                            <a:srgbClr val="E2E8F0"/>
-                          </a:solidFill>
-                        </a:rPr>
-                        <a:t>Drift User (inactive)</a:t>
-                      </a:r>
-                      <a:endParaRPr lang="en-US" sz="1200" dirty="0"/>
-                    </a:p>
-                  </a:txBody>
-                  <a:tcPr marL="91440" marR="91440" marT="45720" marB="45720">
-                    <a:lnL w="6350" cap="flat" cmpd="sng" algn="ctr">
-                      <a:solidFill>
-                        <a:srgbClr val="1E2D4F"/>
-                      </a:solidFill>
-                      <a:prstDash val="solid"/>
-                      <a:round/>
-                      <a:headEnd type="none" w="med" len="med"/>
-                      <a:tailEnd type="none" w="med" len="med"/>
-                    </a:lnL>
-                    <a:lnR w="6350" cap="flat" cmpd="sng" algn="ctr">
-                      <a:solidFill>
-                        <a:srgbClr val="1E2D4F"/>
-                      </a:solidFill>
-                      <a:prstDash val="solid"/>
-                      <a:round/>
-                      <a:headEnd type="none" w="med" len="med"/>
-                      <a:tailEnd type="none" w="med" len="med"/>
-                    </a:lnR>
-                    <a:lnT w="6350" cap="flat" cmpd="sng" algn="ctr">
-                      <a:solidFill>
-                        <a:srgbClr val="1E2D4F"/>
-                      </a:solidFill>
-                      <a:prstDash val="solid"/>
-                      <a:round/>
-                      <a:headEnd type="none" w="med" len="med"/>
-                      <a:tailEnd type="none" w="med" len="med"/>
-                    </a:lnT>
-                    <a:lnB w="6350" cap="flat" cmpd="sng" algn="ctr">
-                      <a:solidFill>
-                        <a:srgbClr val="1E2D4F"/>
-                      </a:solidFill>
-                      <a:prstDash val="solid"/>
-                      <a:round/>
-                      <a:headEnd type="none" w="med" len="med"/>
-                      <a:tailEnd type="none" w="med" len="med"/>
-                    </a:lnB>
-                    <a:solidFill>
-                      <a:srgbClr val="0F1627"/>
+                      <a:srgbClr val="0A0D15"/>
                     </a:solidFill>
                   </a:tcPr>
                 </a:tc>
@@ -4862,20 +4642,20 @@
                         <a:buNone/>
                       </a:pPr>
                       <a:r>
-                        <a:rPr lang="en-US" sz="1200" dirty="0">
+                        <a:rPr lang="en-US" sz="1050" i="1" dirty="0">
                           <a:solidFill>
-                            <a:srgbClr val="7B8CAA"/>
+                            <a:srgbClr val="4B5563"/>
                           </a:solidFill>
                         </a:rPr>
-                        <a:t>4,376 B</a:t>
+                        <a:t>future</a:t>
                       </a:r>
-                      <a:endParaRPr lang="en-US" sz="1200" dirty="0"/>
+                      <a:endParaRPr lang="en-US" sz="1050" dirty="0"/>
                     </a:p>
                   </a:txBody>
                   <a:tcPr marL="91440" marR="91440" marT="45720" marB="45720">
                     <a:lnL w="6350" cap="flat" cmpd="sng" algn="ctr">
                       <a:solidFill>
-                        <a:srgbClr val="1E2D4F"/>
+                        <a:srgbClr val="1A1F2E"/>
                       </a:solidFill>
                       <a:prstDash val="solid"/>
                       <a:round/>
@@ -4884,7 +4664,7 @@
                     </a:lnL>
                     <a:lnR w="6350" cap="flat" cmpd="sng" algn="ctr">
                       <a:solidFill>
-                        <a:srgbClr val="1E2D4F"/>
+                        <a:srgbClr val="1A1F2E"/>
                       </a:solidFill>
                       <a:prstDash val="solid"/>
                       <a:round/>
@@ -4893,7 +4673,7 @@
                     </a:lnR>
                     <a:lnT w="6350" cap="flat" cmpd="sng" algn="ctr">
                       <a:solidFill>
-                        <a:srgbClr val="1E2D4F"/>
+                        <a:srgbClr val="1A1F2E"/>
                       </a:solidFill>
                       <a:prstDash val="solid"/>
                       <a:round/>
@@ -4902,7 +4682,7 @@
                     </a:lnT>
                     <a:lnB w="6350" cap="flat" cmpd="sng" algn="ctr">
                       <a:solidFill>
-                        <a:srgbClr val="1E2D4F"/>
+                        <a:srgbClr val="1A1F2E"/>
                       </a:solidFill>
                       <a:prstDash val="solid"/>
                       <a:round/>
@@ -4910,7 +4690,70 @@
                       <a:tailEnd type="none" w="med" len="med"/>
                     </a:lnB>
                     <a:solidFill>
-                      <a:srgbClr val="0F1627"/>
+                      <a:srgbClr val="0A0D15"/>
+                    </a:solidFill>
+                  </a:tcPr>
+                </a:tc>
+              </a:tr>
+              <a:tr h="457200">
+                <a:tc>
+                  <a:txBody>
+                    <a:bodyPr/>
+                    <a:lstStyle/>
+                    <a:p>
+                      <a:pPr indent="0" marL="0">
+                        <a:buNone/>
+                      </a:pPr>
+                      <a:r>
+                        <a:rPr lang="en-US" sz="1150" dirty="0">
+                          <a:solidFill>
+                            <a:srgbClr val="F1F5F9"/>
+                          </a:solidFill>
+                        </a:rPr>
+                        <a:t>Drift User (inactive)</a:t>
+                      </a:r>
+                      <a:endParaRPr lang="en-US" sz="1150" dirty="0"/>
+                    </a:p>
+                  </a:txBody>
+                  <a:tcPr marL="91440" marR="91440" marT="45720" marB="45720">
+                    <a:lnL w="6350" cap="flat" cmpd="sng" algn="ctr">
+                      <a:solidFill>
+                        <a:srgbClr val="1A1F2E"/>
+                      </a:solidFill>
+                      <a:prstDash val="solid"/>
+                      <a:round/>
+                      <a:headEnd type="none" w="med" len="med"/>
+                      <a:tailEnd type="none" w="med" len="med"/>
+                    </a:lnL>
+                    <a:lnR w="6350" cap="flat" cmpd="sng" algn="ctr">
+                      <a:solidFill>
+                        <a:srgbClr val="1A1F2E"/>
+                      </a:solidFill>
+                      <a:prstDash val="solid"/>
+                      <a:round/>
+                      <a:headEnd type="none" w="med" len="med"/>
+                      <a:tailEnd type="none" w="med" len="med"/>
+                    </a:lnR>
+                    <a:lnT w="6350" cap="flat" cmpd="sng" algn="ctr">
+                      <a:solidFill>
+                        <a:srgbClr val="1A1F2E"/>
+                      </a:solidFill>
+                      <a:prstDash val="solid"/>
+                      <a:round/>
+                      <a:headEnd type="none" w="med" len="med"/>
+                      <a:tailEnd type="none" w="med" len="med"/>
+                    </a:lnT>
+                    <a:lnB w="6350" cap="flat" cmpd="sng" algn="ctr">
+                      <a:solidFill>
+                        <a:srgbClr val="1A1F2E"/>
+                      </a:solidFill>
+                      <a:prstDash val="solid"/>
+                      <a:round/>
+                      <a:headEnd type="none" w="med" len="med"/>
+                      <a:tailEnd type="none" w="med" len="med"/>
+                    </a:lnB>
+                    <a:solidFill>
+                      <a:srgbClr val="0D1018"/>
                     </a:solidFill>
                   </a:tcPr>
                 </a:tc>
@@ -4923,20 +4766,20 @@
                         <a:buNone/>
                       </a:pPr>
                       <a:r>
-                        <a:rPr lang="en-US" sz="1200" dirty="0">
+                        <a:rPr lang="en-US" sz="1150" dirty="0">
                           <a:solidFill>
-                            <a:srgbClr val="14F195"/>
+                            <a:srgbClr val="9CA3AF"/>
                           </a:solidFill>
                         </a:rPr>
-                        <a:t>265 B</a:t>
+                        <a:t>4,376 B</a:t>
                       </a:r>
-                      <a:endParaRPr lang="en-US" sz="1200" dirty="0"/>
+                      <a:endParaRPr lang="en-US" sz="1150" dirty="0"/>
                     </a:p>
                   </a:txBody>
                   <a:tcPr marL="91440" marR="91440" marT="45720" marB="45720">
                     <a:lnL w="6350" cap="flat" cmpd="sng" algn="ctr">
                       <a:solidFill>
-                        <a:srgbClr val="1E2D4F"/>
+                        <a:srgbClr val="1A1F2E"/>
                       </a:solidFill>
                       <a:prstDash val="solid"/>
                       <a:round/>
@@ -4945,7 +4788,7 @@
                     </a:lnL>
                     <a:lnR w="6350" cap="flat" cmpd="sng" algn="ctr">
                       <a:solidFill>
-                        <a:srgbClr val="1E2D4F"/>
+                        <a:srgbClr val="1A1F2E"/>
                       </a:solidFill>
                       <a:prstDash val="solid"/>
                       <a:round/>
@@ -4954,7 +4797,7 @@
                     </a:lnR>
                     <a:lnT w="6350" cap="flat" cmpd="sng" algn="ctr">
                       <a:solidFill>
-                        <a:srgbClr val="1E2D4F"/>
+                        <a:srgbClr val="1A1F2E"/>
                       </a:solidFill>
                       <a:prstDash val="solid"/>
                       <a:round/>
@@ -4963,7 +4806,7 @@
                     </a:lnT>
                     <a:lnB w="6350" cap="flat" cmpd="sng" algn="ctr">
                       <a:solidFill>
-                        <a:srgbClr val="1E2D4F"/>
+                        <a:srgbClr val="1A1F2E"/>
                       </a:solidFill>
                       <a:prstDash val="solid"/>
                       <a:round/>
@@ -4971,7 +4814,7 @@
                       <a:tailEnd type="none" w="med" len="med"/>
                     </a:lnB>
                     <a:solidFill>
-                      <a:srgbClr val="0F1627"/>
+                      <a:srgbClr val="0D1018"/>
                     </a:solidFill>
                   </a:tcPr>
                 </a:tc>
@@ -4984,20 +4827,20 @@
                         <a:buNone/>
                       </a:pPr>
                       <a:r>
-                        <a:rPr lang="en-US" sz="1300" b="1" dirty="0">
+                        <a:rPr lang="en-US" sz="1150" dirty="0">
                           <a:solidFill>
-                            <a:srgbClr val="9945FF"/>
+                            <a:srgbClr val="4ADE80"/>
                           </a:solidFill>
                         </a:rPr>
-                        <a:t>16.51×</a:t>
+                        <a:t>265 B</a:t>
                       </a:r>
-                      <a:endParaRPr lang="en-US" sz="1300" dirty="0"/>
+                      <a:endParaRPr lang="en-US" sz="1150" dirty="0"/>
                     </a:p>
                   </a:txBody>
                   <a:tcPr marL="91440" marR="91440" marT="45720" marB="45720">
                     <a:lnL w="6350" cap="flat" cmpd="sng" algn="ctr">
                       <a:solidFill>
-                        <a:srgbClr val="1E2D4F"/>
+                        <a:srgbClr val="1A1F2E"/>
                       </a:solidFill>
                       <a:prstDash val="solid"/>
                       <a:round/>
@@ -5006,7 +4849,7 @@
                     </a:lnL>
                     <a:lnR w="6350" cap="flat" cmpd="sng" algn="ctr">
                       <a:solidFill>
-                        <a:srgbClr val="1E2D4F"/>
+                        <a:srgbClr val="1A1F2E"/>
                       </a:solidFill>
                       <a:prstDash val="solid"/>
                       <a:round/>
@@ -5015,7 +4858,7 @@
                     </a:lnR>
                     <a:lnT w="6350" cap="flat" cmpd="sng" algn="ctr">
                       <a:solidFill>
-                        <a:srgbClr val="1E2D4F"/>
+                        <a:srgbClr val="1A1F2E"/>
                       </a:solidFill>
                       <a:prstDash val="solid"/>
                       <a:round/>
@@ -5024,7 +4867,7 @@
                     </a:lnT>
                     <a:lnB w="6350" cap="flat" cmpd="sng" algn="ctr">
                       <a:solidFill>
-                        <a:srgbClr val="1E2D4F"/>
+                        <a:srgbClr val="1A1F2E"/>
                       </a:solidFill>
                       <a:prstDash val="solid"/>
                       <a:round/>
@@ -5032,7 +4875,7 @@
                       <a:tailEnd type="none" w="med" len="med"/>
                     </a:lnB>
                     <a:solidFill>
-                      <a:srgbClr val="0F1627"/>
+                      <a:srgbClr val="0D1018"/>
                     </a:solidFill>
                   </a:tcPr>
                 </a:tc>
@@ -5045,12 +4888,12 @@
                         <a:buNone/>
                       </a:pPr>
                       <a:r>
-                        <a:rPr lang="en-US" sz="1200" dirty="0">
+                        <a:rPr lang="en-US" sz="1200" b="1" dirty="0">
                           <a:solidFill>
-                            <a:srgbClr val="14F195"/>
+                            <a:srgbClr val="4ADE80"/>
                           </a:solidFill>
                         </a:rPr>
-                        <a:t>~0.029 SOL</a:t>
+                        <a:t>16.51×</a:t>
                       </a:r>
                       <a:endParaRPr lang="en-US" sz="1200" dirty="0"/>
                     </a:p>
@@ -5058,7 +4901,7 @@
                   <a:tcPr marL="91440" marR="91440" marT="45720" marB="45720">
                     <a:lnL w="6350" cap="flat" cmpd="sng" algn="ctr">
                       <a:solidFill>
-                        <a:srgbClr val="1E2D4F"/>
+                        <a:srgbClr val="1A1F2E"/>
                       </a:solidFill>
                       <a:prstDash val="solid"/>
                       <a:round/>
@@ -5067,7 +4910,7 @@
                     </a:lnL>
                     <a:lnR w="6350" cap="flat" cmpd="sng" algn="ctr">
                       <a:solidFill>
-                        <a:srgbClr val="1E2D4F"/>
+                        <a:srgbClr val="1A1F2E"/>
                       </a:solidFill>
                       <a:prstDash val="solid"/>
                       <a:round/>
@@ -5076,7 +4919,7 @@
                     </a:lnR>
                     <a:lnT w="6350" cap="flat" cmpd="sng" algn="ctr">
                       <a:solidFill>
-                        <a:srgbClr val="1E2D4F"/>
+                        <a:srgbClr val="1A1F2E"/>
                       </a:solidFill>
                       <a:prstDash val="solid"/>
                       <a:round/>
@@ -5085,7 +4928,7 @@
                     </a:lnT>
                     <a:lnB w="6350" cap="flat" cmpd="sng" algn="ctr">
                       <a:solidFill>
-                        <a:srgbClr val="1E2D4F"/>
+                        <a:srgbClr val="1A1F2E"/>
                       </a:solidFill>
                       <a:prstDash val="solid"/>
                       <a:round/>
@@ -5093,7 +4936,7 @@
                       <a:tailEnd type="none" w="med" len="med"/>
                     </a:lnB>
                     <a:solidFill>
-                      <a:srgbClr val="0F1627"/>
+                      <a:srgbClr val="0D1018"/>
                     </a:solidFill>
                   </a:tcPr>
                 </a:tc>
@@ -5106,20 +4949,20 @@
                         <a:buNone/>
                       </a:pPr>
                       <a:r>
-                        <a:rPr lang="en-US" sz="1100" b="1" dirty="0">
+                        <a:rPr lang="en-US" sz="1150" dirty="0">
                           <a:solidFill>
-                            <a:srgbClr val="14F195"/>
+                            <a:srgbClr val="4ADE80"/>
                           </a:solidFill>
                         </a:rPr>
-                        <a:t>ready ✓</a:t>
+                        <a:t>~0.029 SOL</a:t>
                       </a:r>
-                      <a:endParaRPr lang="en-US" sz="1100" dirty="0"/>
+                      <a:endParaRPr lang="en-US" sz="1150" dirty="0"/>
                     </a:p>
                   </a:txBody>
                   <a:tcPr marL="91440" marR="91440" marT="45720" marB="45720">
                     <a:lnL w="6350" cap="flat" cmpd="sng" algn="ctr">
                       <a:solidFill>
-                        <a:srgbClr val="1E2D4F"/>
+                        <a:srgbClr val="1A1F2E"/>
                       </a:solidFill>
                       <a:prstDash val="solid"/>
                       <a:round/>
@@ -5128,7 +4971,7 @@
                     </a:lnL>
                     <a:lnR w="6350" cap="flat" cmpd="sng" algn="ctr">
                       <a:solidFill>
-                        <a:srgbClr val="1E2D4F"/>
+                        <a:srgbClr val="1A1F2E"/>
                       </a:solidFill>
                       <a:prstDash val="solid"/>
                       <a:round/>
@@ -5137,7 +4980,7 @@
                     </a:lnR>
                     <a:lnT w="6350" cap="flat" cmpd="sng" algn="ctr">
                       <a:solidFill>
-                        <a:srgbClr val="1E2D4F"/>
+                        <a:srgbClr val="1A1F2E"/>
                       </a:solidFill>
                       <a:prstDash val="solid"/>
                       <a:round/>
@@ -5146,7 +4989,7 @@
                     </a:lnT>
                     <a:lnB w="6350" cap="flat" cmpd="sng" algn="ctr">
                       <a:solidFill>
-                        <a:srgbClr val="1E2D4F"/>
+                        <a:srgbClr val="1A1F2E"/>
                       </a:solidFill>
                       <a:prstDash val="solid"/>
                       <a:round/>
@@ -5154,70 +4997,7 @@
                       <a:tailEnd type="none" w="med" len="med"/>
                     </a:lnB>
                     <a:solidFill>
-                      <a:srgbClr val="0F1627"/>
-                    </a:solidFill>
-                  </a:tcPr>
-                </a:tc>
-              </a:tr>
-              <a:tr h="475488">
-                <a:tc>
-                  <a:txBody>
-                    <a:bodyPr/>
-                    <a:lstStyle/>
-                    <a:p>
-                      <a:pPr indent="0" marL="0">
-                        <a:buNone/>
-                      </a:pPr>
-                      <a:r>
-                        <a:rPr lang="en-US" sz="1200" dirty="0">
-                          <a:solidFill>
-                            <a:srgbClr val="E2E8F0"/>
-                          </a:solidFill>
-                        </a:rPr>
-                        <a:t>Drift User (semi-active)</a:t>
-                      </a:r>
-                      <a:endParaRPr lang="en-US" sz="1200" dirty="0"/>
-                    </a:p>
-                  </a:txBody>
-                  <a:tcPr marL="91440" marR="91440" marT="45720" marB="45720">
-                    <a:lnL w="6350" cap="flat" cmpd="sng" algn="ctr">
-                      <a:solidFill>
-                        <a:srgbClr val="1E2D4F"/>
-                      </a:solidFill>
-                      <a:prstDash val="solid"/>
-                      <a:round/>
-                      <a:headEnd type="none" w="med" len="med"/>
-                      <a:tailEnd type="none" w="med" len="med"/>
-                    </a:lnL>
-                    <a:lnR w="6350" cap="flat" cmpd="sng" algn="ctr">
-                      <a:solidFill>
-                        <a:srgbClr val="1E2D4F"/>
-                      </a:solidFill>
-                      <a:prstDash val="solid"/>
-                      <a:round/>
-                      <a:headEnd type="none" w="med" len="med"/>
-                      <a:tailEnd type="none" w="med" len="med"/>
-                    </a:lnR>
-                    <a:lnT w="6350" cap="flat" cmpd="sng" algn="ctr">
-                      <a:solidFill>
-                        <a:srgbClr val="1E2D4F"/>
-                      </a:solidFill>
-                      <a:prstDash val="solid"/>
-                      <a:round/>
-                      <a:headEnd type="none" w="med" len="med"/>
-                      <a:tailEnd type="none" w="med" len="med"/>
-                    </a:lnT>
-                    <a:lnB w="6350" cap="flat" cmpd="sng" algn="ctr">
-                      <a:solidFill>
-                        <a:srgbClr val="1E2D4F"/>
-                      </a:solidFill>
-                      <a:prstDash val="solid"/>
-                      <a:round/>
-                      <a:headEnd type="none" w="med" len="med"/>
-                      <a:tailEnd type="none" w="med" len="med"/>
-                    </a:lnB>
-                    <a:solidFill>
-                      <a:srgbClr val="0C1122"/>
+                      <a:srgbClr val="0D1018"/>
                     </a:solidFill>
                   </a:tcPr>
                 </a:tc>
@@ -5230,20 +5010,20 @@
                         <a:buNone/>
                       </a:pPr>
                       <a:r>
-                        <a:rPr lang="en-US" sz="1200" dirty="0">
+                        <a:rPr lang="en-US" sz="1050" b="1" dirty="0">
                           <a:solidFill>
-                            <a:srgbClr val="7B8CAA"/>
+                            <a:srgbClr val="4ADE80"/>
                           </a:solidFill>
                         </a:rPr>
-                        <a:t>4,376 B</a:t>
+                        <a:t>ready ✓</a:t>
                       </a:r>
-                      <a:endParaRPr lang="en-US" sz="1200" dirty="0"/>
+                      <a:endParaRPr lang="en-US" sz="1050" dirty="0"/>
                     </a:p>
                   </a:txBody>
                   <a:tcPr marL="91440" marR="91440" marT="45720" marB="45720">
                     <a:lnL w="6350" cap="flat" cmpd="sng" algn="ctr">
                       <a:solidFill>
-                        <a:srgbClr val="1E2D4F"/>
+                        <a:srgbClr val="1A1F2E"/>
                       </a:solidFill>
                       <a:prstDash val="solid"/>
                       <a:round/>
@@ -5252,7 +5032,7 @@
                     </a:lnL>
                     <a:lnR w="6350" cap="flat" cmpd="sng" algn="ctr">
                       <a:solidFill>
-                        <a:srgbClr val="1E2D4F"/>
+                        <a:srgbClr val="1A1F2E"/>
                       </a:solidFill>
                       <a:prstDash val="solid"/>
                       <a:round/>
@@ -5261,7 +5041,7 @@
                     </a:lnR>
                     <a:lnT w="6350" cap="flat" cmpd="sng" algn="ctr">
                       <a:solidFill>
-                        <a:srgbClr val="1E2D4F"/>
+                        <a:srgbClr val="1A1F2E"/>
                       </a:solidFill>
                       <a:prstDash val="solid"/>
                       <a:round/>
@@ -5270,7 +5050,7 @@
                     </a:lnT>
                     <a:lnB w="6350" cap="flat" cmpd="sng" algn="ctr">
                       <a:solidFill>
-                        <a:srgbClr val="1E2D4F"/>
+                        <a:srgbClr val="1A1F2E"/>
                       </a:solidFill>
                       <a:prstDash val="solid"/>
                       <a:round/>
@@ -5278,7 +5058,70 @@
                       <a:tailEnd type="none" w="med" len="med"/>
                     </a:lnB>
                     <a:solidFill>
-                      <a:srgbClr val="0C1122"/>
+                      <a:srgbClr val="0D1018"/>
+                    </a:solidFill>
+                  </a:tcPr>
+                </a:tc>
+              </a:tr>
+              <a:tr h="457200">
+                <a:tc>
+                  <a:txBody>
+                    <a:bodyPr/>
+                    <a:lstStyle/>
+                    <a:p>
+                      <a:pPr indent="0" marL="0">
+                        <a:buNone/>
+                      </a:pPr>
+                      <a:r>
+                        <a:rPr lang="en-US" sz="1150" dirty="0">
+                          <a:solidFill>
+                            <a:srgbClr val="F1F5F9"/>
+                          </a:solidFill>
+                        </a:rPr>
+                        <a:t>Drift User (semi-active)</a:t>
+                      </a:r>
+                      <a:endParaRPr lang="en-US" sz="1150" dirty="0"/>
+                    </a:p>
+                  </a:txBody>
+                  <a:tcPr marL="91440" marR="91440" marT="45720" marB="45720">
+                    <a:lnL w="6350" cap="flat" cmpd="sng" algn="ctr">
+                      <a:solidFill>
+                        <a:srgbClr val="1A1F2E"/>
+                      </a:solidFill>
+                      <a:prstDash val="solid"/>
+                      <a:round/>
+                      <a:headEnd type="none" w="med" len="med"/>
+                      <a:tailEnd type="none" w="med" len="med"/>
+                    </a:lnL>
+                    <a:lnR w="6350" cap="flat" cmpd="sng" algn="ctr">
+                      <a:solidFill>
+                        <a:srgbClr val="1A1F2E"/>
+                      </a:solidFill>
+                      <a:prstDash val="solid"/>
+                      <a:round/>
+                      <a:headEnd type="none" w="med" len="med"/>
+                      <a:tailEnd type="none" w="med" len="med"/>
+                    </a:lnR>
+                    <a:lnT w="6350" cap="flat" cmpd="sng" algn="ctr">
+                      <a:solidFill>
+                        <a:srgbClr val="1A1F2E"/>
+                      </a:solidFill>
+                      <a:prstDash val="solid"/>
+                      <a:round/>
+                      <a:headEnd type="none" w="med" len="med"/>
+                      <a:tailEnd type="none" w="med" len="med"/>
+                    </a:lnT>
+                    <a:lnB w="6350" cap="flat" cmpd="sng" algn="ctr">
+                      <a:solidFill>
+                        <a:srgbClr val="1A1F2E"/>
+                      </a:solidFill>
+                      <a:prstDash val="solid"/>
+                      <a:round/>
+                      <a:headEnd type="none" w="med" len="med"/>
+                      <a:tailEnd type="none" w="med" len="med"/>
+                    </a:lnB>
+                    <a:solidFill>
+                      <a:srgbClr val="0A0D15"/>
                     </a:solidFill>
                   </a:tcPr>
                 </a:tc>
@@ -5291,20 +5134,20 @@
                         <a:buNone/>
                       </a:pPr>
                       <a:r>
-                        <a:rPr lang="en-US" sz="1200" dirty="0">
+                        <a:rPr lang="en-US" sz="1150" dirty="0">
                           <a:solidFill>
-                            <a:srgbClr val="14F195"/>
+                            <a:srgbClr val="9CA3AF"/>
                           </a:solidFill>
                         </a:rPr>
-                        <a:t>811 B</a:t>
+                        <a:t>4,376 B</a:t>
                       </a:r>
-                      <a:endParaRPr lang="en-US" sz="1200" dirty="0"/>
+                      <a:endParaRPr lang="en-US" sz="1150" dirty="0"/>
                     </a:p>
                   </a:txBody>
                   <a:tcPr marL="91440" marR="91440" marT="45720" marB="45720">
                     <a:lnL w="6350" cap="flat" cmpd="sng" algn="ctr">
                       <a:solidFill>
-                        <a:srgbClr val="1E2D4F"/>
+                        <a:srgbClr val="1A1F2E"/>
                       </a:solidFill>
                       <a:prstDash val="solid"/>
                       <a:round/>
@@ -5313,7 +5156,7 @@
                     </a:lnL>
                     <a:lnR w="6350" cap="flat" cmpd="sng" algn="ctr">
                       <a:solidFill>
-                        <a:srgbClr val="1E2D4F"/>
+                        <a:srgbClr val="1A1F2E"/>
                       </a:solidFill>
                       <a:prstDash val="solid"/>
                       <a:round/>
@@ -5322,7 +5165,7 @@
                     </a:lnR>
                     <a:lnT w="6350" cap="flat" cmpd="sng" algn="ctr">
                       <a:solidFill>
-                        <a:srgbClr val="1E2D4F"/>
+                        <a:srgbClr val="1A1F2E"/>
                       </a:solidFill>
                       <a:prstDash val="solid"/>
                       <a:round/>
@@ -5331,7 +5174,7 @@
                     </a:lnT>
                     <a:lnB w="6350" cap="flat" cmpd="sng" algn="ctr">
                       <a:solidFill>
-                        <a:srgbClr val="1E2D4F"/>
+                        <a:srgbClr val="1A1F2E"/>
                       </a:solidFill>
                       <a:prstDash val="solid"/>
                       <a:round/>
@@ -5339,7 +5182,7 @@
                       <a:tailEnd type="none" w="med" len="med"/>
                     </a:lnB>
                     <a:solidFill>
-                      <a:srgbClr val="0C1122"/>
+                      <a:srgbClr val="0A0D15"/>
                     </a:solidFill>
                   </a:tcPr>
                 </a:tc>
@@ -5352,20 +5195,20 @@
                         <a:buNone/>
                       </a:pPr>
                       <a:r>
-                        <a:rPr lang="en-US" sz="1300" b="1" dirty="0">
+                        <a:rPr lang="en-US" sz="1150" dirty="0">
                           <a:solidFill>
-                            <a:srgbClr val="9945FF"/>
+                            <a:srgbClr val="4ADE80"/>
                           </a:solidFill>
                         </a:rPr>
-                        <a:t>5.40×</a:t>
+                        <a:t>811 B</a:t>
                       </a:r>
-                      <a:endParaRPr lang="en-US" sz="1300" dirty="0"/>
+                      <a:endParaRPr lang="en-US" sz="1150" dirty="0"/>
                     </a:p>
                   </a:txBody>
                   <a:tcPr marL="91440" marR="91440" marT="45720" marB="45720">
                     <a:lnL w="6350" cap="flat" cmpd="sng" algn="ctr">
                       <a:solidFill>
-                        <a:srgbClr val="1E2D4F"/>
+                        <a:srgbClr val="1A1F2E"/>
                       </a:solidFill>
                       <a:prstDash val="solid"/>
                       <a:round/>
@@ -5374,7 +5217,7 @@
                     </a:lnL>
                     <a:lnR w="6350" cap="flat" cmpd="sng" algn="ctr">
                       <a:solidFill>
-                        <a:srgbClr val="1E2D4F"/>
+                        <a:srgbClr val="1A1F2E"/>
                       </a:solidFill>
                       <a:prstDash val="solid"/>
                       <a:round/>
@@ -5383,7 +5226,7 @@
                     </a:lnR>
                     <a:lnT w="6350" cap="flat" cmpd="sng" algn="ctr">
                       <a:solidFill>
-                        <a:srgbClr val="1E2D4F"/>
+                        <a:srgbClr val="1A1F2E"/>
                       </a:solidFill>
                       <a:prstDash val="solid"/>
                       <a:round/>
@@ -5392,7 +5235,7 @@
                     </a:lnT>
                     <a:lnB w="6350" cap="flat" cmpd="sng" algn="ctr">
                       <a:solidFill>
-                        <a:srgbClr val="1E2D4F"/>
+                        <a:srgbClr val="1A1F2E"/>
                       </a:solidFill>
                       <a:prstDash val="solid"/>
                       <a:round/>
@@ -5400,7 +5243,7 @@
                       <a:tailEnd type="none" w="med" len="med"/>
                     </a:lnB>
                     <a:solidFill>
-                      <a:srgbClr val="0C1122"/>
+                      <a:srgbClr val="0A0D15"/>
                     </a:solidFill>
                   </a:tcPr>
                 </a:tc>
@@ -5413,12 +5256,12 @@
                         <a:buNone/>
                       </a:pPr>
                       <a:r>
-                        <a:rPr lang="en-US" sz="1200" dirty="0">
+                        <a:rPr lang="en-US" sz="1200" b="1" dirty="0">
                           <a:solidFill>
-                            <a:srgbClr val="14F195"/>
+                            <a:srgbClr val="4ADE80"/>
                           </a:solidFill>
                         </a:rPr>
-                        <a:t>~0.025 SOL</a:t>
+                        <a:t>5.40×</a:t>
                       </a:r>
                       <a:endParaRPr lang="en-US" sz="1200" dirty="0"/>
                     </a:p>
@@ -5426,7 +5269,7 @@
                   <a:tcPr marL="91440" marR="91440" marT="45720" marB="45720">
                     <a:lnL w="6350" cap="flat" cmpd="sng" algn="ctr">
                       <a:solidFill>
-                        <a:srgbClr val="1E2D4F"/>
+                        <a:srgbClr val="1A1F2E"/>
                       </a:solidFill>
                       <a:prstDash val="solid"/>
                       <a:round/>
@@ -5435,7 +5278,7 @@
                     </a:lnL>
                     <a:lnR w="6350" cap="flat" cmpd="sng" algn="ctr">
                       <a:solidFill>
-                        <a:srgbClr val="1E2D4F"/>
+                        <a:srgbClr val="1A1F2E"/>
                       </a:solidFill>
                       <a:prstDash val="solid"/>
                       <a:round/>
@@ -5444,7 +5287,7 @@
                     </a:lnR>
                     <a:lnT w="6350" cap="flat" cmpd="sng" algn="ctr">
                       <a:solidFill>
-                        <a:srgbClr val="1E2D4F"/>
+                        <a:srgbClr val="1A1F2E"/>
                       </a:solidFill>
                       <a:prstDash val="solid"/>
                       <a:round/>
@@ -5453,7 +5296,7 @@
                     </a:lnT>
                     <a:lnB w="6350" cap="flat" cmpd="sng" algn="ctr">
                       <a:solidFill>
-                        <a:srgbClr val="1E2D4F"/>
+                        <a:srgbClr val="1A1F2E"/>
                       </a:solidFill>
                       <a:prstDash val="solid"/>
                       <a:round/>
@@ -5461,7 +5304,7 @@
                       <a:tailEnd type="none" w="med" len="med"/>
                     </a:lnB>
                     <a:solidFill>
-                      <a:srgbClr val="0C1122"/>
+                      <a:srgbClr val="0A0D15"/>
                     </a:solidFill>
                   </a:tcPr>
                 </a:tc>
@@ -5474,20 +5317,20 @@
                         <a:buNone/>
                       </a:pPr>
                       <a:r>
-                        <a:rPr lang="en-US" sz="1100" b="1" dirty="0">
+                        <a:rPr lang="en-US" sz="1150" dirty="0">
                           <a:solidFill>
-                            <a:srgbClr val="14F195"/>
+                            <a:srgbClr val="4ADE80"/>
                           </a:solidFill>
                         </a:rPr>
-                        <a:t>ready ✓</a:t>
+                        <a:t>~0.025 SOL</a:t>
                       </a:r>
-                      <a:endParaRPr lang="en-US" sz="1100" dirty="0"/>
+                      <a:endParaRPr lang="en-US" sz="1150" dirty="0"/>
                     </a:p>
                   </a:txBody>
                   <a:tcPr marL="91440" marR="91440" marT="45720" marB="45720">
                     <a:lnL w="6350" cap="flat" cmpd="sng" algn="ctr">
                       <a:solidFill>
-                        <a:srgbClr val="1E2D4F"/>
+                        <a:srgbClr val="1A1F2E"/>
                       </a:solidFill>
                       <a:prstDash val="solid"/>
                       <a:round/>
@@ -5496,7 +5339,7 @@
                     </a:lnL>
                     <a:lnR w="6350" cap="flat" cmpd="sng" algn="ctr">
                       <a:solidFill>
-                        <a:srgbClr val="1E2D4F"/>
+                        <a:srgbClr val="1A1F2E"/>
                       </a:solidFill>
                       <a:prstDash val="solid"/>
                       <a:round/>
@@ -5505,7 +5348,7 @@
                     </a:lnR>
                     <a:lnT w="6350" cap="flat" cmpd="sng" algn="ctr">
                       <a:solidFill>
-                        <a:srgbClr val="1E2D4F"/>
+                        <a:srgbClr val="1A1F2E"/>
                       </a:solidFill>
                       <a:prstDash val="solid"/>
                       <a:round/>
@@ -5514,7 +5357,7 @@
                     </a:lnT>
                     <a:lnB w="6350" cap="flat" cmpd="sng" algn="ctr">
                       <a:solidFill>
-                        <a:srgbClr val="1E2D4F"/>
+                        <a:srgbClr val="1A1F2E"/>
                       </a:solidFill>
                       <a:prstDash val="solid"/>
                       <a:round/>
@@ -5522,70 +5365,7 @@
                       <a:tailEnd type="none" w="med" len="med"/>
                     </a:lnB>
                     <a:solidFill>
-                      <a:srgbClr val="0C1122"/>
-                    </a:solidFill>
-                  </a:tcPr>
-                </a:tc>
-              </a:tr>
-              <a:tr h="475488">
-                <a:tc>
-                  <a:txBody>
-                    <a:bodyPr/>
-                    <a:lstStyle/>
-                    <a:p>
-                      <a:pPr indent="0" marL="0">
-                        <a:buNone/>
-                      </a:pPr>
-                      <a:r>
-                        <a:rPr lang="en-US" sz="1200" dirty="0">
-                          <a:solidFill>
-                            <a:srgbClr val="E2E8F0"/>
-                          </a:solidFill>
-                        </a:rPr>
-                        <a:t>Drift User (active)</a:t>
-                      </a:r>
-                      <a:endParaRPr lang="en-US" sz="1200" dirty="0"/>
-                    </a:p>
-                  </a:txBody>
-                  <a:tcPr marL="91440" marR="91440" marT="45720" marB="45720">
-                    <a:lnL w="6350" cap="flat" cmpd="sng" algn="ctr">
-                      <a:solidFill>
-                        <a:srgbClr val="1E2D4F"/>
-                      </a:solidFill>
-                      <a:prstDash val="solid"/>
-                      <a:round/>
-                      <a:headEnd type="none" w="med" len="med"/>
-                      <a:tailEnd type="none" w="med" len="med"/>
-                    </a:lnL>
-                    <a:lnR w="6350" cap="flat" cmpd="sng" algn="ctr">
-                      <a:solidFill>
-                        <a:srgbClr val="1E2D4F"/>
-                      </a:solidFill>
-                      <a:prstDash val="solid"/>
-                      <a:round/>
-                      <a:headEnd type="none" w="med" len="med"/>
-                      <a:tailEnd type="none" w="med" len="med"/>
-                    </a:lnR>
-                    <a:lnT w="6350" cap="flat" cmpd="sng" algn="ctr">
-                      <a:solidFill>
-                        <a:srgbClr val="1E2D4F"/>
-                      </a:solidFill>
-                      <a:prstDash val="solid"/>
-                      <a:round/>
-                      <a:headEnd type="none" w="med" len="med"/>
-                      <a:tailEnd type="none" w="med" len="med"/>
-                    </a:lnT>
-                    <a:lnB w="6350" cap="flat" cmpd="sng" algn="ctr">
-                      <a:solidFill>
-                        <a:srgbClr val="1E2D4F"/>
-                      </a:solidFill>
-                      <a:prstDash val="solid"/>
-                      <a:round/>
-                      <a:headEnd type="none" w="med" len="med"/>
-                      <a:tailEnd type="none" w="med" len="med"/>
-                    </a:lnB>
-                    <a:solidFill>
-                      <a:srgbClr val="0F1627"/>
+                      <a:srgbClr val="0A0D15"/>
                     </a:solidFill>
                   </a:tcPr>
                 </a:tc>
@@ -5598,20 +5378,20 @@
                         <a:buNone/>
                       </a:pPr>
                       <a:r>
-                        <a:rPr lang="en-US" sz="1200" dirty="0">
+                        <a:rPr lang="en-US" sz="1050" b="1" dirty="0">
                           <a:solidFill>
-                            <a:srgbClr val="7B8CAA"/>
+                            <a:srgbClr val="4ADE80"/>
                           </a:solidFill>
                         </a:rPr>
-                        <a:t>4,376 B</a:t>
+                        <a:t>ready ✓</a:t>
                       </a:r>
-                      <a:endParaRPr lang="en-US" sz="1200" dirty="0"/>
+                      <a:endParaRPr lang="en-US" sz="1050" dirty="0"/>
                     </a:p>
                   </a:txBody>
                   <a:tcPr marL="91440" marR="91440" marT="45720" marB="45720">
                     <a:lnL w="6350" cap="flat" cmpd="sng" algn="ctr">
                       <a:solidFill>
-                        <a:srgbClr val="1E2D4F"/>
+                        <a:srgbClr val="1A1F2E"/>
                       </a:solidFill>
                       <a:prstDash val="solid"/>
                       <a:round/>
@@ -5620,7 +5400,7 @@
                     </a:lnL>
                     <a:lnR w="6350" cap="flat" cmpd="sng" algn="ctr">
                       <a:solidFill>
-                        <a:srgbClr val="1E2D4F"/>
+                        <a:srgbClr val="1A1F2E"/>
                       </a:solidFill>
                       <a:prstDash val="solid"/>
                       <a:round/>
@@ -5629,7 +5409,7 @@
                     </a:lnR>
                     <a:lnT w="6350" cap="flat" cmpd="sng" algn="ctr">
                       <a:solidFill>
-                        <a:srgbClr val="1E2D4F"/>
+                        <a:srgbClr val="1A1F2E"/>
                       </a:solidFill>
                       <a:prstDash val="solid"/>
                       <a:round/>
@@ -5638,7 +5418,7 @@
                     </a:lnT>
                     <a:lnB w="6350" cap="flat" cmpd="sng" algn="ctr">
                       <a:solidFill>
-                        <a:srgbClr val="1E2D4F"/>
+                        <a:srgbClr val="1A1F2E"/>
                       </a:solidFill>
                       <a:prstDash val="solid"/>
                       <a:round/>
@@ -5646,7 +5426,70 @@
                       <a:tailEnd type="none" w="med" len="med"/>
                     </a:lnB>
                     <a:solidFill>
-                      <a:srgbClr val="0F1627"/>
+                      <a:srgbClr val="0A0D15"/>
+                    </a:solidFill>
+                  </a:tcPr>
+                </a:tc>
+              </a:tr>
+              <a:tr h="457200">
+                <a:tc>
+                  <a:txBody>
+                    <a:bodyPr/>
+                    <a:lstStyle/>
+                    <a:p>
+                      <a:pPr indent="0" marL="0">
+                        <a:buNone/>
+                      </a:pPr>
+                      <a:r>
+                        <a:rPr lang="en-US" sz="1150" dirty="0">
+                          <a:solidFill>
+                            <a:srgbClr val="F1F5F9"/>
+                          </a:solidFill>
+                        </a:rPr>
+                        <a:t>Drift User (active)</a:t>
+                      </a:r>
+                      <a:endParaRPr lang="en-US" sz="1150" dirty="0"/>
+                    </a:p>
+                  </a:txBody>
+                  <a:tcPr marL="91440" marR="91440" marT="45720" marB="45720">
+                    <a:lnL w="6350" cap="flat" cmpd="sng" algn="ctr">
+                      <a:solidFill>
+                        <a:srgbClr val="1A1F2E"/>
+                      </a:solidFill>
+                      <a:prstDash val="solid"/>
+                      <a:round/>
+                      <a:headEnd type="none" w="med" len="med"/>
+                      <a:tailEnd type="none" w="med" len="med"/>
+                    </a:lnL>
+                    <a:lnR w="6350" cap="flat" cmpd="sng" algn="ctr">
+                      <a:solidFill>
+                        <a:srgbClr val="1A1F2E"/>
+                      </a:solidFill>
+                      <a:prstDash val="solid"/>
+                      <a:round/>
+                      <a:headEnd type="none" w="med" len="med"/>
+                      <a:tailEnd type="none" w="med" len="med"/>
+                    </a:lnR>
+                    <a:lnT w="6350" cap="flat" cmpd="sng" algn="ctr">
+                      <a:solidFill>
+                        <a:srgbClr val="1A1F2E"/>
+                      </a:solidFill>
+                      <a:prstDash val="solid"/>
+                      <a:round/>
+                      <a:headEnd type="none" w="med" len="med"/>
+                      <a:tailEnd type="none" w="med" len="med"/>
+                    </a:lnT>
+                    <a:lnB w="6350" cap="flat" cmpd="sng" algn="ctr">
+                      <a:solidFill>
+                        <a:srgbClr val="1A1F2E"/>
+                      </a:solidFill>
+                      <a:prstDash val="solid"/>
+                      <a:round/>
+                      <a:headEnd type="none" w="med" len="med"/>
+                      <a:tailEnd type="none" w="med" len="med"/>
+                    </a:lnB>
+                    <a:solidFill>
+                      <a:srgbClr val="0D1018"/>
                     </a:solidFill>
                   </a:tcPr>
                 </a:tc>
@@ -5659,20 +5502,20 @@
                         <a:buNone/>
                       </a:pPr>
                       <a:r>
-                        <a:rPr lang="en-US" sz="1200" dirty="0">
+                        <a:rPr lang="en-US" sz="1150" dirty="0">
                           <a:solidFill>
-                            <a:srgbClr val="14F195"/>
+                            <a:srgbClr val="9CA3AF"/>
                           </a:solidFill>
                         </a:rPr>
-                        <a:t>1,671 B</a:t>
+                        <a:t>4,376 B</a:t>
                       </a:r>
-                      <a:endParaRPr lang="en-US" sz="1200" dirty="0"/>
+                      <a:endParaRPr lang="en-US" sz="1150" dirty="0"/>
                     </a:p>
                   </a:txBody>
                   <a:tcPr marL="91440" marR="91440" marT="45720" marB="45720">
                     <a:lnL w="6350" cap="flat" cmpd="sng" algn="ctr">
                       <a:solidFill>
-                        <a:srgbClr val="1E2D4F"/>
+                        <a:srgbClr val="1A1F2E"/>
                       </a:solidFill>
                       <a:prstDash val="solid"/>
                       <a:round/>
@@ -5681,7 +5524,7 @@
                     </a:lnL>
                     <a:lnR w="6350" cap="flat" cmpd="sng" algn="ctr">
                       <a:solidFill>
-                        <a:srgbClr val="1E2D4F"/>
+                        <a:srgbClr val="1A1F2E"/>
                       </a:solidFill>
                       <a:prstDash val="solid"/>
                       <a:round/>
@@ -5690,7 +5533,7 @@
                     </a:lnR>
                     <a:lnT w="6350" cap="flat" cmpd="sng" algn="ctr">
                       <a:solidFill>
-                        <a:srgbClr val="1E2D4F"/>
+                        <a:srgbClr val="1A1F2E"/>
                       </a:solidFill>
                       <a:prstDash val="solid"/>
                       <a:round/>
@@ -5699,7 +5542,7 @@
                     </a:lnT>
                     <a:lnB w="6350" cap="flat" cmpd="sng" algn="ctr">
                       <a:solidFill>
-                        <a:srgbClr val="1E2D4F"/>
+                        <a:srgbClr val="1A1F2E"/>
                       </a:solidFill>
                       <a:prstDash val="solid"/>
                       <a:round/>
@@ -5707,7 +5550,7 @@
                       <a:tailEnd type="none" w="med" len="med"/>
                     </a:lnB>
                     <a:solidFill>
-                      <a:srgbClr val="0F1627"/>
+                      <a:srgbClr val="0D1018"/>
                     </a:solidFill>
                   </a:tcPr>
                 </a:tc>
@@ -5720,20 +5563,20 @@
                         <a:buNone/>
                       </a:pPr>
                       <a:r>
-                        <a:rPr lang="en-US" sz="1300" b="1" dirty="0">
+                        <a:rPr lang="en-US" sz="1150" dirty="0">
                           <a:solidFill>
-                            <a:srgbClr val="FFA040"/>
+                            <a:srgbClr val="4ADE80"/>
                           </a:solidFill>
                         </a:rPr>
-                        <a:t>2.62×</a:t>
+                        <a:t>1,671 B</a:t>
                       </a:r>
-                      <a:endParaRPr lang="en-US" sz="1300" dirty="0"/>
+                      <a:endParaRPr lang="en-US" sz="1150" dirty="0"/>
                     </a:p>
                   </a:txBody>
                   <a:tcPr marL="91440" marR="91440" marT="45720" marB="45720">
                     <a:lnL w="6350" cap="flat" cmpd="sng" algn="ctr">
                       <a:solidFill>
-                        <a:srgbClr val="1E2D4F"/>
+                        <a:srgbClr val="1A1F2E"/>
                       </a:solidFill>
                       <a:prstDash val="solid"/>
                       <a:round/>
@@ -5742,7 +5585,7 @@
                     </a:lnL>
                     <a:lnR w="6350" cap="flat" cmpd="sng" algn="ctr">
                       <a:solidFill>
-                        <a:srgbClr val="1E2D4F"/>
+                        <a:srgbClr val="1A1F2E"/>
                       </a:solidFill>
                       <a:prstDash val="solid"/>
                       <a:round/>
@@ -5751,7 +5594,7 @@
                     </a:lnR>
                     <a:lnT w="6350" cap="flat" cmpd="sng" algn="ctr">
                       <a:solidFill>
-                        <a:srgbClr val="1E2D4F"/>
+                        <a:srgbClr val="1A1F2E"/>
                       </a:solidFill>
                       <a:prstDash val="solid"/>
                       <a:round/>
@@ -5760,7 +5603,7 @@
                     </a:lnT>
                     <a:lnB w="6350" cap="flat" cmpd="sng" algn="ctr">
                       <a:solidFill>
-                        <a:srgbClr val="1E2D4F"/>
+                        <a:srgbClr val="1A1F2E"/>
                       </a:solidFill>
                       <a:prstDash val="solid"/>
                       <a:round/>
@@ -5768,7 +5611,7 @@
                       <a:tailEnd type="none" w="med" len="med"/>
                     </a:lnB>
                     <a:solidFill>
-                      <a:srgbClr val="0F1627"/>
+                      <a:srgbClr val="0D1018"/>
                     </a:solidFill>
                   </a:tcPr>
                 </a:tc>
@@ -5781,12 +5624,12 @@
                         <a:buNone/>
                       </a:pPr>
                       <a:r>
-                        <a:rPr lang="en-US" sz="1200" dirty="0">
+                        <a:rPr lang="en-US" sz="1200" b="1" dirty="0">
                           <a:solidFill>
-                            <a:srgbClr val="FFA040"/>
+                            <a:srgbClr val="4ADE80"/>
                           </a:solidFill>
                         </a:rPr>
-                        <a:t>~0.019 SOL</a:t>
+                        <a:t>2.62×</a:t>
                       </a:r>
                       <a:endParaRPr lang="en-US" sz="1200" dirty="0"/>
                     </a:p>
@@ -5794,7 +5637,7 @@
                   <a:tcPr marL="91440" marR="91440" marT="45720" marB="45720">
                     <a:lnL w="6350" cap="flat" cmpd="sng" algn="ctr">
                       <a:solidFill>
-                        <a:srgbClr val="1E2D4F"/>
+                        <a:srgbClr val="1A1F2E"/>
                       </a:solidFill>
                       <a:prstDash val="solid"/>
                       <a:round/>
@@ -5803,7 +5646,7 @@
                     </a:lnL>
                     <a:lnR w="6350" cap="flat" cmpd="sng" algn="ctr">
                       <a:solidFill>
-                        <a:srgbClr val="1E2D4F"/>
+                        <a:srgbClr val="1A1F2E"/>
                       </a:solidFill>
                       <a:prstDash val="solid"/>
                       <a:round/>
@@ -5812,7 +5655,7 @@
                     </a:lnR>
                     <a:lnT w="6350" cap="flat" cmpd="sng" algn="ctr">
                       <a:solidFill>
-                        <a:srgbClr val="1E2D4F"/>
+                        <a:srgbClr val="1A1F2E"/>
                       </a:solidFill>
                       <a:prstDash val="solid"/>
                       <a:round/>
@@ -5821,7 +5664,7 @@
                     </a:lnT>
                     <a:lnB w="6350" cap="flat" cmpd="sng" algn="ctr">
                       <a:solidFill>
-                        <a:srgbClr val="1E2D4F"/>
+                        <a:srgbClr val="1A1F2E"/>
                       </a:solidFill>
                       <a:prstDash val="solid"/>
                       <a:round/>
@@ -5829,7 +5672,7 @@
                       <a:tailEnd type="none" w="med" len="med"/>
                     </a:lnB>
                     <a:solidFill>
-                      <a:srgbClr val="0F1627"/>
+                      <a:srgbClr val="0D1018"/>
                     </a:solidFill>
                   </a:tcPr>
                 </a:tc>
@@ -5842,20 +5685,81 @@
                         <a:buNone/>
                       </a:pPr>
                       <a:r>
-                        <a:rPr lang="en-US" sz="1100" b="1" dirty="0">
+                        <a:rPr lang="en-US" sz="1150" dirty="0">
                           <a:solidFill>
-                            <a:srgbClr val="14F195"/>
+                            <a:srgbClr val="4ADE80"/>
+                          </a:solidFill>
+                        </a:rPr>
+                        <a:t>~0.019 SOL</a:t>
+                      </a:r>
+                      <a:endParaRPr lang="en-US" sz="1150" dirty="0"/>
+                    </a:p>
+                  </a:txBody>
+                  <a:tcPr marL="91440" marR="91440" marT="45720" marB="45720">
+                    <a:lnL w="6350" cap="flat" cmpd="sng" algn="ctr">
+                      <a:solidFill>
+                        <a:srgbClr val="1A1F2E"/>
+                      </a:solidFill>
+                      <a:prstDash val="solid"/>
+                      <a:round/>
+                      <a:headEnd type="none" w="med" len="med"/>
+                      <a:tailEnd type="none" w="med" len="med"/>
+                    </a:lnL>
+                    <a:lnR w="6350" cap="flat" cmpd="sng" algn="ctr">
+                      <a:solidFill>
+                        <a:srgbClr val="1A1F2E"/>
+                      </a:solidFill>
+                      <a:prstDash val="solid"/>
+                      <a:round/>
+                      <a:headEnd type="none" w="med" len="med"/>
+                      <a:tailEnd type="none" w="med" len="med"/>
+                    </a:lnR>
+                    <a:lnT w="6350" cap="flat" cmpd="sng" algn="ctr">
+                      <a:solidFill>
+                        <a:srgbClr val="1A1F2E"/>
+                      </a:solidFill>
+                      <a:prstDash val="solid"/>
+                      <a:round/>
+                      <a:headEnd type="none" w="med" len="med"/>
+                      <a:tailEnd type="none" w="med" len="med"/>
+                    </a:lnT>
+                    <a:lnB w="6350" cap="flat" cmpd="sng" algn="ctr">
+                      <a:solidFill>
+                        <a:srgbClr val="1A1F2E"/>
+                      </a:solidFill>
+                      <a:prstDash val="solid"/>
+                      <a:round/>
+                      <a:headEnd type="none" w="med" len="med"/>
+                      <a:tailEnd type="none" w="med" len="med"/>
+                    </a:lnB>
+                    <a:solidFill>
+                      <a:srgbClr val="0D1018"/>
+                    </a:solidFill>
+                  </a:tcPr>
+                </a:tc>
+                <a:tc>
+                  <a:txBody>
+                    <a:bodyPr/>
+                    <a:lstStyle/>
+                    <a:p>
+                      <a:pPr algn="ctr" indent="0" marL="0">
+                        <a:buNone/>
+                      </a:pPr>
+                      <a:r>
+                        <a:rPr lang="en-US" sz="1050" b="1" dirty="0">
+                          <a:solidFill>
+                            <a:srgbClr val="4ADE80"/>
                           </a:solidFill>
                         </a:rPr>
                         <a:t>ready ✓</a:t>
                       </a:r>
-                      <a:endParaRPr lang="en-US" sz="1100" dirty="0"/>
+                      <a:endParaRPr lang="en-US" sz="1050" dirty="0"/>
                     </a:p>
                   </a:txBody>
                   <a:tcPr marL="91440" marR="91440" marT="45720" marB="45720">
                     <a:lnL w="6350" cap="flat" cmpd="sng" algn="ctr">
                       <a:solidFill>
-                        <a:srgbClr val="1E2D4F"/>
+                        <a:srgbClr val="1A1F2E"/>
                       </a:solidFill>
                       <a:prstDash val="solid"/>
                       <a:round/>
@@ -5864,7 +5768,7 @@
                     </a:lnL>
                     <a:lnR w="6350" cap="flat" cmpd="sng" algn="ctr">
                       <a:solidFill>
-                        <a:srgbClr val="1E2D4F"/>
+                        <a:srgbClr val="1A1F2E"/>
                       </a:solidFill>
                       <a:prstDash val="solid"/>
                       <a:round/>
@@ -5873,7 +5777,7 @@
                     </a:lnR>
                     <a:lnT w="6350" cap="flat" cmpd="sng" algn="ctr">
                       <a:solidFill>
-                        <a:srgbClr val="1E2D4F"/>
+                        <a:srgbClr val="1A1F2E"/>
                       </a:solidFill>
                       <a:prstDash val="solid"/>
                       <a:round/>
@@ -5882,7 +5786,7 @@
                     </a:lnT>
                     <a:lnB w="6350" cap="flat" cmpd="sng" algn="ctr">
                       <a:solidFill>
-                        <a:srgbClr val="1E2D4F"/>
+                        <a:srgbClr val="1A1F2E"/>
                       </a:solidFill>
                       <a:prstDash val="solid"/>
                       <a:round/>
@@ -5890,7 +5794,7 @@
                       <a:tailEnd type="none" w="med" len="med"/>
                     </a:lnB>
                     <a:solidFill>
-                      <a:srgbClr val="0F1627"/>
+                      <a:srgbClr val="0D1018"/>
                     </a:solidFill>
                   </a:tcPr>
                 </a:tc>
@@ -5901,14 +5805,14 @@
       </p:graphicFrame>
       <p:sp>
         <p:nvSpPr>
-          <p:cNvPr id="9" name="Text 6"/>
-          <p:cNvSpPr/>
-          <p:nvPr/>
-        </p:nvSpPr>
-        <p:spPr>
-          <a:xfrm>
-            <a:off x="411480" y="4434840"/>
-            <a:ext cx="8321040" cy="594360"/>
+          <p:cNvPr id="10" name="Text 7"/>
+          <p:cNvSpPr/>
+          <p:nvPr/>
+        </p:nvSpPr>
+        <p:spPr>
+          <a:xfrm>
+            <a:off x="548640" y="4507992"/>
+            <a:ext cx="8229600" cy="530352"/>
           </a:xfrm>
           <a:prstGeom prst="rect">
             <a:avLst/>
@@ -5924,17 +5828,17 @@
               <a:buNone/>
             </a:pPr>
             <a:r>
-              <a:rPr lang="en-US" sz="950" i="1" dirty="0">
+              <a:rPr lang="en-US" sz="900" i="1" dirty="0">
                 <a:solidFill>
-                  <a:srgbClr val="7B8CAA"/>
+                  <a:srgbClr val="4B5563"/>
                 </a:solidFill>
                 <a:latin typeface="Calibri" pitchFamily="34" charset="0"/>
                 <a:ea typeface="Calibri" pitchFamily="34" charset="-122"/>
                 <a:cs typeface="Calibri" pitchFamily="34" charset="-120"/>
               </a:rPr>
-              <a:t>† OpenBook uses zero-copy layout (bytemuck::Pod) — compression requires protocol-level adoption (future).  Drift (Borsh) is ready today.  Rent saving is permanent; CU overhead is per-tx — a clear win for any account that lives longer than a few weeks.</a:t>
-            </a:r>
-            <a:endParaRPr lang="en-US" sz="950" dirty="0"/>
+              <a:t>† OpenBook uses zero-copy layout (bytemuck::Pod) — compression requires protocol adoption.  Rent saving is permanent; CU cost is per-tx. Clear win for any account that lives more than a few weeks.</a:t>
+            </a:r>
+            <a:endParaRPr lang="en-US" sz="900" dirty="0"/>
           </a:p>
         </p:txBody>
       </p:sp>
@@ -5952,7 +5856,7 @@
     <p:bg>
       <p:bgPr>
         <a:solidFill>
-          <a:srgbClr val="080C18"/>
+          <a:srgbClr val="090A0E"/>
         </a:solidFill>
       </p:bgPr>
     </p:bg>
@@ -5972,39 +5876,14 @@
       </p:grpSpPr>
       <p:sp>
         <p:nvSpPr>
-          <p:cNvPr id="2" name="Shape 0"/>
-          <p:cNvSpPr/>
-          <p:nvPr/>
-        </p:nvSpPr>
-        <p:spPr>
-          <a:xfrm>
-            <a:off x="411480" y="292608"/>
-            <a:ext cx="1554480" cy="292608"/>
-          </a:xfrm>
-          <a:prstGeom prst="rect">
-            <a:avLst/>
-          </a:prstGeom>
-          <a:solidFill>
-            <a:srgbClr val="9945FF"/>
-          </a:solidFill>
-          <a:ln w="12700">
-            <a:solidFill>
-              <a:srgbClr val="9945FF"/>
-            </a:solidFill>
-            <a:prstDash val="solid"/>
-          </a:ln>
-        </p:spPr>
-      </p:sp>
-      <p:sp>
-        <p:nvSpPr>
-          <p:cNvPr id="3" name="Text 1"/>
-          <p:cNvSpPr/>
-          <p:nvPr/>
-        </p:nvSpPr>
-        <p:spPr>
-          <a:xfrm>
-            <a:off x="411480" y="292608"/>
-            <a:ext cx="1554480" cy="292608"/>
+          <p:cNvPr id="2" name="Text 0"/>
+          <p:cNvSpPr/>
+          <p:nvPr/>
+        </p:nvSpPr>
+        <p:spPr>
+          <a:xfrm>
+            <a:off x="548640" y="256032"/>
+            <a:ext cx="2286000" cy="274320"/>
           </a:xfrm>
           <a:prstGeom prst="rect">
             <a:avLst/>
@@ -6016,122 +5895,250 @@
           <a:bodyPr wrap="square" lIns="0" tIns="0" rIns="0" bIns="0" rtlCol="0" anchor="ctr"/>
           <a:lstStyle/>
           <a:p>
-            <a:pPr algn="ctr" indent="0" marL="0">
+            <a:pPr algn="l" indent="0" marL="0">
               <a:buNone/>
             </a:pPr>
             <a:r>
-              <a:rPr lang="en-US" sz="1100" b="1" spc="200" kern="0" dirty="0">
+              <a:rPr lang="en-US" sz="1000" b="1" spc="300" kern="0" dirty="0">
                 <a:solidFill>
-                  <a:srgbClr val="FFFFFF"/>
+                  <a:srgbClr val="4ADE80"/>
+                </a:solidFill>
+                <a:latin typeface="Consolas" pitchFamily="34" charset="0"/>
+                <a:ea typeface="Consolas" pitchFamily="34" charset="-122"/>
+                <a:cs typeface="Consolas" pitchFamily="34" charset="-120"/>
+              </a:rPr>
+              <a:t>// MARKET</a:t>
+            </a:r>
+            <a:endParaRPr lang="en-US" sz="1000" dirty="0"/>
+          </a:p>
+        </p:txBody>
+      </p:sp>
+      <p:sp>
+        <p:nvSpPr>
+          <p:cNvPr id="3" name="Text 1"/>
+          <p:cNvSpPr/>
+          <p:nvPr/>
+        </p:nvSpPr>
+        <p:spPr>
+          <a:xfrm>
+            <a:off x="548640" y="621792"/>
+            <a:ext cx="8321040" cy="1005840"/>
+          </a:xfrm>
+          <a:prstGeom prst="rect">
+            <a:avLst/>
+          </a:prstGeom>
+          <a:noFill/>
+          <a:ln/>
+        </p:spPr>
+        <p:txBody>
+          <a:bodyPr wrap="square" lIns="0" tIns="0" rIns="0" bIns="0" rtlCol="0" anchor="ctr"/>
+          <a:lstStyle/>
+          <a:p>
+            <a:pPr algn="l" indent="0" marL="0">
+              <a:buNone/>
+            </a:pPr>
+            <a:r>
+              <a:rPr lang="en-US" sz="2800" b="1" dirty="0">
+                <a:solidFill>
+                  <a:srgbClr val="F1F5F9"/>
                 </a:solidFill>
                 <a:latin typeface="Calibri" pitchFamily="34" charset="0"/>
                 <a:ea typeface="Calibri" pitchFamily="34" charset="-122"/>
                 <a:cs typeface="Calibri" pitchFamily="34" charset="-120"/>
               </a:rPr>
-              <a:t>MARKET</a:t>
-            </a:r>
-            <a:endParaRPr lang="en-US" sz="1100" dirty="0"/>
-          </a:p>
-        </p:txBody>
-      </p:sp>
-      <p:sp>
-        <p:nvSpPr>
-          <p:cNvPr id="4" name="Text 2"/>
-          <p:cNvSpPr/>
-          <p:nvPr/>
-        </p:nvSpPr>
-        <p:spPr>
-          <a:xfrm>
-            <a:off x="411480" y="685800"/>
-            <a:ext cx="8321040" cy="914400"/>
-          </a:xfrm>
-          <a:prstGeom prst="rect">
-            <a:avLst/>
-          </a:prstGeom>
-          <a:noFill/>
-          <a:ln/>
-        </p:spPr>
-        <p:txBody>
-          <a:bodyPr wrap="square" lIns="0" tIns="0" rIns="0" bIns="0" rtlCol="0" anchor="ctr"/>
-          <a:lstStyle/>
+              <a:t>Show every protocol the SOL</a:t>
+            </a:r>
+            <a:endParaRPr lang="en-US" sz="2800" dirty="0"/>
+          </a:p>
           <a:p>
             <a:pPr algn="l" indent="0" marL="0">
               <a:buNone/>
             </a:pPr>
             <a:r>
-              <a:rPr lang="en-US" sz="2700" b="1" dirty="0">
+              <a:rPr lang="en-US" sz="2800" b="1" dirty="0">
                 <a:solidFill>
-                  <a:srgbClr val="FFFFFF"/>
+                  <a:srgbClr val="F1F5F9"/>
                 </a:solidFill>
                 <a:latin typeface="Calibri" pitchFamily="34" charset="0"/>
                 <a:ea typeface="Calibri" pitchFamily="34" charset="-122"/>
                 <a:cs typeface="Calibri" pitchFamily="34" charset="-120"/>
               </a:rPr>
-              <a:t>Every Solana program with Borsh accounts</a:t>
-            </a:r>
-            <a:endParaRPr lang="en-US" sz="2700" dirty="0"/>
-          </a:p>
+              <a:t>they're leaving on the table</a:t>
+            </a:r>
+            <a:endParaRPr lang="en-US" sz="2800" dirty="0"/>
+          </a:p>
+        </p:txBody>
+      </p:sp>
+      <p:sp>
+        <p:nvSpPr>
+          <p:cNvPr id="4" name="Shape 2"/>
+          <p:cNvSpPr/>
+          <p:nvPr/>
+        </p:nvSpPr>
+        <p:spPr>
+          <a:xfrm>
+            <a:off x="548640" y="1691640"/>
+            <a:ext cx="8321040" cy="22860"/>
+          </a:xfrm>
+          <a:prstGeom prst="rect">
+            <a:avLst/>
+          </a:prstGeom>
+          <a:solidFill>
+            <a:srgbClr val="4ADE80"/>
+          </a:solidFill>
+          <a:ln w="12700">
+            <a:solidFill>
+              <a:srgbClr val="4ADE80"/>
+            </a:solidFill>
+            <a:prstDash val="solid"/>
+          </a:ln>
+        </p:spPr>
+      </p:sp>
+      <p:sp>
+        <p:nvSpPr>
+          <p:cNvPr id="5" name="Shape 3"/>
+          <p:cNvSpPr/>
+          <p:nvPr/>
+        </p:nvSpPr>
+        <p:spPr>
+          <a:xfrm>
+            <a:off x="548640" y="1828800"/>
+            <a:ext cx="2743200" cy="2697480"/>
+          </a:xfrm>
+          <a:prstGeom prst="rect">
+            <a:avLst/>
+          </a:prstGeom>
+          <a:solidFill>
+            <a:srgbClr val="0D1018"/>
+          </a:solidFill>
+          <a:ln w="12700">
+            <a:solidFill>
+              <a:srgbClr val="1A1F2E"/>
+            </a:solidFill>
+            <a:prstDash val="solid"/>
+          </a:ln>
+          <a:effectLst>
+            <a:outerShdw sx="100000" sy="100000" kx="0" ky="0" algn="bl" rotWithShape="0" blurRad="254000" dist="76200" dir="8100000">
+              <a:srgbClr val="000000">
+                <a:alpha val="50000"/>
+              </a:srgbClr>
+            </a:outerShdw>
+          </a:effectLst>
+        </p:spPr>
+      </p:sp>
+      <p:sp>
+        <p:nvSpPr>
+          <p:cNvPr id="6" name="Shape 4"/>
+          <p:cNvSpPr/>
+          <p:nvPr/>
+        </p:nvSpPr>
+        <p:spPr>
+          <a:xfrm>
+            <a:off x="548640" y="1828800"/>
+            <a:ext cx="2743200" cy="36576"/>
+          </a:xfrm>
+          <a:prstGeom prst="rect">
+            <a:avLst/>
+          </a:prstGeom>
+          <a:solidFill>
+            <a:srgbClr val="4ADE80"/>
+          </a:solidFill>
+          <a:ln w="12700">
+            <a:solidFill>
+              <a:srgbClr val="4ADE80"/>
+            </a:solidFill>
+            <a:prstDash val="solid"/>
+          </a:ln>
+        </p:spPr>
+      </p:sp>
+      <p:sp>
+        <p:nvSpPr>
+          <p:cNvPr id="7" name="Text 5"/>
+          <p:cNvSpPr/>
+          <p:nvPr/>
+        </p:nvSpPr>
+        <p:spPr>
+          <a:xfrm>
+            <a:off x="731520" y="1920240"/>
+            <a:ext cx="502920" cy="411480"/>
+          </a:xfrm>
+          <a:prstGeom prst="rect">
+            <a:avLst/>
+          </a:prstGeom>
+          <a:noFill/>
+          <a:ln/>
+        </p:spPr>
+        <p:txBody>
+          <a:bodyPr wrap="square" lIns="0" tIns="0" rIns="0" bIns="0" rtlCol="0" anchor="ctr"/>
+          <a:lstStyle/>
           <a:p>
             <a:pPr algn="l" indent="0" marL="0">
               <a:buNone/>
             </a:pPr>
             <a:r>
-              <a:rPr lang="en-US" sz="2700" b="1" dirty="0">
+              <a:rPr lang="en-US" sz="2200" b="1" dirty="0">
                 <a:solidFill>
-                  <a:srgbClr val="FFFFFF"/>
+                  <a:srgbClr val="4ADE80"/>
+                </a:solidFill>
+                <a:latin typeface="Consolas" pitchFamily="34" charset="0"/>
+                <a:ea typeface="Consolas" pitchFamily="34" charset="-122"/>
+                <a:cs typeface="Consolas" pitchFamily="34" charset="-120"/>
+              </a:rPr>
+              <a:t>01</a:t>
+            </a:r>
+            <a:endParaRPr lang="en-US" sz="2200" dirty="0"/>
+          </a:p>
+        </p:txBody>
+      </p:sp>
+      <p:sp>
+        <p:nvSpPr>
+          <p:cNvPr id="8" name="Text 6"/>
+          <p:cNvSpPr/>
+          <p:nvPr/>
+        </p:nvSpPr>
+        <p:spPr>
+          <a:xfrm>
+            <a:off x="731520" y="2377440"/>
+            <a:ext cx="2423160" cy="594360"/>
+          </a:xfrm>
+          <a:prstGeom prst="rect">
+            <a:avLst/>
+          </a:prstGeom>
+          <a:noFill/>
+          <a:ln/>
+        </p:spPr>
+        <p:txBody>
+          <a:bodyPr wrap="square" lIns="0" tIns="0" rIns="0" bIns="0" rtlCol="0" anchor="ctr"/>
+          <a:lstStyle/>
+          <a:p>
+            <a:pPr algn="l" indent="0" marL="0">
+              <a:buNone/>
+            </a:pPr>
+            <a:r>
+              <a:rPr lang="en-US" sz="1400" b="1" dirty="0">
+                <a:solidFill>
+                  <a:srgbClr val="F1F5F9"/>
                 </a:solidFill>
                 <a:latin typeface="Calibri" pitchFamily="34" charset="0"/>
                 <a:ea typeface="Calibri" pitchFamily="34" charset="-122"/>
                 <a:cs typeface="Calibri" pitchFamily="34" charset="-120"/>
               </a:rPr>
-              <a:t>and structured data is a candidate</a:t>
-            </a:r>
-            <a:endParaRPr lang="en-US" sz="2700" dirty="0"/>
+              <a:t>Public indexer dashboard</a:t>
+            </a:r>
+            <a:endParaRPr lang="en-US" sz="1400" dirty="0"/>
           </a:p>
         </p:txBody>
       </p:sp>
       <p:sp>
         <p:nvSpPr>
-          <p:cNvPr id="5" name="Shape 3"/>
-          <p:cNvSpPr/>
-          <p:nvPr/>
-        </p:nvSpPr>
-        <p:spPr>
-          <a:xfrm>
-            <a:off x="411480" y="1737360"/>
-            <a:ext cx="4572000" cy="2606040"/>
-          </a:xfrm>
-          <a:prstGeom prst="rect">
-            <a:avLst/>
-          </a:prstGeom>
-          <a:solidFill>
-            <a:srgbClr val="0F1627"/>
-          </a:solidFill>
-          <a:ln w="12700">
-            <a:solidFill>
-              <a:srgbClr val="1E2D4F"/>
-            </a:solidFill>
-            <a:prstDash val="solid"/>
-          </a:ln>
-          <a:effectLst>
-            <a:outerShdw sx="100000" sy="100000" kx="0" ky="0" algn="bl" rotWithShape="0" blurRad="152400" dist="50800" dir="8100000">
-              <a:srgbClr val="000000">
-                <a:alpha val="35000"/>
-              </a:srgbClr>
-            </a:outerShdw>
-          </a:effectLst>
-        </p:spPr>
-      </p:sp>
-      <p:sp>
-        <p:nvSpPr>
-          <p:cNvPr id="6" name="Text 4"/>
-          <p:cNvSpPr/>
-          <p:nvPr/>
-        </p:nvSpPr>
-        <p:spPr>
-          <a:xfrm>
-            <a:off x="502920" y="1801368"/>
-            <a:ext cx="4389120" cy="347472"/>
+          <p:cNvPr id="9" name="Text 7"/>
+          <p:cNvSpPr/>
+          <p:nvPr/>
+        </p:nvSpPr>
+        <p:spPr>
+          <a:xfrm>
+            <a:off x="731520" y="2999232"/>
+            <a:ext cx="2423160" cy="1371600"/>
           </a:xfrm>
           <a:prstGeom prst="rect">
             <a:avLst/>
@@ -6147,30 +6154,87 @@
               <a:buNone/>
             </a:pPr>
             <a:r>
-              <a:rPr lang="en-US" sz="1200" b="1" dirty="0">
+              <a:rPr lang="en-US" sz="1250" dirty="0">
                 <a:solidFill>
-                  <a:srgbClr val="14F195"/>
+                  <a:srgbClr val="9CA3AF"/>
                 </a:solidFill>
                 <a:latin typeface="Calibri" pitchFamily="34" charset="0"/>
                 <a:ea typeface="Calibri" pitchFamily="34" charset="-122"/>
                 <a:cs typeface="Calibri" pitchFamily="34" charset="-120"/>
               </a:rPr>
-              <a:t>Estimated rent recoverable (top protocols)</a:t>
-            </a:r>
-            <a:endParaRPr lang="en-US" sz="1200" dirty="0"/>
+              <a:t>Scans top protocols. Shows each team: X inactive accounts, Y SOL recoverable. They see their number before we call.</a:t>
+            </a:r>
+            <a:endParaRPr lang="en-US" sz="1250" dirty="0"/>
           </a:p>
         </p:txBody>
       </p:sp>
       <p:sp>
         <p:nvSpPr>
-          <p:cNvPr id="7" name="Text 5"/>
-          <p:cNvSpPr/>
-          <p:nvPr/>
-        </p:nvSpPr>
-        <p:spPr>
-          <a:xfrm>
-            <a:off x="502920" y="2212848"/>
-            <a:ext cx="1143000" cy="347472"/>
+          <p:cNvPr id="10" name="Shape 8"/>
+          <p:cNvSpPr/>
+          <p:nvPr/>
+        </p:nvSpPr>
+        <p:spPr>
+          <a:xfrm>
+            <a:off x="3447288" y="1828800"/>
+            <a:ext cx="2743200" cy="2697480"/>
+          </a:xfrm>
+          <a:prstGeom prst="rect">
+            <a:avLst/>
+          </a:prstGeom>
+          <a:solidFill>
+            <a:srgbClr val="0D1018"/>
+          </a:solidFill>
+          <a:ln w="12700">
+            <a:solidFill>
+              <a:srgbClr val="1A1F2E"/>
+            </a:solidFill>
+            <a:prstDash val="solid"/>
+          </a:ln>
+          <a:effectLst>
+            <a:outerShdw sx="100000" sy="100000" kx="0" ky="0" algn="bl" rotWithShape="0" blurRad="254000" dist="76200" dir="8100000">
+              <a:srgbClr val="000000">
+                <a:alpha val="50000"/>
+              </a:srgbClr>
+            </a:outerShdw>
+          </a:effectLst>
+        </p:spPr>
+      </p:sp>
+      <p:sp>
+        <p:nvSpPr>
+          <p:cNvPr id="11" name="Shape 9"/>
+          <p:cNvSpPr/>
+          <p:nvPr/>
+        </p:nvSpPr>
+        <p:spPr>
+          <a:xfrm>
+            <a:off x="3447288" y="1828800"/>
+            <a:ext cx="2743200" cy="36576"/>
+          </a:xfrm>
+          <a:prstGeom prst="rect">
+            <a:avLst/>
+          </a:prstGeom>
+          <a:solidFill>
+            <a:srgbClr val="4ADE80"/>
+          </a:solidFill>
+          <a:ln w="12700">
+            <a:solidFill>
+              <a:srgbClr val="4ADE80"/>
+            </a:solidFill>
+            <a:prstDash val="solid"/>
+          </a:ln>
+        </p:spPr>
+      </p:sp>
+      <p:sp>
+        <p:nvSpPr>
+          <p:cNvPr id="12" name="Text 10"/>
+          <p:cNvSpPr/>
+          <p:nvPr/>
+        </p:nvSpPr>
+        <p:spPr>
+          <a:xfrm>
+            <a:off x="3630168" y="1920240"/>
+            <a:ext cx="502920" cy="411480"/>
           </a:xfrm>
           <a:prstGeom prst="rect">
             <a:avLst/>
@@ -6186,30 +6250,69 @@
               <a:buNone/>
             </a:pPr>
             <a:r>
-              <a:rPr lang="en-US" sz="1200" dirty="0">
+              <a:rPr lang="en-US" sz="2200" b="1" dirty="0">
                 <a:solidFill>
-                  <a:srgbClr val="E2E8F0"/>
+                  <a:srgbClr val="4ADE80"/>
+                </a:solidFill>
+                <a:latin typeface="Consolas" pitchFamily="34" charset="0"/>
+                <a:ea typeface="Consolas" pitchFamily="34" charset="-122"/>
+                <a:cs typeface="Consolas" pitchFamily="34" charset="-120"/>
+              </a:rPr>
+              <a:t>02</a:t>
+            </a:r>
+            <a:endParaRPr lang="en-US" sz="2200" dirty="0"/>
+          </a:p>
+        </p:txBody>
+      </p:sp>
+      <p:sp>
+        <p:nvSpPr>
+          <p:cNvPr id="13" name="Text 11"/>
+          <p:cNvSpPr/>
+          <p:nvPr/>
+        </p:nvSpPr>
+        <p:spPr>
+          <a:xfrm>
+            <a:off x="3630168" y="2377440"/>
+            <a:ext cx="2423160" cy="594360"/>
+          </a:xfrm>
+          <a:prstGeom prst="rect">
+            <a:avLst/>
+          </a:prstGeom>
+          <a:noFill/>
+          <a:ln/>
+        </p:spPr>
+        <p:txBody>
+          <a:bodyPr wrap="square" lIns="0" tIns="0" rIns="0" bIns="0" rtlCol="0" anchor="ctr"/>
+          <a:lstStyle/>
+          <a:p>
+            <a:pPr algn="l" indent="0" marL="0">
+              <a:buNone/>
+            </a:pPr>
+            <a:r>
+              <a:rPr lang="en-US" sz="1400" b="1" dirty="0">
+                <a:solidFill>
+                  <a:srgbClr val="F1F5F9"/>
                 </a:solidFill>
                 <a:latin typeface="Calibri" pitchFamily="34" charset="0"/>
                 <a:ea typeface="Calibri" pitchFamily="34" charset="-122"/>
                 <a:cs typeface="Calibri" pitchFamily="34" charset="-120"/>
               </a:rPr>
-              <a:t>Drift</a:t>
-            </a:r>
-            <a:endParaRPr lang="en-US" sz="1200" dirty="0"/>
+              <a:t>densol library (free, open source)</a:t>
+            </a:r>
+            <a:endParaRPr lang="en-US" sz="1400" dirty="0"/>
           </a:p>
         </p:txBody>
       </p:sp>
       <p:sp>
         <p:nvSpPr>
-          <p:cNvPr id="8" name="Text 6"/>
-          <p:cNvSpPr/>
-          <p:nvPr/>
-        </p:nvSpPr>
-        <p:spPr>
-          <a:xfrm>
-            <a:off x="1691640" y="2212848"/>
-            <a:ext cx="1051560" cy="347472"/>
+          <p:cNvPr id="14" name="Text 12"/>
+          <p:cNvSpPr/>
+          <p:nvPr/>
+        </p:nvSpPr>
+        <p:spPr>
+          <a:xfrm>
+            <a:off x="3630168" y="2999232"/>
+            <a:ext cx="2423160" cy="1371600"/>
           </a:xfrm>
           <a:prstGeom prst="rect">
             <a:avLst/>
@@ -6221,34 +6324,91 @@
           <a:bodyPr wrap="square" lIns="0" tIns="0" rIns="0" bIns="0" rtlCol="0" anchor="ctr"/>
           <a:lstStyle/>
           <a:p>
-            <a:pPr algn="r" indent="0" marL="0">
+            <a:pPr algn="l" indent="0" marL="0">
               <a:buNone/>
             </a:pPr>
             <a:r>
-              <a:rPr lang="en-US" sz="1200" dirty="0">
+              <a:rPr lang="en-US" sz="1250" dirty="0">
                 <a:solidFill>
-                  <a:srgbClr val="E2E8F0"/>
+                  <a:srgbClr val="9CA3AF"/>
                 </a:solidFill>
                 <a:latin typeface="Calibri" pitchFamily="34" charset="0"/>
                 <a:ea typeface="Calibri" pitchFamily="34" charset="-122"/>
                 <a:cs typeface="Calibri" pitchFamily="34" charset="-120"/>
               </a:rPr>
-              <a:t>~820K accts</a:t>
-            </a:r>
-            <a:endParaRPr lang="en-US" sz="1200" dirty="0"/>
+              <a:t>Protocol integrates themselves. cargo add densol. Single #[compress] attribute. Works with any Anchor/Borsh account.</a:t>
+            </a:r>
+            <a:endParaRPr lang="en-US" sz="1250" dirty="0"/>
           </a:p>
         </p:txBody>
       </p:sp>
       <p:sp>
         <p:nvSpPr>
-          <p:cNvPr id="9" name="Text 7"/>
-          <p:cNvSpPr/>
-          <p:nvPr/>
-        </p:nvSpPr>
-        <p:spPr>
-          <a:xfrm>
-            <a:off x="2788920" y="2212848"/>
-            <a:ext cx="1097280" cy="347472"/>
+          <p:cNvPr id="15" name="Shape 13"/>
+          <p:cNvSpPr/>
+          <p:nvPr/>
+        </p:nvSpPr>
+        <p:spPr>
+          <a:xfrm>
+            <a:off x="6345936" y="1828800"/>
+            <a:ext cx="2743200" cy="2697480"/>
+          </a:xfrm>
+          <a:prstGeom prst="rect">
+            <a:avLst/>
+          </a:prstGeom>
+          <a:solidFill>
+            <a:srgbClr val="0D1018"/>
+          </a:solidFill>
+          <a:ln w="12700">
+            <a:solidFill>
+              <a:srgbClr val="1A1F2E"/>
+            </a:solidFill>
+            <a:prstDash val="solid"/>
+          </a:ln>
+          <a:effectLst>
+            <a:outerShdw sx="100000" sy="100000" kx="0" ky="0" algn="bl" rotWithShape="0" blurRad="254000" dist="76200" dir="8100000">
+              <a:srgbClr val="000000">
+                <a:alpha val="50000"/>
+              </a:srgbClr>
+            </a:outerShdw>
+          </a:effectLst>
+        </p:spPr>
+      </p:sp>
+      <p:sp>
+        <p:nvSpPr>
+          <p:cNvPr id="16" name="Shape 14"/>
+          <p:cNvSpPr/>
+          <p:nvPr/>
+        </p:nvSpPr>
+        <p:spPr>
+          <a:xfrm>
+            <a:off x="6345936" y="1828800"/>
+            <a:ext cx="2743200" cy="36576"/>
+          </a:xfrm>
+          <a:prstGeom prst="rect">
+            <a:avLst/>
+          </a:prstGeom>
+          <a:solidFill>
+            <a:srgbClr val="4B5563"/>
+          </a:solidFill>
+          <a:ln w="12700">
+            <a:solidFill>
+              <a:srgbClr val="4ADE80"/>
+            </a:solidFill>
+            <a:prstDash val="solid"/>
+          </a:ln>
+        </p:spPr>
+      </p:sp>
+      <p:sp>
+        <p:nvSpPr>
+          <p:cNvPr id="17" name="Text 15"/>
+          <p:cNvSpPr/>
+          <p:nvPr/>
+        </p:nvSpPr>
+        <p:spPr>
+          <a:xfrm>
+            <a:off x="6528816" y="1920240"/>
+            <a:ext cx="502920" cy="411480"/>
           </a:xfrm>
           <a:prstGeom prst="rect">
             <a:avLst/>
@@ -6260,34 +6420,73 @@
           <a:bodyPr wrap="square" lIns="0" tIns="0" rIns="0" bIns="0" rtlCol="0" anchor="ctr"/>
           <a:lstStyle/>
           <a:p>
-            <a:pPr algn="r" indent="0" marL="0">
+            <a:pPr algn="l" indent="0" marL="0">
               <a:buNone/>
             </a:pPr>
             <a:r>
-              <a:rPr lang="en-US" sz="1200" dirty="0">
+              <a:rPr lang="en-US" sz="2200" b="1" dirty="0">
                 <a:solidFill>
-                  <a:srgbClr val="E2E8F0"/>
+                  <a:srgbClr val="4B5563"/>
+                </a:solidFill>
+                <a:latin typeface="Consolas" pitchFamily="34" charset="0"/>
+                <a:ea typeface="Consolas" pitchFamily="34" charset="-122"/>
+                <a:cs typeface="Consolas" pitchFamily="34" charset="-120"/>
+              </a:rPr>
+              <a:t>03</a:t>
+            </a:r>
+            <a:endParaRPr lang="en-US" sz="2200" dirty="0"/>
+          </a:p>
+        </p:txBody>
+      </p:sp>
+      <p:sp>
+        <p:nvSpPr>
+          <p:cNvPr id="18" name="Text 16"/>
+          <p:cNvSpPr/>
+          <p:nvPr/>
+        </p:nvSpPr>
+        <p:spPr>
+          <a:xfrm>
+            <a:off x="6528816" y="2377440"/>
+            <a:ext cx="2423160" cy="594360"/>
+          </a:xfrm>
+          <a:prstGeom prst="rect">
+            <a:avLst/>
+          </a:prstGeom>
+          <a:noFill/>
+          <a:ln/>
+        </p:spPr>
+        <p:txBody>
+          <a:bodyPr wrap="square" lIns="0" tIns="0" rIns="0" bIns="0" rtlCol="0" anchor="ctr"/>
+          <a:lstStyle/>
+          <a:p>
+            <a:pPr algn="l" indent="0" marL="0">
+              <a:buNone/>
+            </a:pPr>
+            <a:r>
+              <a:rPr lang="en-US" sz="1400" b="1" dirty="0">
+                <a:solidFill>
+                  <a:srgbClr val="F1F5F9"/>
                 </a:solidFill>
                 <a:latin typeface="Calibri" pitchFamily="34" charset="0"/>
                 <a:ea typeface="Calibri" pitchFamily="34" charset="-122"/>
                 <a:cs typeface="Calibri" pitchFamily="34" charset="-120"/>
               </a:rPr>
-              <a:t>~180K candidates</a:t>
-            </a:r>
-            <a:endParaRPr lang="en-US" sz="1200" dirty="0"/>
+              <a:t>Managed crank SaaS  (future)</a:t>
+            </a:r>
+            <a:endParaRPr lang="en-US" sz="1400" dirty="0"/>
           </a:p>
         </p:txBody>
       </p:sp>
       <p:sp>
         <p:nvSpPr>
-          <p:cNvPr id="10" name="Text 8"/>
-          <p:cNvSpPr/>
-          <p:nvPr/>
-        </p:nvSpPr>
-        <p:spPr>
-          <a:xfrm>
-            <a:off x="3931920" y="2212848"/>
-            <a:ext cx="1005840" cy="347472"/>
+          <p:cNvPr id="19" name="Text 17"/>
+          <p:cNvSpPr/>
+          <p:nvPr/>
+        </p:nvSpPr>
+        <p:spPr>
+          <a:xfrm>
+            <a:off x="6528816" y="2999232"/>
+            <a:ext cx="2423160" cy="1371600"/>
           </a:xfrm>
           <a:prstGeom prst="rect">
             <a:avLst/>
@@ -6299,34 +6498,59 @@
           <a:bodyPr wrap="square" lIns="0" tIns="0" rIns="0" bIns="0" rtlCol="0" anchor="ctr"/>
           <a:lstStyle/>
           <a:p>
-            <a:pPr algn="r" indent="0" marL="0">
+            <a:pPr algn="l" indent="0" marL="0">
               <a:buNone/>
             </a:pPr>
             <a:r>
-              <a:rPr lang="en-US" sz="1200" dirty="0">
+              <a:rPr lang="en-US" sz="1250" dirty="0">
                 <a:solidFill>
-                  <a:srgbClr val="7B8CAA"/>
+                  <a:srgbClr val="9CA3AF"/>
                 </a:solidFill>
                 <a:latin typeface="Calibri" pitchFamily="34" charset="0"/>
                 <a:ea typeface="Calibri" pitchFamily="34" charset="-122"/>
                 <a:cs typeface="Calibri" pitchFamily="34" charset="-120"/>
               </a:rPr>
-              <a:t>~5,220 SOL</a:t>
-            </a:r>
-            <a:endParaRPr lang="en-US" sz="1200" dirty="0"/>
+              <a:t>Auto-compress inactive accounts. We run the crank. Protocol pays monthly. No devops for them.</a:t>
+            </a:r>
+            <a:endParaRPr lang="en-US" sz="1250" dirty="0"/>
           </a:p>
         </p:txBody>
       </p:sp>
       <p:sp>
         <p:nvSpPr>
-          <p:cNvPr id="11" name="Text 9"/>
-          <p:cNvSpPr/>
-          <p:nvPr/>
-        </p:nvSpPr>
-        <p:spPr>
-          <a:xfrm>
-            <a:off x="502920" y="2606040"/>
-            <a:ext cx="1143000" cy="347472"/>
+          <p:cNvPr id="20" name="Shape 18"/>
+          <p:cNvSpPr/>
+          <p:nvPr/>
+        </p:nvSpPr>
+        <p:spPr>
+          <a:xfrm>
+            <a:off x="548640" y="4663440"/>
+            <a:ext cx="8321040" cy="347472"/>
+          </a:xfrm>
+          <a:prstGeom prst="rect">
+            <a:avLst/>
+          </a:prstGeom>
+          <a:solidFill>
+            <a:srgbClr val="111520"/>
+          </a:solidFill>
+          <a:ln w="12700">
+            <a:solidFill>
+              <a:srgbClr val="1A1F2E"/>
+            </a:solidFill>
+            <a:prstDash val="solid"/>
+          </a:ln>
+        </p:spPr>
+      </p:sp>
+      <p:sp>
+        <p:nvSpPr>
+          <p:cNvPr id="21" name="Text 19"/>
+          <p:cNvSpPr/>
+          <p:nvPr/>
+        </p:nvSpPr>
+        <p:spPr>
+          <a:xfrm>
+            <a:off x="548640" y="4663440"/>
+            <a:ext cx="8321040" cy="347472"/>
           </a:xfrm>
           <a:prstGeom prst="rect">
             <a:avLst/>
@@ -6338,1052 +6562,21 @@
           <a:bodyPr wrap="square" lIns="0" tIns="0" rIns="0" bIns="0" rtlCol="0" anchor="ctr"/>
           <a:lstStyle/>
           <a:p>
-            <a:pPr algn="l" indent="0" marL="0">
+            <a:pPr algn="ctr" indent="0" marL="0">
               <a:buNone/>
             </a:pPr>
             <a:r>
-              <a:rPr lang="en-US" sz="1200" dirty="0">
+              <a:rPr lang="en-US" sz="1050" dirty="0">
                 <a:solidFill>
-                  <a:srgbClr val="E2E8F0"/>
-                </a:solidFill>
-                <a:latin typeface="Calibri" pitchFamily="34" charset="0"/>
-                <a:ea typeface="Calibri" pitchFamily="34" charset="-122"/>
-                <a:cs typeface="Calibri" pitchFamily="34" charset="-120"/>
-              </a:rPr>
-              <a:t>Marginfi</a:t>
-            </a:r>
-            <a:endParaRPr lang="en-US" sz="1200" dirty="0"/>
-          </a:p>
-        </p:txBody>
-      </p:sp>
-      <p:sp>
-        <p:nvSpPr>
-          <p:cNvPr id="12" name="Text 10"/>
-          <p:cNvSpPr/>
-          <p:nvPr/>
-        </p:nvSpPr>
-        <p:spPr>
-          <a:xfrm>
-            <a:off x="1691640" y="2606040"/>
-            <a:ext cx="1051560" cy="347472"/>
-          </a:xfrm>
-          <a:prstGeom prst="rect">
-            <a:avLst/>
-          </a:prstGeom>
-          <a:noFill/>
-          <a:ln/>
-        </p:spPr>
-        <p:txBody>
-          <a:bodyPr wrap="square" lIns="0" tIns="0" rIns="0" bIns="0" rtlCol="0" anchor="ctr"/>
-          <a:lstStyle/>
-          <a:p>
-            <a:pPr algn="r" indent="0" marL="0">
-              <a:buNone/>
-            </a:pPr>
-            <a:r>
-              <a:rPr lang="en-US" sz="1200" dirty="0">
-                <a:solidFill>
-                  <a:srgbClr val="E2E8F0"/>
-                </a:solidFill>
-                <a:latin typeface="Calibri" pitchFamily="34" charset="0"/>
-                <a:ea typeface="Calibri" pitchFamily="34" charset="-122"/>
-                <a:cs typeface="Calibri" pitchFamily="34" charset="-120"/>
-              </a:rPr>
-              <a:t>~450K accts</a:t>
-            </a:r>
-            <a:endParaRPr lang="en-US" sz="1200" dirty="0"/>
-          </a:p>
-        </p:txBody>
-      </p:sp>
-      <p:sp>
-        <p:nvSpPr>
-          <p:cNvPr id="13" name="Text 11"/>
-          <p:cNvSpPr/>
-          <p:nvPr/>
-        </p:nvSpPr>
-        <p:spPr>
-          <a:xfrm>
-            <a:off x="2788920" y="2606040"/>
-            <a:ext cx="1097280" cy="347472"/>
-          </a:xfrm>
-          <a:prstGeom prst="rect">
-            <a:avLst/>
-          </a:prstGeom>
-          <a:noFill/>
-          <a:ln/>
-        </p:spPr>
-        <p:txBody>
-          <a:bodyPr wrap="square" lIns="0" tIns="0" rIns="0" bIns="0" rtlCol="0" anchor="ctr"/>
-          <a:lstStyle/>
-          <a:p>
-            <a:pPr algn="r" indent="0" marL="0">
-              <a:buNone/>
-            </a:pPr>
-            <a:r>
-              <a:rPr lang="en-US" sz="1200" dirty="0">
-                <a:solidFill>
-                  <a:srgbClr val="E2E8F0"/>
-                </a:solidFill>
-                <a:latin typeface="Calibri" pitchFamily="34" charset="0"/>
-                <a:ea typeface="Calibri" pitchFamily="34" charset="-122"/>
-                <a:cs typeface="Calibri" pitchFamily="34" charset="-120"/>
-              </a:rPr>
-              <a:t>~95K candidates</a:t>
-            </a:r>
-            <a:endParaRPr lang="en-US" sz="1200" dirty="0"/>
-          </a:p>
-        </p:txBody>
-      </p:sp>
-      <p:sp>
-        <p:nvSpPr>
-          <p:cNvPr id="14" name="Text 12"/>
-          <p:cNvSpPr/>
-          <p:nvPr/>
-        </p:nvSpPr>
-        <p:spPr>
-          <a:xfrm>
-            <a:off x="3931920" y="2606040"/>
-            <a:ext cx="1005840" cy="347472"/>
-          </a:xfrm>
-          <a:prstGeom prst="rect">
-            <a:avLst/>
-          </a:prstGeom>
-          <a:noFill/>
-          <a:ln/>
-        </p:spPr>
-        <p:txBody>
-          <a:bodyPr wrap="square" lIns="0" tIns="0" rIns="0" bIns="0" rtlCol="0" anchor="ctr"/>
-          <a:lstStyle/>
-          <a:p>
-            <a:pPr algn="r" indent="0" marL="0">
-              <a:buNone/>
-            </a:pPr>
-            <a:r>
-              <a:rPr lang="en-US" sz="1200" dirty="0">
-                <a:solidFill>
-                  <a:srgbClr val="7B8CAA"/>
-                </a:solidFill>
-                <a:latin typeface="Calibri" pitchFamily="34" charset="0"/>
-                <a:ea typeface="Calibri" pitchFamily="34" charset="-122"/>
-                <a:cs typeface="Calibri" pitchFamily="34" charset="-120"/>
-              </a:rPr>
-              <a:t>~2,750 SOL</a:t>
-            </a:r>
-            <a:endParaRPr lang="en-US" sz="1200" dirty="0"/>
-          </a:p>
-        </p:txBody>
-      </p:sp>
-      <p:sp>
-        <p:nvSpPr>
-          <p:cNvPr id="15" name="Text 13"/>
-          <p:cNvSpPr/>
-          <p:nvPr/>
-        </p:nvSpPr>
-        <p:spPr>
-          <a:xfrm>
-            <a:off x="502920" y="2999232"/>
-            <a:ext cx="1143000" cy="347472"/>
-          </a:xfrm>
-          <a:prstGeom prst="rect">
-            <a:avLst/>
-          </a:prstGeom>
-          <a:noFill/>
-          <a:ln/>
-        </p:spPr>
-        <p:txBody>
-          <a:bodyPr wrap="square" lIns="0" tIns="0" rIns="0" bIns="0" rtlCol="0" anchor="ctr"/>
-          <a:lstStyle/>
-          <a:p>
-            <a:pPr algn="l" indent="0" marL="0">
-              <a:buNone/>
-            </a:pPr>
-            <a:r>
-              <a:rPr lang="en-US" sz="1200" dirty="0">
-                <a:solidFill>
-                  <a:srgbClr val="E2E8F0"/>
-                </a:solidFill>
-                <a:latin typeface="Calibri" pitchFamily="34" charset="0"/>
-                <a:ea typeface="Calibri" pitchFamily="34" charset="-122"/>
-                <a:cs typeface="Calibri" pitchFamily="34" charset="-120"/>
-              </a:rPr>
-              <a:t>Kamino</a:t>
-            </a:r>
-            <a:endParaRPr lang="en-US" sz="1200" dirty="0"/>
-          </a:p>
-        </p:txBody>
-      </p:sp>
-      <p:sp>
-        <p:nvSpPr>
-          <p:cNvPr id="16" name="Text 14"/>
-          <p:cNvSpPr/>
-          <p:nvPr/>
-        </p:nvSpPr>
-        <p:spPr>
-          <a:xfrm>
-            <a:off x="1691640" y="2999232"/>
-            <a:ext cx="1051560" cy="347472"/>
-          </a:xfrm>
-          <a:prstGeom prst="rect">
-            <a:avLst/>
-          </a:prstGeom>
-          <a:noFill/>
-          <a:ln/>
-        </p:spPr>
-        <p:txBody>
-          <a:bodyPr wrap="square" lIns="0" tIns="0" rIns="0" bIns="0" rtlCol="0" anchor="ctr"/>
-          <a:lstStyle/>
-          <a:p>
-            <a:pPr algn="r" indent="0" marL="0">
-              <a:buNone/>
-            </a:pPr>
-            <a:r>
-              <a:rPr lang="en-US" sz="1200" dirty="0">
-                <a:solidFill>
-                  <a:srgbClr val="E2E8F0"/>
-                </a:solidFill>
-                <a:latin typeface="Calibri" pitchFamily="34" charset="0"/>
-                <a:ea typeface="Calibri" pitchFamily="34" charset="-122"/>
-                <a:cs typeface="Calibri" pitchFamily="34" charset="-120"/>
-              </a:rPr>
-              <a:t>~310K accts</a:t>
-            </a:r>
-            <a:endParaRPr lang="en-US" sz="1200" dirty="0"/>
-          </a:p>
-        </p:txBody>
-      </p:sp>
-      <p:sp>
-        <p:nvSpPr>
-          <p:cNvPr id="17" name="Text 15"/>
-          <p:cNvSpPr/>
-          <p:nvPr/>
-        </p:nvSpPr>
-        <p:spPr>
-          <a:xfrm>
-            <a:off x="2788920" y="2999232"/>
-            <a:ext cx="1097280" cy="347472"/>
-          </a:xfrm>
-          <a:prstGeom prst="rect">
-            <a:avLst/>
-          </a:prstGeom>
-          <a:noFill/>
-          <a:ln/>
-        </p:spPr>
-        <p:txBody>
-          <a:bodyPr wrap="square" lIns="0" tIns="0" rIns="0" bIns="0" rtlCol="0" anchor="ctr"/>
-          <a:lstStyle/>
-          <a:p>
-            <a:pPr algn="r" indent="0" marL="0">
-              <a:buNone/>
-            </a:pPr>
-            <a:r>
-              <a:rPr lang="en-US" sz="1200" dirty="0">
-                <a:solidFill>
-                  <a:srgbClr val="E2E8F0"/>
-                </a:solidFill>
-                <a:latin typeface="Calibri" pitchFamily="34" charset="0"/>
-                <a:ea typeface="Calibri" pitchFamily="34" charset="-122"/>
-                <a:cs typeface="Calibri" pitchFamily="34" charset="-120"/>
-              </a:rPr>
-              <a:t>~67K candidates</a:t>
-            </a:r>
-            <a:endParaRPr lang="en-US" sz="1200" dirty="0"/>
-          </a:p>
-        </p:txBody>
-      </p:sp>
-      <p:sp>
-        <p:nvSpPr>
-          <p:cNvPr id="18" name="Text 16"/>
-          <p:cNvSpPr/>
-          <p:nvPr/>
-        </p:nvSpPr>
-        <p:spPr>
-          <a:xfrm>
-            <a:off x="3931920" y="2999232"/>
-            <a:ext cx="1005840" cy="347472"/>
-          </a:xfrm>
-          <a:prstGeom prst="rect">
-            <a:avLst/>
-          </a:prstGeom>
-          <a:noFill/>
-          <a:ln/>
-        </p:spPr>
-        <p:txBody>
-          <a:bodyPr wrap="square" lIns="0" tIns="0" rIns="0" bIns="0" rtlCol="0" anchor="ctr"/>
-          <a:lstStyle/>
-          <a:p>
-            <a:pPr algn="r" indent="0" marL="0">
-              <a:buNone/>
-            </a:pPr>
-            <a:r>
-              <a:rPr lang="en-US" sz="1200" dirty="0">
-                <a:solidFill>
-                  <a:srgbClr val="7B8CAA"/>
-                </a:solidFill>
-                <a:latin typeface="Calibri" pitchFamily="34" charset="0"/>
-                <a:ea typeface="Calibri" pitchFamily="34" charset="-122"/>
-                <a:cs typeface="Calibri" pitchFamily="34" charset="-120"/>
-              </a:rPr>
-              <a:t>~1,940 SOL</a:t>
-            </a:r>
-            <a:endParaRPr lang="en-US" sz="1200" dirty="0"/>
-          </a:p>
-        </p:txBody>
-      </p:sp>
-      <p:sp>
-        <p:nvSpPr>
-          <p:cNvPr id="19" name="Text 17"/>
-          <p:cNvSpPr/>
-          <p:nvPr/>
-        </p:nvSpPr>
-        <p:spPr>
-          <a:xfrm>
-            <a:off x="502920" y="3392424"/>
-            <a:ext cx="1143000" cy="347472"/>
-          </a:xfrm>
-          <a:prstGeom prst="rect">
-            <a:avLst/>
-          </a:prstGeom>
-          <a:noFill/>
-          <a:ln/>
-        </p:spPr>
-        <p:txBody>
-          <a:bodyPr wrap="square" lIns="0" tIns="0" rIns="0" bIns="0" rtlCol="0" anchor="ctr"/>
-          <a:lstStyle/>
-          <a:p>
-            <a:pPr algn="l" indent="0" marL="0">
-              <a:buNone/>
-            </a:pPr>
-            <a:r>
-              <a:rPr lang="en-US" sz="1100" dirty="0">
-                <a:solidFill>
-                  <a:srgbClr val="7B8CAA"/>
-                </a:solidFill>
-                <a:latin typeface="Calibri" pitchFamily="34" charset="0"/>
-                <a:ea typeface="Calibri" pitchFamily="34" charset="-122"/>
-                <a:cs typeface="Calibri" pitchFamily="34" charset="-120"/>
-              </a:rPr>
-              <a:t>...</a:t>
-            </a:r>
-            <a:endParaRPr lang="en-US" sz="1100" dirty="0"/>
-          </a:p>
-        </p:txBody>
-      </p:sp>
-      <p:sp>
-        <p:nvSpPr>
-          <p:cNvPr id="20" name="Text 18"/>
-          <p:cNvSpPr/>
-          <p:nvPr/>
-        </p:nvSpPr>
-        <p:spPr>
-          <a:xfrm>
-            <a:off x="1691640" y="3392424"/>
-            <a:ext cx="1051560" cy="347472"/>
-          </a:xfrm>
-          <a:prstGeom prst="rect">
-            <a:avLst/>
-          </a:prstGeom>
-          <a:noFill/>
-          <a:ln/>
-        </p:spPr>
-        <p:txBody>
-          <a:bodyPr wrap="square" lIns="0" tIns="0" rIns="0" bIns="0" rtlCol="0" anchor="ctr"/>
-          <a:lstStyle/>
-          <a:p>
-            <a:pPr algn="r" indent="0" marL="0">
-              <a:buNone/>
-            </a:pPr>
-            <a:endParaRPr lang="en-US" sz="1100" dirty="0"/>
-          </a:p>
-        </p:txBody>
-      </p:sp>
-      <p:sp>
-        <p:nvSpPr>
-          <p:cNvPr id="21" name="Text 19"/>
-          <p:cNvSpPr/>
-          <p:nvPr/>
-        </p:nvSpPr>
-        <p:spPr>
-          <a:xfrm>
-            <a:off x="2788920" y="3392424"/>
-            <a:ext cx="1097280" cy="347472"/>
-          </a:xfrm>
-          <a:prstGeom prst="rect">
-            <a:avLst/>
-          </a:prstGeom>
-          <a:noFill/>
-          <a:ln/>
-        </p:spPr>
-        <p:txBody>
-          <a:bodyPr wrap="square" lIns="0" tIns="0" rIns="0" bIns="0" rtlCol="0" anchor="ctr"/>
-          <a:lstStyle/>
-          <a:p>
-            <a:pPr algn="r" indent="0" marL="0">
-              <a:buNone/>
-            </a:pPr>
-            <a:r>
-              <a:rPr lang="en-US" sz="1100" dirty="0">
-                <a:solidFill>
-                  <a:srgbClr val="7B8CAA"/>
-                </a:solidFill>
-                <a:latin typeface="Calibri" pitchFamily="34" charset="0"/>
-                <a:ea typeface="Calibri" pitchFamily="34" charset="-122"/>
-                <a:cs typeface="Calibri" pitchFamily="34" charset="-120"/>
-              </a:rPr>
-              <a:t>15 protocols</a:t>
-            </a:r>
-            <a:endParaRPr lang="en-US" sz="1100" dirty="0"/>
-          </a:p>
-        </p:txBody>
-      </p:sp>
-      <p:sp>
-        <p:nvSpPr>
-          <p:cNvPr id="22" name="Text 20"/>
-          <p:cNvSpPr/>
-          <p:nvPr/>
-        </p:nvSpPr>
-        <p:spPr>
-          <a:xfrm>
-            <a:off x="3931920" y="3392424"/>
-            <a:ext cx="1005840" cy="347472"/>
-          </a:xfrm>
-          <a:prstGeom prst="rect">
-            <a:avLst/>
-          </a:prstGeom>
-          <a:noFill/>
-          <a:ln/>
-        </p:spPr>
-        <p:txBody>
-          <a:bodyPr wrap="square" lIns="0" tIns="0" rIns="0" bIns="0" rtlCol="0" anchor="ctr"/>
-          <a:lstStyle/>
-          <a:p>
-            <a:pPr algn="r" indent="0" marL="0">
-              <a:buNone/>
-            </a:pPr>
-            <a:endParaRPr lang="en-US" sz="1100" dirty="0"/>
-          </a:p>
-        </p:txBody>
-      </p:sp>
-      <p:sp>
-        <p:nvSpPr>
-          <p:cNvPr id="23" name="Shape 21"/>
-          <p:cNvSpPr/>
-          <p:nvPr/>
-        </p:nvSpPr>
-        <p:spPr>
-          <a:xfrm>
-            <a:off x="411480" y="3785616"/>
-            <a:ext cx="4572000" cy="347472"/>
-          </a:xfrm>
-          <a:prstGeom prst="rect">
-            <a:avLst/>
-          </a:prstGeom>
-          <a:solidFill>
-            <a:srgbClr val="1C1040"/>
-          </a:solidFill>
-          <a:ln w="6350">
-            <a:solidFill>
-              <a:srgbClr val="14F195"/>
-            </a:solidFill>
-            <a:prstDash val="solid"/>
-          </a:ln>
-        </p:spPr>
-      </p:sp>
-      <p:sp>
-        <p:nvSpPr>
-          <p:cNvPr id="24" name="Text 22"/>
-          <p:cNvSpPr/>
-          <p:nvPr/>
-        </p:nvSpPr>
-        <p:spPr>
-          <a:xfrm>
-            <a:off x="502920" y="3785616"/>
-            <a:ext cx="1143000" cy="347472"/>
-          </a:xfrm>
-          <a:prstGeom prst="rect">
-            <a:avLst/>
-          </a:prstGeom>
-          <a:noFill/>
-          <a:ln/>
-        </p:spPr>
-        <p:txBody>
-          <a:bodyPr wrap="square" lIns="0" tIns="0" rIns="0" bIns="0" rtlCol="0" anchor="ctr"/>
-          <a:lstStyle/>
-          <a:p>
-            <a:pPr algn="l" indent="0" marL="0">
-              <a:buNone/>
-            </a:pPr>
-            <a:r>
-              <a:rPr lang="en-US" sz="1300" b="1" dirty="0">
-                <a:solidFill>
-                  <a:srgbClr val="FFFFFF"/>
+                  <a:srgbClr val="4ADE80"/>
                 </a:solidFill>
                 <a:latin typeface="Consolas" pitchFamily="34" charset="0"/>
                 <a:ea typeface="Consolas" pitchFamily="34" charset="-122"/>
                 <a:cs typeface="Consolas" pitchFamily="34" charset="-120"/>
               </a:rPr>
-              <a:t>TOTAL</a:t>
-            </a:r>
-            <a:endParaRPr lang="en-US" sz="1300" dirty="0"/>
-          </a:p>
-        </p:txBody>
-      </p:sp>
-      <p:sp>
-        <p:nvSpPr>
-          <p:cNvPr id="25" name="Text 23"/>
-          <p:cNvSpPr/>
-          <p:nvPr/>
-        </p:nvSpPr>
-        <p:spPr>
-          <a:xfrm>
-            <a:off x="1691640" y="3785616"/>
-            <a:ext cx="1051560" cy="347472"/>
-          </a:xfrm>
-          <a:prstGeom prst="rect">
-            <a:avLst/>
-          </a:prstGeom>
-          <a:noFill/>
-          <a:ln/>
-        </p:spPr>
-        <p:txBody>
-          <a:bodyPr wrap="square" lIns="0" tIns="0" rIns="0" bIns="0" rtlCol="0" anchor="ctr"/>
-          <a:lstStyle/>
-          <a:p>
-            <a:pPr algn="r" indent="0" marL="0">
-              <a:buNone/>
-            </a:pPr>
-            <a:endParaRPr lang="en-US" sz="1300" dirty="0"/>
-          </a:p>
-        </p:txBody>
-      </p:sp>
-      <p:sp>
-        <p:nvSpPr>
-          <p:cNvPr id="26" name="Text 24"/>
-          <p:cNvSpPr/>
-          <p:nvPr/>
-        </p:nvSpPr>
-        <p:spPr>
-          <a:xfrm>
-            <a:off x="2788920" y="3785616"/>
-            <a:ext cx="1097280" cy="347472"/>
-          </a:xfrm>
-          <a:prstGeom prst="rect">
-            <a:avLst/>
-          </a:prstGeom>
-          <a:noFill/>
-          <a:ln/>
-        </p:spPr>
-        <p:txBody>
-          <a:bodyPr wrap="square" lIns="0" tIns="0" rIns="0" bIns="0" rtlCol="0" anchor="ctr"/>
-          <a:lstStyle/>
-          <a:p>
-            <a:pPr algn="r" indent="0" marL="0">
-              <a:buNone/>
-            </a:pPr>
-            <a:endParaRPr lang="en-US" sz="1300" dirty="0"/>
-          </a:p>
-        </p:txBody>
-      </p:sp>
-      <p:sp>
-        <p:nvSpPr>
-          <p:cNvPr id="27" name="Text 25"/>
-          <p:cNvSpPr/>
-          <p:nvPr/>
-        </p:nvSpPr>
-        <p:spPr>
-          <a:xfrm>
-            <a:off x="3931920" y="3785616"/>
-            <a:ext cx="1005840" cy="347472"/>
-          </a:xfrm>
-          <a:prstGeom prst="rect">
-            <a:avLst/>
-          </a:prstGeom>
-          <a:noFill/>
-          <a:ln/>
-        </p:spPr>
-        <p:txBody>
-          <a:bodyPr wrap="square" lIns="0" tIns="0" rIns="0" bIns="0" rtlCol="0" anchor="ctr"/>
-          <a:lstStyle/>
-          <a:p>
-            <a:pPr algn="r" indent="0" marL="0">
-              <a:buNone/>
-            </a:pPr>
-            <a:r>
-              <a:rPr lang="en-US" sz="1300" b="1" dirty="0">
-                <a:solidFill>
-                  <a:srgbClr val="14F195"/>
-                </a:solidFill>
-                <a:latin typeface="Consolas" pitchFamily="34" charset="0"/>
-                <a:ea typeface="Consolas" pitchFamily="34" charset="-122"/>
-                <a:cs typeface="Consolas" pitchFamily="34" charset="-120"/>
-              </a:rPr>
-              <a:t>~18,400 SOL</a:t>
-            </a:r>
-            <a:endParaRPr lang="en-US" sz="1300" dirty="0"/>
-          </a:p>
-        </p:txBody>
-      </p:sp>
-      <p:sp>
-        <p:nvSpPr>
-          <p:cNvPr id="28" name="Shape 26"/>
-          <p:cNvSpPr/>
-          <p:nvPr/>
-        </p:nvSpPr>
-        <p:spPr>
-          <a:xfrm>
-            <a:off x="5349240" y="1737360"/>
-            <a:ext cx="3383280" cy="1216152"/>
-          </a:xfrm>
-          <a:prstGeom prst="rect">
-            <a:avLst/>
-          </a:prstGeom>
-          <a:solidFill>
-            <a:srgbClr val="0F1627"/>
-          </a:solidFill>
-          <a:ln w="12700">
-            <a:solidFill>
-              <a:srgbClr val="1E2D4F"/>
-            </a:solidFill>
-            <a:prstDash val="solid"/>
-          </a:ln>
-          <a:effectLst>
-            <a:outerShdw sx="100000" sy="100000" kx="0" ky="0" algn="bl" rotWithShape="0" blurRad="152400" dist="50800" dir="8100000">
-              <a:srgbClr val="000000">
-                <a:alpha val="35000"/>
-              </a:srgbClr>
-            </a:outerShdw>
-          </a:effectLst>
-        </p:spPr>
-      </p:sp>
-      <p:sp>
-        <p:nvSpPr>
-          <p:cNvPr id="29" name="Shape 27"/>
-          <p:cNvSpPr/>
-          <p:nvPr/>
-        </p:nvSpPr>
-        <p:spPr>
-          <a:xfrm>
-            <a:off x="5349240" y="1737360"/>
-            <a:ext cx="3383280" cy="54864"/>
-          </a:xfrm>
-          <a:prstGeom prst="rect">
-            <a:avLst/>
-          </a:prstGeom>
-          <a:solidFill>
-            <a:srgbClr val="9945FF"/>
-          </a:solidFill>
-          <a:ln w="12700">
-            <a:solidFill>
-              <a:srgbClr val="9945FF"/>
-            </a:solidFill>
-            <a:prstDash val="solid"/>
-          </a:ln>
-        </p:spPr>
-      </p:sp>
-      <p:sp>
-        <p:nvSpPr>
-          <p:cNvPr id="30" name="Text 28"/>
-          <p:cNvSpPr/>
-          <p:nvPr/>
-        </p:nvSpPr>
-        <p:spPr>
-          <a:xfrm>
-            <a:off x="5513832" y="1828800"/>
-            <a:ext cx="3108960" cy="320040"/>
-          </a:xfrm>
-          <a:prstGeom prst="rect">
-            <a:avLst/>
-          </a:prstGeom>
-          <a:noFill/>
-          <a:ln/>
-        </p:spPr>
-        <p:txBody>
-          <a:bodyPr wrap="square" lIns="0" tIns="0" rIns="0" bIns="0" rtlCol="0" anchor="ctr"/>
-          <a:lstStyle/>
-          <a:p>
-            <a:pPr algn="l" indent="0" marL="0">
-              <a:buNone/>
-            </a:pPr>
-            <a:r>
-              <a:rPr lang="en-US" sz="1300" b="1" spc="100" kern="0" dirty="0">
-                <a:solidFill>
-                  <a:srgbClr val="9945FF"/>
-                </a:solidFill>
-                <a:latin typeface="Calibri" pitchFamily="34" charset="0"/>
-                <a:ea typeface="Calibri" pitchFamily="34" charset="-122"/>
-                <a:cs typeface="Calibri" pitchFamily="34" charset="-120"/>
-              </a:rPr>
-              <a:t>MOAT</a:t>
-            </a:r>
-            <a:endParaRPr lang="en-US" sz="1300" dirty="0"/>
-          </a:p>
-        </p:txBody>
-      </p:sp>
-      <p:sp>
-        <p:nvSpPr>
-          <p:cNvPr id="31" name="Text 29"/>
-          <p:cNvSpPr/>
-          <p:nvPr/>
-        </p:nvSpPr>
-        <p:spPr>
-          <a:xfrm>
-            <a:off x="5513832" y="2167128"/>
-            <a:ext cx="3127248" cy="237744"/>
-          </a:xfrm>
-          <a:prstGeom prst="rect">
-            <a:avLst/>
-          </a:prstGeom>
-          <a:noFill/>
-          <a:ln/>
-        </p:spPr>
-        <p:txBody>
-          <a:bodyPr wrap="square" lIns="0" tIns="0" rIns="0" bIns="0" rtlCol="0" anchor="ctr"/>
-          <a:lstStyle/>
-          <a:p>
-            <a:pPr algn="l" indent="0" marL="0">
-              <a:buNone/>
-            </a:pPr>
-            <a:r>
-              <a:rPr lang="en-US" sz="1150" dirty="0">
-                <a:solidFill>
-                  <a:srgbClr val="7B8CAA"/>
-                </a:solidFill>
-                <a:latin typeface="Calibri" pitchFamily="34" charset="0"/>
-                <a:ea typeface="Calibri" pitchFamily="34" charset="-122"/>
-                <a:cs typeface="Calibri" pitchFamily="34" charset="-120"/>
-              </a:rPr>
-              <a:t>— First LZ4 that runs inside SBF VM</a:t>
-            </a:r>
-            <a:endParaRPr lang="en-US" sz="1150" dirty="0"/>
-          </a:p>
-        </p:txBody>
-      </p:sp>
-      <p:sp>
-        <p:nvSpPr>
-          <p:cNvPr id="32" name="Text 30"/>
-          <p:cNvSpPr/>
-          <p:nvPr/>
-        </p:nvSpPr>
-        <p:spPr>
-          <a:xfrm>
-            <a:off x="5513832" y="2414016"/>
-            <a:ext cx="3127248" cy="237744"/>
-          </a:xfrm>
-          <a:prstGeom prst="rect">
-            <a:avLst/>
-          </a:prstGeom>
-          <a:noFill/>
-          <a:ln/>
-        </p:spPr>
-        <p:txBody>
-          <a:bodyPr wrap="square" lIns="0" tIns="0" rIns="0" bIns="0" rtlCol="0" anchor="ctr"/>
-          <a:lstStyle/>
-          <a:p>
-            <a:pPr algn="l" indent="0" marL="0">
-              <a:buNone/>
-            </a:pPr>
-            <a:r>
-              <a:rPr lang="en-US" sz="1150" dirty="0">
-                <a:solidFill>
-                  <a:srgbClr val="7B8CAA"/>
-                </a:solidFill>
-                <a:latin typeface="Calibri" pitchFamily="34" charset="0"/>
-                <a:ea typeface="Calibri" pitchFamily="34" charset="-122"/>
-                <a:cs typeface="Calibri" pitchFamily="34" charset="-120"/>
-              </a:rPr>
-              <a:t>— No_std + 32 KB heap constraint is hard</a:t>
-            </a:r>
-            <a:endParaRPr lang="en-US" sz="1150" dirty="0"/>
-          </a:p>
-        </p:txBody>
-      </p:sp>
-      <p:sp>
-        <p:nvSpPr>
-          <p:cNvPr id="33" name="Text 31"/>
-          <p:cNvSpPr/>
-          <p:nvPr/>
-        </p:nvSpPr>
-        <p:spPr>
-          <a:xfrm>
-            <a:off x="5513832" y="2660904"/>
-            <a:ext cx="3127248" cy="237744"/>
-          </a:xfrm>
-          <a:prstGeom prst="rect">
-            <a:avLst/>
-          </a:prstGeom>
-          <a:noFill/>
-          <a:ln/>
-        </p:spPr>
-        <p:txBody>
-          <a:bodyPr wrap="square" lIns="0" tIns="0" rIns="0" bIns="0" rtlCol="0" anchor="ctr"/>
-          <a:lstStyle/>
-          <a:p>
-            <a:pPr algn="l" indent="0" marL="0">
-              <a:buNone/>
-            </a:pPr>
-            <a:r>
-              <a:rPr lang="en-US" sz="1150" dirty="0">
-                <a:solidFill>
-                  <a:srgbClr val="7B8CAA"/>
-                </a:solidFill>
-                <a:latin typeface="Calibri" pitchFamily="34" charset="0"/>
-                <a:ea typeface="Calibri" pitchFamily="34" charset="-122"/>
-                <a:cs typeface="Calibri" pitchFamily="34" charset="-120"/>
-              </a:rPr>
-              <a:t>— Mainnet benchmarks on real accounts</a:t>
-            </a:r>
-            <a:endParaRPr lang="en-US" sz="1150" dirty="0"/>
-          </a:p>
-        </p:txBody>
-      </p:sp>
-      <p:sp>
-        <p:nvSpPr>
-          <p:cNvPr id="34" name="Shape 32"/>
-          <p:cNvSpPr/>
-          <p:nvPr/>
-        </p:nvSpPr>
-        <p:spPr>
-          <a:xfrm>
-            <a:off x="5349240" y="3108960"/>
-            <a:ext cx="3383280" cy="1216152"/>
-          </a:xfrm>
-          <a:prstGeom prst="rect">
-            <a:avLst/>
-          </a:prstGeom>
-          <a:solidFill>
-            <a:srgbClr val="0F1627"/>
-          </a:solidFill>
-          <a:ln w="12700">
-            <a:solidFill>
-              <a:srgbClr val="1E2D4F"/>
-            </a:solidFill>
-            <a:prstDash val="solid"/>
-          </a:ln>
-          <a:effectLst>
-            <a:outerShdw sx="100000" sy="100000" kx="0" ky="0" algn="bl" rotWithShape="0" blurRad="152400" dist="50800" dir="8100000">
-              <a:srgbClr val="000000">
-                <a:alpha val="35000"/>
-              </a:srgbClr>
-            </a:outerShdw>
-          </a:effectLst>
-        </p:spPr>
-      </p:sp>
-      <p:sp>
-        <p:nvSpPr>
-          <p:cNvPr id="35" name="Shape 33"/>
-          <p:cNvSpPr/>
-          <p:nvPr/>
-        </p:nvSpPr>
-        <p:spPr>
-          <a:xfrm>
-            <a:off x="5349240" y="3108960"/>
-            <a:ext cx="3383280" cy="54864"/>
-          </a:xfrm>
-          <a:prstGeom prst="rect">
-            <a:avLst/>
-          </a:prstGeom>
-          <a:solidFill>
-            <a:srgbClr val="14F195"/>
-          </a:solidFill>
-          <a:ln w="12700">
-            <a:solidFill>
-              <a:srgbClr val="14F195"/>
-            </a:solidFill>
-            <a:prstDash val="solid"/>
-          </a:ln>
-        </p:spPr>
-      </p:sp>
-      <p:sp>
-        <p:nvSpPr>
-          <p:cNvPr id="36" name="Text 34"/>
-          <p:cNvSpPr/>
-          <p:nvPr/>
-        </p:nvSpPr>
-        <p:spPr>
-          <a:xfrm>
-            <a:off x="5513832" y="3200400"/>
-            <a:ext cx="3108960" cy="320040"/>
-          </a:xfrm>
-          <a:prstGeom prst="rect">
-            <a:avLst/>
-          </a:prstGeom>
-          <a:noFill/>
-          <a:ln/>
-        </p:spPr>
-        <p:txBody>
-          <a:bodyPr wrap="square" lIns="0" tIns="0" rIns="0" bIns="0" rtlCol="0" anchor="ctr"/>
-          <a:lstStyle/>
-          <a:p>
-            <a:pPr algn="l" indent="0" marL="0">
-              <a:buNone/>
-            </a:pPr>
-            <a:r>
-              <a:rPr lang="en-US" sz="1300" b="1" spc="100" kern="0" dirty="0">
-                <a:solidFill>
-                  <a:srgbClr val="14F195"/>
-                </a:solidFill>
-                <a:latin typeface="Calibri" pitchFamily="34" charset="0"/>
-                <a:ea typeface="Calibri" pitchFamily="34" charset="-122"/>
-                <a:cs typeface="Calibri" pitchFamily="34" charset="-120"/>
-              </a:rPr>
-              <a:t>BUSINESS MODEL</a:t>
-            </a:r>
-            <a:endParaRPr lang="en-US" sz="1300" dirty="0"/>
-          </a:p>
-        </p:txBody>
-      </p:sp>
-      <p:sp>
-        <p:nvSpPr>
-          <p:cNvPr id="37" name="Text 35"/>
-          <p:cNvSpPr/>
-          <p:nvPr/>
-        </p:nvSpPr>
-        <p:spPr>
-          <a:xfrm>
-            <a:off x="5513832" y="3538728"/>
-            <a:ext cx="3127248" cy="237744"/>
-          </a:xfrm>
-          <a:prstGeom prst="rect">
-            <a:avLst/>
-          </a:prstGeom>
-          <a:noFill/>
-          <a:ln/>
-        </p:spPr>
-        <p:txBody>
-          <a:bodyPr wrap="square" lIns="0" tIns="0" rIns="0" bIns="0" rtlCol="0" anchor="ctr"/>
-          <a:lstStyle/>
-          <a:p>
-            <a:pPr algn="l" indent="0" marL="0">
-              <a:buNone/>
-            </a:pPr>
-            <a:r>
-              <a:rPr lang="en-US" sz="1150" dirty="0">
-                <a:solidFill>
-                  <a:srgbClr val="7B8CAA"/>
-                </a:solidFill>
-                <a:latin typeface="Calibri" pitchFamily="34" charset="0"/>
-                <a:ea typeface="Calibri" pitchFamily="34" charset="-122"/>
-                <a:cs typeface="Calibri" pitchFamily="34" charset="-120"/>
-              </a:rPr>
-              <a:t>— Open-source library → developer adoption</a:t>
-            </a:r>
-            <a:endParaRPr lang="en-US" sz="1150" dirty="0"/>
-          </a:p>
-        </p:txBody>
-      </p:sp>
-      <p:sp>
-        <p:nvSpPr>
-          <p:cNvPr id="38" name="Text 36"/>
-          <p:cNvSpPr/>
-          <p:nvPr/>
-        </p:nvSpPr>
-        <p:spPr>
-          <a:xfrm>
-            <a:off x="5513832" y="3785616"/>
-            <a:ext cx="3127248" cy="237744"/>
-          </a:xfrm>
-          <a:prstGeom prst="rect">
-            <a:avLst/>
-          </a:prstGeom>
-          <a:noFill/>
-          <a:ln/>
-        </p:spPr>
-        <p:txBody>
-          <a:bodyPr wrap="square" lIns="0" tIns="0" rIns="0" bIns="0" rtlCol="0" anchor="ctr"/>
-          <a:lstStyle/>
-          <a:p>
-            <a:pPr algn="l" indent="0" marL="0">
-              <a:buNone/>
-            </a:pPr>
-            <a:r>
-              <a:rPr lang="en-US" sz="1150" dirty="0">
-                <a:solidFill>
-                  <a:srgbClr val="7B8CAA"/>
-                </a:solidFill>
-                <a:latin typeface="Calibri" pitchFamily="34" charset="0"/>
-                <a:ea typeface="Calibri" pitchFamily="34" charset="-122"/>
-                <a:cs typeface="Calibri" pitchFamily="34" charset="-120"/>
-              </a:rPr>
-              <a:t>— Protocol integrations &amp; consulting</a:t>
-            </a:r>
-            <a:endParaRPr lang="en-US" sz="1150" dirty="0"/>
-          </a:p>
-        </p:txBody>
-      </p:sp>
-      <p:sp>
-        <p:nvSpPr>
-          <p:cNvPr id="39" name="Text 37"/>
-          <p:cNvSpPr/>
-          <p:nvPr/>
-        </p:nvSpPr>
-        <p:spPr>
-          <a:xfrm>
-            <a:off x="5513832" y="4032504"/>
-            <a:ext cx="3127248" cy="237744"/>
-          </a:xfrm>
-          <a:prstGeom prst="rect">
-            <a:avLst/>
-          </a:prstGeom>
-          <a:noFill/>
-          <a:ln/>
-        </p:spPr>
-        <p:txBody>
-          <a:bodyPr wrap="square" lIns="0" tIns="0" rIns="0" bIns="0" rtlCol="0" anchor="ctr"/>
-          <a:lstStyle/>
-          <a:p>
-            <a:pPr algn="l" indent="0" marL="0">
-              <a:buNone/>
-            </a:pPr>
-            <a:r>
-              <a:rPr lang="en-US" sz="1150" dirty="0">
-                <a:solidFill>
-                  <a:srgbClr val="7B8CAA"/>
-                </a:solidFill>
-                <a:latin typeface="Calibri" pitchFamily="34" charset="0"/>
-                <a:ea typeface="Calibri" pitchFamily="34" charset="-122"/>
-                <a:cs typeface="Calibri" pitchFamily="34" charset="-120"/>
-              </a:rPr>
-              <a:t>— Longer term: automated rent-recapture SaaS</a:t>
-            </a:r>
-            <a:endParaRPr lang="en-US" sz="1150" dirty="0"/>
-          </a:p>
-        </p:txBody>
-      </p:sp>
-      <p:sp>
-        <p:nvSpPr>
-          <p:cNvPr id="40" name="Text 38"/>
-          <p:cNvSpPr/>
-          <p:nvPr/>
-        </p:nvSpPr>
-        <p:spPr>
-          <a:xfrm>
-            <a:off x="411480" y="4434840"/>
-            <a:ext cx="8321040" cy="548640"/>
-          </a:xfrm>
-          <a:prstGeom prst="rect">
-            <a:avLst/>
-          </a:prstGeom>
-          <a:noFill/>
-          <a:ln/>
-        </p:spPr>
-        <p:txBody>
-          <a:bodyPr wrap="square" lIns="0" tIns="0" rIns="0" bIns="0" rtlCol="0" anchor="ctr"/>
-          <a:lstStyle/>
-          <a:p>
-            <a:pPr algn="l" indent="0" marL="0">
-              <a:buNone/>
-            </a:pPr>
-            <a:r>
-              <a:rPr lang="en-US" sz="950" i="1" dirty="0">
-                <a:solidFill>
-                  <a:srgbClr val="7B8CAA"/>
-                </a:solidFill>
-                <a:latin typeface="Calibri" pitchFamily="34" charset="0"/>
-                <a:ea typeface="Calibri" pitchFamily="34" charset="-122"/>
-                <a:cs typeface="Calibri" pitchFamily="34" charset="-120"/>
-              </a:rPr>
-              <a:t>Candidates: &gt;50% zero bytes AND &gt;30 days inactive AND rent saving &gt;10× crank cost.</a:t>
-            </a:r>
-            <a:endParaRPr lang="en-US" sz="950" dirty="0"/>
+              <a:t>Drift ~5,220 SOL recoverable  ·  Marginfi ~2,750 SOL  ·  Kamino ~1,940 SOL  ·  ~18,400 SOL across 15 protocols</a:t>
+            </a:r>
+            <a:endParaRPr lang="en-US" sz="1050" dirty="0"/>
           </a:p>
         </p:txBody>
       </p:sp>
@@ -7401,7 +6594,7 @@
     <p:bg>
       <p:bgPr>
         <a:solidFill>
-          <a:srgbClr val="080C18"/>
+          <a:srgbClr val="090A0E"/>
         </a:solidFill>
       </p:bgPr>
     </p:bg>
@@ -7427,18 +6620,22 @@
         </p:nvSpPr>
         <p:spPr>
           <a:xfrm>
-            <a:off x="0" y="0"/>
-            <a:ext cx="164592" cy="5143500"/>
-          </a:xfrm>
-          <a:prstGeom prst="rect">
+            <a:off x="-1371600" y="-2286000"/>
+            <a:ext cx="11887200" cy="4572000"/>
+          </a:xfrm>
+          <a:prstGeom prst="ellipse">
             <a:avLst/>
           </a:prstGeom>
           <a:solidFill>
-            <a:srgbClr val="14F195"/>
+            <a:srgbClr val="2CDD6D">
+              <a:alpha val="8000"/>
+            </a:srgbClr>
           </a:solidFill>
           <a:ln w="12700">
             <a:solidFill>
-              <a:srgbClr val="14F195"/>
+              <a:srgbClr val="2CDD6D">
+                <a:alpha val="0"/>
+              </a:srgbClr>
             </a:solidFill>
             <a:prstDash val="solid"/>
           </a:ln>
@@ -7446,39 +6643,14 @@
       </p:sp>
       <p:sp>
         <p:nvSpPr>
-          <p:cNvPr id="3" name="Shape 1"/>
-          <p:cNvSpPr/>
-          <p:nvPr/>
-        </p:nvSpPr>
-        <p:spPr>
-          <a:xfrm>
-            <a:off x="164592" y="960120"/>
-            <a:ext cx="8979408" cy="36576"/>
-          </a:xfrm>
-          <a:prstGeom prst="rect">
-            <a:avLst/>
-          </a:prstGeom>
-          <a:solidFill>
-            <a:srgbClr val="9945FF"/>
-          </a:solidFill>
-          <a:ln w="12700">
-            <a:solidFill>
-              <a:srgbClr val="9945FF"/>
-            </a:solidFill>
-            <a:prstDash val="solid"/>
-          </a:ln>
-        </p:spPr>
-      </p:sp>
-      <p:sp>
-        <p:nvSpPr>
-          <p:cNvPr id="4" name="Text 2"/>
-          <p:cNvSpPr/>
-          <p:nvPr/>
-        </p:nvSpPr>
-        <p:spPr>
-          <a:xfrm>
-            <a:off x="411480" y="1078992"/>
-            <a:ext cx="8321040" cy="1737360"/>
+          <p:cNvPr id="3" name="Text 1"/>
+          <p:cNvSpPr/>
+          <p:nvPr/>
+        </p:nvSpPr>
+        <p:spPr>
+          <a:xfrm>
+            <a:off x="640080" y="1005840"/>
+            <a:ext cx="7863840" cy="1005840"/>
           </a:xfrm>
           <a:prstGeom prst="rect">
             <a:avLst/>
@@ -7496,7 +6668,7 @@
             <a:r>
               <a:rPr lang="en-US" sz="5200" b="1" dirty="0">
                 <a:solidFill>
-                  <a:srgbClr val="FFFFFF"/>
+                  <a:srgbClr val="F1F5F9"/>
                 </a:solidFill>
                 <a:latin typeface="Calibri" pitchFamily="34" charset="0"/>
                 <a:ea typeface="Calibri" pitchFamily="34" charset="-122"/>
@@ -7506,6 +6678,28 @@
             </a:r>
             <a:endParaRPr lang="en-US" sz="5200" dirty="0"/>
           </a:p>
+        </p:txBody>
+      </p:sp>
+      <p:sp>
+        <p:nvSpPr>
+          <p:cNvPr id="4" name="Text 2"/>
+          <p:cNvSpPr/>
+          <p:nvPr/>
+        </p:nvSpPr>
+        <p:spPr>
+          <a:xfrm>
+            <a:off x="640080" y="1874520"/>
+            <a:ext cx="7863840" cy="914400"/>
+          </a:xfrm>
+          <a:prstGeom prst="rect">
+            <a:avLst/>
+          </a:prstGeom>
+          <a:noFill/>
+          <a:ln/>
+        </p:spPr>
+        <p:txBody>
+          <a:bodyPr wrap="square" lIns="0" tIns="0" rIns="0" bIns="0" rtlCol="0" anchor="ctr"/>
+          <a:lstStyle/>
           <a:p>
             <a:pPr algn="l" indent="0" marL="0">
               <a:buNone/>
@@ -7513,7 +6707,7 @@
             <a:r>
               <a:rPr lang="en-US" sz="5200" b="1" dirty="0">
                 <a:solidFill>
-                  <a:srgbClr val="FFFFFF"/>
+                  <a:srgbClr val="4ADE80"/>
                 </a:solidFill>
                 <a:latin typeface="Calibri" pitchFamily="34" charset="0"/>
                 <a:ea typeface="Calibri" pitchFamily="34" charset="-122"/>
@@ -7533,25 +6727,50 @@
         </p:nvSpPr>
         <p:spPr>
           <a:xfrm>
-            <a:off x="411480" y="2971800"/>
-            <a:ext cx="3977640" cy="960120"/>
+            <a:off x="640080" y="2880360"/>
+            <a:ext cx="7863840" cy="22860"/>
           </a:xfrm>
           <a:prstGeom prst="rect">
             <a:avLst/>
           </a:prstGeom>
           <a:solidFill>
-            <a:srgbClr val="0F1627"/>
+            <a:srgbClr val="4ADE80"/>
           </a:solidFill>
-          <a:ln w="19050">
+          <a:ln w="12700">
             <a:solidFill>
-              <a:srgbClr val="9945FF"/>
+              <a:srgbClr val="4ADE80"/>
+            </a:solidFill>
+            <a:prstDash val="solid"/>
+          </a:ln>
+        </p:spPr>
+      </p:sp>
+      <p:sp>
+        <p:nvSpPr>
+          <p:cNvPr id="6" name="Shape 4"/>
+          <p:cNvSpPr/>
+          <p:nvPr/>
+        </p:nvSpPr>
+        <p:spPr>
+          <a:xfrm>
+            <a:off x="640080" y="3063240"/>
+            <a:ext cx="3840480" cy="868680"/>
+          </a:xfrm>
+          <a:prstGeom prst="rect">
+            <a:avLst/>
+          </a:prstGeom>
+          <a:solidFill>
+            <a:srgbClr val="0D1018"/>
+          </a:solidFill>
+          <a:ln w="12700">
+            <a:solidFill>
+              <a:srgbClr val="1A1F2E"/>
             </a:solidFill>
             <a:prstDash val="solid"/>
           </a:ln>
           <a:effectLst>
-            <a:outerShdw sx="100000" sy="100000" kx="0" ky="0" algn="bl" rotWithShape="0" blurRad="152400" dist="50800" dir="8100000">
+            <a:outerShdw sx="100000" sy="100000" kx="0" ky="0" algn="bl" rotWithShape="0" blurRad="254000" dist="76200" dir="8100000">
               <a:srgbClr val="000000">
-                <a:alpha val="35000"/>
+                <a:alpha val="50000"/>
               </a:srgbClr>
             </a:outerShdw>
           </a:effectLst>
@@ -7559,14 +6778,14 @@
       </p:sp>
       <p:sp>
         <p:nvSpPr>
-          <p:cNvPr id="6" name="Text 4"/>
-          <p:cNvSpPr/>
-          <p:nvPr/>
-        </p:nvSpPr>
-        <p:spPr>
-          <a:xfrm>
-            <a:off x="502920" y="3017520"/>
-            <a:ext cx="3794760" cy="347472"/>
+          <p:cNvPr id="7" name="Text 5"/>
+          <p:cNvSpPr/>
+          <p:nvPr/>
+        </p:nvSpPr>
+        <p:spPr>
+          <a:xfrm>
+            <a:off x="822960" y="3136392"/>
+            <a:ext cx="3474720" cy="384048"/>
           </a:xfrm>
           <a:prstGeom prst="rect">
             <a:avLst/>
@@ -7582,48 +6801,9 @@
               <a:buNone/>
             </a:pPr>
             <a:r>
-              <a:rPr lang="en-US" sz="1600" b="1" dirty="0">
+              <a:rPr lang="en-US" sz="1700" b="1" dirty="0">
                 <a:solidFill>
-                  <a:srgbClr val="9945FF"/>
-                </a:solidFill>
-                <a:latin typeface="Calibri" pitchFamily="34" charset="0"/>
-                <a:ea typeface="Calibri" pitchFamily="34" charset="-122"/>
-                <a:cs typeface="Calibri" pitchFamily="34" charset="-120"/>
-              </a:rPr>
-              <a:t>📦  crates.io</a:t>
-            </a:r>
-            <a:endParaRPr lang="en-US" sz="1600" dirty="0"/>
-          </a:p>
-        </p:txBody>
-      </p:sp>
-      <p:sp>
-        <p:nvSpPr>
-          <p:cNvPr id="7" name="Text 5"/>
-          <p:cNvSpPr/>
-          <p:nvPr/>
-        </p:nvSpPr>
-        <p:spPr>
-          <a:xfrm>
-            <a:off x="502920" y="3364992"/>
-            <a:ext cx="3794760" cy="347472"/>
-          </a:xfrm>
-          <a:prstGeom prst="rect">
-            <a:avLst/>
-          </a:prstGeom>
-          <a:noFill/>
-          <a:ln/>
-        </p:spPr>
-        <p:txBody>
-          <a:bodyPr wrap="square" lIns="0" tIns="0" rIns="0" bIns="0" rtlCol="0" anchor="ctr"/>
-          <a:lstStyle/>
-          <a:p>
-            <a:pPr algn="l" indent="0" marL="0">
-              <a:buNone/>
-            </a:pPr>
-            <a:r>
-              <a:rPr lang="en-US" sz="1400" dirty="0">
-                <a:solidFill>
-                  <a:srgbClr val="14F195"/>
+                  <a:srgbClr val="4ADE80"/>
                 </a:solidFill>
                 <a:latin typeface="Consolas" pitchFamily="34" charset="0"/>
                 <a:ea typeface="Consolas" pitchFamily="34" charset="-122"/>
@@ -7631,52 +6811,20 @@
               </a:rPr>
               <a:t>cargo add densol</a:t>
             </a:r>
-            <a:endParaRPr lang="en-US" sz="1400" dirty="0"/>
+            <a:endParaRPr lang="en-US" sz="1700" dirty="0"/>
           </a:p>
         </p:txBody>
       </p:sp>
       <p:sp>
         <p:nvSpPr>
-          <p:cNvPr id="8" name="Shape 6"/>
-          <p:cNvSpPr/>
-          <p:nvPr/>
-        </p:nvSpPr>
-        <p:spPr>
-          <a:xfrm>
-            <a:off x="4754880" y="2971800"/>
-            <a:ext cx="3977640" cy="960120"/>
-          </a:xfrm>
-          <a:prstGeom prst="rect">
-            <a:avLst/>
-          </a:prstGeom>
-          <a:solidFill>
-            <a:srgbClr val="0F1627"/>
-          </a:solidFill>
-          <a:ln w="19050">
-            <a:solidFill>
-              <a:srgbClr val="14F195"/>
-            </a:solidFill>
-            <a:prstDash val="solid"/>
-          </a:ln>
-          <a:effectLst>
-            <a:outerShdw sx="100000" sy="100000" kx="0" ky="0" algn="bl" rotWithShape="0" blurRad="152400" dist="50800" dir="8100000">
-              <a:srgbClr val="000000">
-                <a:alpha val="35000"/>
-              </a:srgbClr>
-            </a:outerShdw>
-          </a:effectLst>
-        </p:spPr>
-      </p:sp>
-      <p:sp>
-        <p:nvSpPr>
-          <p:cNvPr id="9" name="Text 7"/>
-          <p:cNvSpPr/>
-          <p:nvPr/>
-        </p:nvSpPr>
-        <p:spPr>
-          <a:xfrm>
-            <a:off x="4846320" y="3017520"/>
-            <a:ext cx="3794760" cy="347472"/>
+          <p:cNvPr id="8" name="Text 6"/>
+          <p:cNvSpPr/>
+          <p:nvPr/>
+        </p:nvSpPr>
+        <p:spPr>
+          <a:xfrm>
+            <a:off x="822960" y="3493008"/>
+            <a:ext cx="3474720" cy="320040"/>
           </a:xfrm>
           <a:prstGeom prst="rect">
             <a:avLst/>
@@ -7692,69 +6840,62 @@
               <a:buNone/>
             </a:pPr>
             <a:r>
-              <a:rPr lang="en-US" sz="1600" b="1" dirty="0">
+              <a:rPr lang="en-US" sz="1100" dirty="0">
                 <a:solidFill>
-                  <a:srgbClr val="14F195"/>
-                </a:solidFill>
-                <a:latin typeface="Calibri" pitchFamily="34" charset="0"/>
-                <a:ea typeface="Calibri" pitchFamily="34" charset="-122"/>
-                <a:cs typeface="Calibri" pitchFamily="34" charset="-120"/>
-              </a:rPr>
-              <a:t>⚡  Benchmarks</a:t>
-            </a:r>
-            <a:endParaRPr lang="en-US" sz="1600" dirty="0"/>
-          </a:p>
-        </p:txBody>
-      </p:sp>
-      <p:sp>
-        <p:nvSpPr>
-          <p:cNvPr id="10" name="Text 8"/>
-          <p:cNvSpPr/>
-          <p:nvPr/>
-        </p:nvSpPr>
-        <p:spPr>
-          <a:xfrm>
-            <a:off x="4846320" y="3364992"/>
-            <a:ext cx="3794760" cy="347472"/>
-          </a:xfrm>
-          <a:prstGeom prst="rect">
-            <a:avLst/>
-          </a:prstGeom>
-          <a:noFill/>
-          <a:ln/>
-        </p:spPr>
-        <p:txBody>
-          <a:bodyPr wrap="square" lIns="0" tIns="0" rIns="0" bIns="0" rtlCol="0" anchor="ctr"/>
-          <a:lstStyle/>
-          <a:p>
-            <a:pPr algn="l" indent="0" marL="0">
-              <a:buNone/>
-            </a:pPr>
-            <a:r>
-              <a:rPr lang="en-US" sz="1400" dirty="0">
-                <a:solidFill>
-                  <a:srgbClr val="7B8CAA"/>
+                  <a:srgbClr val="9CA3AF"/>
                 </a:solidFill>
                 <a:latin typeface="Consolas" pitchFamily="34" charset="0"/>
                 <a:ea typeface="Consolas" pitchFamily="34" charset="-122"/>
                 <a:cs typeface="Consolas" pitchFamily="34" charset="-120"/>
               </a:rPr>
-              <a:t>github: ZygmuntJakub/densol</a:t>
-            </a:r>
-            <a:endParaRPr lang="en-US" sz="1400" dirty="0"/>
+              <a:t>crates.io/crates/densol</a:t>
+            </a:r>
+            <a:endParaRPr lang="en-US" sz="1100" dirty="0"/>
           </a:p>
         </p:txBody>
       </p:sp>
       <p:sp>
         <p:nvSpPr>
-          <p:cNvPr id="11" name="Text 9"/>
-          <p:cNvSpPr/>
-          <p:nvPr/>
-        </p:nvSpPr>
-        <p:spPr>
-          <a:xfrm>
-            <a:off x="411480" y="4114800"/>
-            <a:ext cx="8321040" cy="749808"/>
+          <p:cNvPr id="9" name="Shape 7"/>
+          <p:cNvSpPr/>
+          <p:nvPr/>
+        </p:nvSpPr>
+        <p:spPr>
+          <a:xfrm>
+            <a:off x="4754880" y="3063240"/>
+            <a:ext cx="3840480" cy="868680"/>
+          </a:xfrm>
+          <a:prstGeom prst="rect">
+            <a:avLst/>
+          </a:prstGeom>
+          <a:solidFill>
+            <a:srgbClr val="0D1018"/>
+          </a:solidFill>
+          <a:ln w="12700">
+            <a:solidFill>
+              <a:srgbClr val="1A1F2E"/>
+            </a:solidFill>
+            <a:prstDash val="solid"/>
+          </a:ln>
+          <a:effectLst>
+            <a:outerShdw sx="100000" sy="100000" kx="0" ky="0" algn="bl" rotWithShape="0" blurRad="254000" dist="76200" dir="8100000">
+              <a:srgbClr val="000000">
+                <a:alpha val="50000"/>
+              </a:srgbClr>
+            </a:outerShdw>
+          </a:effectLst>
+        </p:spPr>
+      </p:sp>
+      <p:sp>
+        <p:nvSpPr>
+          <p:cNvPr id="10" name="Text 8"/>
+          <p:cNvSpPr/>
+          <p:nvPr/>
+        </p:nvSpPr>
+        <p:spPr>
+          <a:xfrm>
+            <a:off x="4937760" y="3136392"/>
+            <a:ext cx="3474720" cy="384048"/>
           </a:xfrm>
           <a:prstGeom prst="rect">
             <a:avLst/>
@@ -7770,9 +6911,87 @@
               <a:buNone/>
             </a:pPr>
             <a:r>
+              <a:rPr lang="en-US" sz="1300" b="1" dirty="0">
+                <a:solidFill>
+                  <a:srgbClr val="F1F5F9"/>
+                </a:solidFill>
+                <a:latin typeface="Consolas" pitchFamily="34" charset="0"/>
+                <a:ea typeface="Consolas" pitchFamily="34" charset="-122"/>
+                <a:cs typeface="Consolas" pitchFamily="34" charset="-120"/>
+              </a:rPr>
+              <a:t>github.com/ZygmuntJakub/densol</a:t>
+            </a:r>
+            <a:endParaRPr lang="en-US" sz="1300" dirty="0"/>
+          </a:p>
+        </p:txBody>
+      </p:sp>
+      <p:sp>
+        <p:nvSpPr>
+          <p:cNvPr id="11" name="Text 9"/>
+          <p:cNvSpPr/>
+          <p:nvPr/>
+        </p:nvSpPr>
+        <p:spPr>
+          <a:xfrm>
+            <a:off x="4937760" y="3493008"/>
+            <a:ext cx="3474720" cy="320040"/>
+          </a:xfrm>
+          <a:prstGeom prst="rect">
+            <a:avLst/>
+          </a:prstGeom>
+          <a:noFill/>
+          <a:ln/>
+        </p:spPr>
+        <p:txBody>
+          <a:bodyPr wrap="square" lIns="0" tIns="0" rIns="0" bIns="0" rtlCol="0" anchor="ctr"/>
+          <a:lstStyle/>
+          <a:p>
+            <a:pPr algn="l" indent="0" marL="0">
+              <a:buNone/>
+            </a:pPr>
+            <a:r>
+              <a:rPr lang="en-US" sz="1100" dirty="0">
+                <a:solidFill>
+                  <a:srgbClr val="9CA3AF"/>
+                </a:solidFill>
+                <a:latin typeface="Consolas" pitchFamily="34" charset="0"/>
+                <a:ea typeface="Consolas" pitchFamily="34" charset="-122"/>
+                <a:cs typeface="Consolas" pitchFamily="34" charset="-120"/>
+              </a:rPr>
+              <a:t>benchmarks · source · docs at densol.dev</a:t>
+            </a:r>
+            <a:endParaRPr lang="en-US" sz="1100" dirty="0"/>
+          </a:p>
+        </p:txBody>
+      </p:sp>
+      <p:sp>
+        <p:nvSpPr>
+          <p:cNvPr id="12" name="Text 10"/>
+          <p:cNvSpPr/>
+          <p:nvPr/>
+        </p:nvSpPr>
+        <p:spPr>
+          <a:xfrm>
+            <a:off x="640080" y="4114800"/>
+            <a:ext cx="7863840" cy="749808"/>
+          </a:xfrm>
+          <a:prstGeom prst="rect">
+            <a:avLst/>
+          </a:prstGeom>
+          <a:noFill/>
+          <a:ln/>
+        </p:spPr>
+        <p:txBody>
+          <a:bodyPr wrap="square" lIns="0" tIns="0" rIns="0" bIns="0" rtlCol="0" anchor="ctr"/>
+          <a:lstStyle/>
+          <a:p>
+            <a:pPr algn="l" indent="0" marL="0">
+              <a:buNone/>
+            </a:pPr>
+            <a:r>
               <a:rPr lang="en-US" sz="1500" i="1" dirty="0">
                 <a:solidFill>
-                  <a:srgbClr val="7B8CAA"/>
+                  <a:srgbClr val="4B5563"/>
                 </a:solidFill>
                 <a:latin typeface="Calibri" pitchFamily="34" charset="0"/>
                 <a:ea typeface="Calibri" pitchFamily="34" charset="-122"/>
@@ -7789,7 +7008,7 @@
             <a:r>
               <a:rPr lang="en-US" sz="1500" i="1" dirty="0">
                 <a:solidFill>
-                  <a:srgbClr val="7B8CAA"/>
+                  <a:srgbClr val="4B5563"/>
                 </a:solidFill>
                 <a:latin typeface="Calibri" pitchFamily="34" charset="0"/>
                 <a:ea typeface="Calibri" pitchFamily="34" charset="-122"/>
@@ -7798,70 +7017,6 @@
               <a:t>you're leaving SOL on the table."</a:t>
             </a:r>
             <a:endParaRPr lang="en-US" sz="1500" dirty="0"/>
-          </a:p>
-        </p:txBody>
-      </p:sp>
-      <p:sp>
-        <p:nvSpPr>
-          <p:cNvPr id="12" name="Shape 10"/>
-          <p:cNvSpPr/>
-          <p:nvPr/>
-        </p:nvSpPr>
-        <p:spPr>
-          <a:xfrm>
-            <a:off x="0" y="4800600"/>
-            <a:ext cx="9144000" cy="342900"/>
-          </a:xfrm>
-          <a:prstGeom prst="rect">
-            <a:avLst/>
-          </a:prstGeom>
-          <a:solidFill>
-            <a:srgbClr val="14F195"/>
-          </a:solidFill>
-          <a:ln w="12700">
-            <a:solidFill>
-              <a:srgbClr val="14F195"/>
-            </a:solidFill>
-            <a:prstDash val="solid"/>
-          </a:ln>
-        </p:spPr>
-      </p:sp>
-      <p:sp>
-        <p:nvSpPr>
-          <p:cNvPr id="13" name="Text 11"/>
-          <p:cNvSpPr/>
-          <p:nvPr/>
-        </p:nvSpPr>
-        <p:spPr>
-          <a:xfrm>
-            <a:off x="0" y="4800600"/>
-            <a:ext cx="9144000" cy="342900"/>
-          </a:xfrm>
-          <a:prstGeom prst="rect">
-            <a:avLst/>
-          </a:prstGeom>
-          <a:noFill/>
-          <a:ln/>
-        </p:spPr>
-        <p:txBody>
-          <a:bodyPr wrap="square" lIns="0" tIns="0" rIns="0" bIns="0" rtlCol="0" anchor="ctr"/>
-          <a:lstStyle/>
-          <a:p>
-            <a:pPr algn="ctr" indent="0" marL="0">
-              <a:buNone/>
-            </a:pPr>
-            <a:r>
-              <a:rPr lang="en-US" sz="1300" b="1" dirty="0">
-                <a:solidFill>
-                  <a:srgbClr val="1A2035"/>
-                </a:solidFill>
-                <a:latin typeface="Calibri" pitchFamily="34" charset="0"/>
-                <a:ea typeface="Calibri" pitchFamily="34" charset="-122"/>
-                <a:cs typeface="Calibri" pitchFamily="34" charset="-120"/>
-              </a:rPr>
-              <a:t>densol  ·  Blockchain Hack Warsaw  ·  March 22, 2026</a:t>
-            </a:r>
-            <a:endParaRPr lang="en-US" sz="1300" dirty="0"/>
           </a:p>
         </p:txBody>
       </p:sp>
